--- a/docs/week01/week01_qemu_hello_course.pptx
+++ b/docs/week01/week01_qemu_hello_course.pptx
@@ -26,6 +26,11 @@
     <p:sldId id="274" r:id="rId25"/>
     <p:sldId id="275" r:id="rId26"/>
     <p:sldId id="276" r:id="rId27"/>
+    <p:sldId id="277" r:id="rId28"/>
+    <p:sldId id="278" r:id="rId29"/>
+    <p:sldId id="279" r:id="rId30"/>
+    <p:sldId id="280" r:id="rId31"/>
+    <p:sldId id="281" r:id="rId32"/>
   </p:sldIdLst>
   <p:sldSz cx="12191695" cy="6858000" type="screen4x3"/>
   <p:notesSz cx="6858000" cy="9144000"/>
@@ -3181,7 +3186,7 @@
                 </a:solidFill>
                 <a:latin typeface="Microsoft YaHei"/>
               </a:rPr>
-              <a:t>90 分钟单次课：从为什么学汇编到 QEMU Hello miniOS</a:t>
+              <a:t>单次连堂课：从为什么学汇编到 QEMU Hello miniOS</a:t>
             </a:r>
           </a:p>
         </p:txBody>
@@ -3312,7 +3317,7 @@
                 </a:solidFill>
                 <a:latin typeface="Microsoft YaHei"/>
               </a:rPr>
-              <a:t>板块三</a:t>
+              <a:t>板块二</a:t>
             </a:r>
           </a:p>
         </p:txBody>
@@ -3347,7 +3352,7 @@
                 </a:solidFill>
                 <a:latin typeface="Microsoft YaHei"/>
               </a:rPr>
-              <a:t>链接脚本先讲三件事</a:t>
+              <a:t>基础指令例子</a:t>
             </a:r>
           </a:p>
         </p:txBody>
@@ -3382,7 +3387,7 @@
                 </a:solidFill>
                 <a:latin typeface="Microsoft YaHei"/>
               </a:rPr>
-              <a:t>入口是谁、从哪个地址开始、各类内容放在哪里。</a:t>
+              <a:t>先用 r 编号讲硬件动作，再映射到 ABI 别名；GNU 汇编器同时接受 $sp/$ra 这类别名，$sp 就是 r3。</a:t>
             </a:r>
           </a:p>
         </p:txBody>
@@ -3479,15 +3484,12 @@
                 </a:solidFill>
                 <a:latin typeface="Consolas"/>
               </a:rPr>
-              <a:t>ENTRY(_start)
-SECTIONS
-{
-    . = 0x9000000000200000;
-    .text : { *(.text.boot) *(.text*) }
-    .rodata : { *(.rodata*) }
-    .data : { *(.data*) }
-    .bss : { *(.bss*) *(COMMON) }
-}</a:t>
+              <a:t>addi.d  r3, r3, -32       # sp = sp - 32
+st.d    r1, r3, 24        # 保存 ra
+ld.d    r1, r3, 24        # 恢复 ra
+bne     r12, r0, L        # r12 != 0 时跳转
+bl      func              # 调用函数，返回地址写入 r1/ra
+jirl    r0, r1, 0         # 返回到 ra 指向的位置</a:t>
             </a:r>
           </a:p>
         </p:txBody>
@@ -3583,7 +3585,7 @@
                 </a:solidFill>
                 <a:latin typeface="Microsoft YaHei"/>
               </a:rPr>
-              <a:t>操作系统平时帮你做了什么</a:t>
+              <a:t>编译流程，用到本实验里</a:t>
             </a:r>
           </a:p>
         </p:txBody>
@@ -3618,7 +3620,7 @@
                 </a:solidFill>
                 <a:latin typeface="Microsoft YaHei"/>
               </a:rPr>
-              <a:t>普通 C 程序能“写完就跑”，全靠操作系统在背后先把环境搭好。</a:t>
+              <a:t>第 1 周只需要说出每一步的作用。</a:t>
             </a:r>
           </a:p>
         </p:txBody>
@@ -3668,14 +3670,59 @@
       </p:sp>
       <p:sp>
         <p:nvSpPr>
-          <p:cNvPr id="6" name="TextBox 5"/>
+          <p:cNvPr id="6" name="Rounded Rectangle 5"/>
+          <p:cNvSpPr/>
+          <p:nvPr/>
+        </p:nvSpPr>
+        <p:spPr>
+          <a:xfrm>
+            <a:off x="566928" y="2148840"/>
+            <a:ext cx="2240280" cy="1600200"/>
+          </a:xfrm>
+          <a:prstGeom prst="roundRect">
+            <a:avLst/>
+          </a:prstGeom>
+          <a:solidFill>
+            <a:srgbClr val="FFFFFF"/>
+          </a:solidFill>
+          <a:ln>
+            <a:solidFill>
+              <a:srgbClr val="D8DDE6"/>
+            </a:solidFill>
+          </a:ln>
+        </p:spPr>
+        <p:style>
+          <a:lnRef idx="1">
+            <a:schemeClr val="accent1"/>
+          </a:lnRef>
+          <a:fillRef idx="3">
+            <a:schemeClr val="accent1"/>
+          </a:fillRef>
+          <a:effectRef idx="2">
+            <a:schemeClr val="accent1"/>
+          </a:effectRef>
+          <a:fontRef idx="minor">
+            <a:schemeClr val="lt1"/>
+          </a:fontRef>
+        </p:style>
+        <p:txBody>
+          <a:bodyPr rtlCol="0" anchor="ctr"/>
+          <a:lstStyle/>
+          <a:p>
+            <a:pPr algn="ctr"/>
+          </a:p>
+        </p:txBody>
+      </p:sp>
+      <p:sp>
+        <p:nvSpPr>
+          <p:cNvPr id="7" name="TextBox 6"/>
           <p:cNvSpPr txBox="1"/>
           <p:nvPr/>
         </p:nvSpPr>
         <p:spPr>
           <a:xfrm>
-            <a:off x="868680" y="1691640"/>
-            <a:ext cx="10469880" cy="4709160"/>
+            <a:off x="713232" y="2313432"/>
+            <a:ext cx="1947672" cy="292608"/>
           </a:xfrm>
           <a:prstGeom prst="rect">
             <a:avLst/>
@@ -3688,67 +3735,504 @@
           </a:bodyPr>
           <a:lstStyle/>
           <a:p>
-            <a:pPr>
-              <a:spcAft>
-                <a:spcPts val="900"/>
-              </a:spcAft>
-            </a:pPr>
-            <a:r>
-              <a:rPr sz="2000" b="0">
+            <a:pPr algn="ctr"/>
+            <a:r>
+              <a:rPr sz="1600" b="1">
+                <a:solidFill>
+                  <a:srgbClr val="2A7E4E"/>
+                </a:solidFill>
+                <a:latin typeface="Microsoft YaHei"/>
+              </a:rPr>
+              <a:t>.c/.S</a:t>
+            </a:r>
+          </a:p>
+        </p:txBody>
+      </p:sp>
+      <p:sp>
+        <p:nvSpPr>
+          <p:cNvPr id="8" name="TextBox 7"/>
+          <p:cNvSpPr txBox="1"/>
+          <p:nvPr/>
+        </p:nvSpPr>
+        <p:spPr>
+          <a:xfrm>
+            <a:off x="731520" y="2706624"/>
+            <a:ext cx="1911096" cy="749808"/>
+          </a:xfrm>
+          <a:prstGeom prst="rect">
+            <a:avLst/>
+          </a:prstGeom>
+          <a:noFill/>
+        </p:spPr>
+        <p:txBody>
+          <a:bodyPr wrap="square">
+            <a:spAutoFit/>
+          </a:bodyPr>
+          <a:lstStyle/>
+          <a:p>
+            <a:pPr algn="ctr"/>
+            <a:r>
+              <a:rPr sz="1300" b="0">
                 <a:solidFill>
                   <a:srgbClr val="22252B"/>
                 </a:solidFill>
                 <a:latin typeface="Microsoft YaHei"/>
               </a:rPr>
-              <a:t>帮你把程序加载到内存、分配好栈和堆，你的 C 代码打开就能跑。</a:t>
-            </a:r>
-          </a:p>
-          <a:p>
-            <a:pPr>
-              <a:spcAft>
-                <a:spcPts val="900"/>
-              </a:spcAft>
-            </a:pPr>
-            <a:r>
-              <a:rPr sz="1700" b="0">
+              <a:t>源代码
+C 和汇编</a:t>
+            </a:r>
+          </a:p>
+        </p:txBody>
+      </p:sp>
+      <p:sp>
+        <p:nvSpPr>
+          <p:cNvPr id="9" name="TextBox 8"/>
+          <p:cNvSpPr txBox="1"/>
+          <p:nvPr/>
+        </p:nvSpPr>
+        <p:spPr>
+          <a:xfrm>
+            <a:off x="2990088" y="2743200"/>
+            <a:ext cx="228600" cy="274320"/>
+          </a:xfrm>
+          <a:prstGeom prst="rect">
+            <a:avLst/>
+          </a:prstGeom>
+          <a:noFill/>
+        </p:spPr>
+        <p:txBody>
+          <a:bodyPr wrap="square">
+            <a:spAutoFit/>
+          </a:bodyPr>
+          <a:lstStyle/>
+          <a:p>
+            <a:pPr algn="ctr"/>
+            <a:r>
+              <a:rPr sz="2000" b="1">
+                <a:solidFill>
+                  <a:srgbClr val="5B6370"/>
+                </a:solidFill>
+                <a:latin typeface="Microsoft YaHei"/>
+              </a:rPr>
+              <a:t>→</a:t>
+            </a:r>
+          </a:p>
+        </p:txBody>
+      </p:sp>
+      <p:sp>
+        <p:nvSpPr>
+          <p:cNvPr id="10" name="Rounded Rectangle 9"/>
+          <p:cNvSpPr/>
+          <p:nvPr/>
+        </p:nvSpPr>
+        <p:spPr>
+          <a:xfrm>
+            <a:off x="3035808" y="2148840"/>
+            <a:ext cx="2240280" cy="1600200"/>
+          </a:xfrm>
+          <a:prstGeom prst="roundRect">
+            <a:avLst/>
+          </a:prstGeom>
+          <a:solidFill>
+            <a:srgbClr val="FFFFFF"/>
+          </a:solidFill>
+          <a:ln>
+            <a:solidFill>
+              <a:srgbClr val="D8DDE6"/>
+            </a:solidFill>
+          </a:ln>
+        </p:spPr>
+        <p:style>
+          <a:lnRef idx="1">
+            <a:schemeClr val="accent1"/>
+          </a:lnRef>
+          <a:fillRef idx="3">
+            <a:schemeClr val="accent1"/>
+          </a:fillRef>
+          <a:effectRef idx="2">
+            <a:schemeClr val="accent1"/>
+          </a:effectRef>
+          <a:fontRef idx="minor">
+            <a:schemeClr val="lt1"/>
+          </a:fontRef>
+        </p:style>
+        <p:txBody>
+          <a:bodyPr rtlCol="0" anchor="ctr"/>
+          <a:lstStyle/>
+          <a:p>
+            <a:pPr algn="ctr"/>
+          </a:p>
+        </p:txBody>
+      </p:sp>
+      <p:sp>
+        <p:nvSpPr>
+          <p:cNvPr id="11" name="TextBox 10"/>
+          <p:cNvSpPr txBox="1"/>
+          <p:nvPr/>
+        </p:nvSpPr>
+        <p:spPr>
+          <a:xfrm>
+            <a:off x="3182112" y="2313432"/>
+            <a:ext cx="1947672" cy="292608"/>
+          </a:xfrm>
+          <a:prstGeom prst="rect">
+            <a:avLst/>
+          </a:prstGeom>
+          <a:noFill/>
+        </p:spPr>
+        <p:txBody>
+          <a:bodyPr wrap="square">
+            <a:spAutoFit/>
+          </a:bodyPr>
+          <a:lstStyle/>
+          <a:p>
+            <a:pPr algn="ctr"/>
+            <a:r>
+              <a:rPr sz="1600" b="1">
+                <a:solidFill>
+                  <a:srgbClr val="1C53A0"/>
+                </a:solidFill>
+                <a:latin typeface="Microsoft YaHei"/>
+              </a:rPr>
+              <a:t>编译</a:t>
+            </a:r>
+          </a:p>
+        </p:txBody>
+      </p:sp>
+      <p:sp>
+        <p:nvSpPr>
+          <p:cNvPr id="12" name="TextBox 11"/>
+          <p:cNvSpPr txBox="1"/>
+          <p:nvPr/>
+        </p:nvSpPr>
+        <p:spPr>
+          <a:xfrm>
+            <a:off x="3200400" y="2706624"/>
+            <a:ext cx="1911096" cy="749808"/>
+          </a:xfrm>
+          <a:prstGeom prst="rect">
+            <a:avLst/>
+          </a:prstGeom>
+          <a:noFill/>
+        </p:spPr>
+        <p:txBody>
+          <a:bodyPr wrap="square">
+            <a:spAutoFit/>
+          </a:bodyPr>
+          <a:lstStyle/>
+          <a:p>
+            <a:pPr algn="ctr"/>
+            <a:r>
+              <a:rPr sz="1300" b="0">
                 <a:solidFill>
                   <a:srgbClr val="22252B"/>
                 </a:solidFill>
                 <a:latin typeface="Microsoft YaHei"/>
               </a:rPr>
-              <a:t>帮你管理多个程序同时运行（进程调度），你不用关心 CPU 什么时候轮到你。</a:t>
-            </a:r>
-          </a:p>
-          <a:p>
-            <a:pPr>
-              <a:spcAft>
-                <a:spcPts val="900"/>
-              </a:spcAft>
-            </a:pPr>
-            <a:r>
-              <a:rPr sz="1700" b="0">
+              <a:t>生成目标文件
+处理 include</a:t>
+            </a:r>
+          </a:p>
+        </p:txBody>
+      </p:sp>
+      <p:sp>
+        <p:nvSpPr>
+          <p:cNvPr id="13" name="TextBox 12"/>
+          <p:cNvSpPr txBox="1"/>
+          <p:nvPr/>
+        </p:nvSpPr>
+        <p:spPr>
+          <a:xfrm>
+            <a:off x="5458968" y="2743200"/>
+            <a:ext cx="228600" cy="274320"/>
+          </a:xfrm>
+          <a:prstGeom prst="rect">
+            <a:avLst/>
+          </a:prstGeom>
+          <a:noFill/>
+        </p:spPr>
+        <p:txBody>
+          <a:bodyPr wrap="square">
+            <a:spAutoFit/>
+          </a:bodyPr>
+          <a:lstStyle/>
+          <a:p>
+            <a:pPr algn="ctr"/>
+            <a:r>
+              <a:rPr sz="2000" b="1">
+                <a:solidFill>
+                  <a:srgbClr val="5B6370"/>
+                </a:solidFill>
+                <a:latin typeface="Microsoft YaHei"/>
+              </a:rPr>
+              <a:t>→</a:t>
+            </a:r>
+          </a:p>
+        </p:txBody>
+      </p:sp>
+      <p:sp>
+        <p:nvSpPr>
+          <p:cNvPr id="14" name="Rounded Rectangle 13"/>
+          <p:cNvSpPr/>
+          <p:nvPr/>
+        </p:nvSpPr>
+        <p:spPr>
+          <a:xfrm>
+            <a:off x="5504688" y="2148840"/>
+            <a:ext cx="2240280" cy="1600200"/>
+          </a:xfrm>
+          <a:prstGeom prst="roundRect">
+            <a:avLst/>
+          </a:prstGeom>
+          <a:solidFill>
+            <a:srgbClr val="FFFFFF"/>
+          </a:solidFill>
+          <a:ln>
+            <a:solidFill>
+              <a:srgbClr val="D8DDE6"/>
+            </a:solidFill>
+          </a:ln>
+        </p:spPr>
+        <p:style>
+          <a:lnRef idx="1">
+            <a:schemeClr val="accent1"/>
+          </a:lnRef>
+          <a:fillRef idx="3">
+            <a:schemeClr val="accent1"/>
+          </a:fillRef>
+          <a:effectRef idx="2">
+            <a:schemeClr val="accent1"/>
+          </a:effectRef>
+          <a:fontRef idx="minor">
+            <a:schemeClr val="lt1"/>
+          </a:fontRef>
+        </p:style>
+        <p:txBody>
+          <a:bodyPr rtlCol="0" anchor="ctr"/>
+          <a:lstStyle/>
+          <a:p>
+            <a:pPr algn="ctr"/>
+          </a:p>
+        </p:txBody>
+      </p:sp>
+      <p:sp>
+        <p:nvSpPr>
+          <p:cNvPr id="15" name="TextBox 14"/>
+          <p:cNvSpPr txBox="1"/>
+          <p:nvPr/>
+        </p:nvSpPr>
+        <p:spPr>
+          <a:xfrm>
+            <a:off x="5650992" y="2313432"/>
+            <a:ext cx="1947672" cy="292608"/>
+          </a:xfrm>
+          <a:prstGeom prst="rect">
+            <a:avLst/>
+          </a:prstGeom>
+          <a:noFill/>
+        </p:spPr>
+        <p:txBody>
+          <a:bodyPr wrap="square">
+            <a:spAutoFit/>
+          </a:bodyPr>
+          <a:lstStyle/>
+          <a:p>
+            <a:pPr algn="ctr"/>
+            <a:r>
+              <a:rPr sz="1600" b="1">
+                <a:solidFill>
+                  <a:srgbClr val="B85F22"/>
+                </a:solidFill>
+                <a:latin typeface="Microsoft YaHei"/>
+              </a:rPr>
+              <a:t>链接</a:t>
+            </a:r>
+          </a:p>
+        </p:txBody>
+      </p:sp>
+      <p:sp>
+        <p:nvSpPr>
+          <p:cNvPr id="16" name="TextBox 15"/>
+          <p:cNvSpPr txBox="1"/>
+          <p:nvPr/>
+        </p:nvSpPr>
+        <p:spPr>
+          <a:xfrm>
+            <a:off x="5669280" y="2706624"/>
+            <a:ext cx="1911096" cy="749808"/>
+          </a:xfrm>
+          <a:prstGeom prst="rect">
+            <a:avLst/>
+          </a:prstGeom>
+          <a:noFill/>
+        </p:spPr>
+        <p:txBody>
+          <a:bodyPr wrap="square">
+            <a:spAutoFit/>
+          </a:bodyPr>
+          <a:lstStyle/>
+          <a:p>
+            <a:pPr algn="ctr"/>
+            <a:r>
+              <a:rPr sz="1300" b="0">
                 <a:solidFill>
                   <a:srgbClr val="22252B"/>
                 </a:solidFill>
                 <a:latin typeface="Microsoft YaHei"/>
               </a:rPr>
-              <a:t>帮你把 printf、malloc 这些函数背后的系统调用接好，你才能直接调用。</a:t>
-            </a:r>
-          </a:p>
-          <a:p>
-            <a:pPr>
-              <a:spcAft>
-                <a:spcPts val="900"/>
-              </a:spcAft>
-            </a:pPr>
-            <a:r>
-              <a:rPr sz="2000" b="0">
+              <a:t>合成 ELF
+确定地址入口</a:t>
+            </a:r>
+          </a:p>
+        </p:txBody>
+      </p:sp>
+      <p:sp>
+        <p:nvSpPr>
+          <p:cNvPr id="17" name="TextBox 16"/>
+          <p:cNvSpPr txBox="1"/>
+          <p:nvPr/>
+        </p:nvSpPr>
+        <p:spPr>
+          <a:xfrm>
+            <a:off x="7927848" y="2743200"/>
+            <a:ext cx="228600" cy="274320"/>
+          </a:xfrm>
+          <a:prstGeom prst="rect">
+            <a:avLst/>
+          </a:prstGeom>
+          <a:noFill/>
+        </p:spPr>
+        <p:txBody>
+          <a:bodyPr wrap="square">
+            <a:spAutoFit/>
+          </a:bodyPr>
+          <a:lstStyle/>
+          <a:p>
+            <a:pPr algn="ctr"/>
+            <a:r>
+              <a:rPr sz="2000" b="1">
+                <a:solidFill>
+                  <a:srgbClr val="5B6370"/>
+                </a:solidFill>
+                <a:latin typeface="Microsoft YaHei"/>
+              </a:rPr>
+              <a:t>→</a:t>
+            </a:r>
+          </a:p>
+        </p:txBody>
+      </p:sp>
+      <p:sp>
+        <p:nvSpPr>
+          <p:cNvPr id="18" name="Rounded Rectangle 17"/>
+          <p:cNvSpPr/>
+          <p:nvPr/>
+        </p:nvSpPr>
+        <p:spPr>
+          <a:xfrm>
+            <a:off x="7973568" y="2148840"/>
+            <a:ext cx="2240280" cy="1600200"/>
+          </a:xfrm>
+          <a:prstGeom prst="roundRect">
+            <a:avLst/>
+          </a:prstGeom>
+          <a:solidFill>
+            <a:srgbClr val="FFFFFF"/>
+          </a:solidFill>
+          <a:ln>
+            <a:solidFill>
+              <a:srgbClr val="D8DDE6"/>
+            </a:solidFill>
+          </a:ln>
+        </p:spPr>
+        <p:style>
+          <a:lnRef idx="1">
+            <a:schemeClr val="accent1"/>
+          </a:lnRef>
+          <a:fillRef idx="3">
+            <a:schemeClr val="accent1"/>
+          </a:fillRef>
+          <a:effectRef idx="2">
+            <a:schemeClr val="accent1"/>
+          </a:effectRef>
+          <a:fontRef idx="minor">
+            <a:schemeClr val="lt1"/>
+          </a:fontRef>
+        </p:style>
+        <p:txBody>
+          <a:bodyPr rtlCol="0" anchor="ctr"/>
+          <a:lstStyle/>
+          <a:p>
+            <a:pPr algn="ctr"/>
+          </a:p>
+        </p:txBody>
+      </p:sp>
+      <p:sp>
+        <p:nvSpPr>
+          <p:cNvPr id="19" name="TextBox 18"/>
+          <p:cNvSpPr txBox="1"/>
+          <p:nvPr/>
+        </p:nvSpPr>
+        <p:spPr>
+          <a:xfrm>
+            <a:off x="8119872" y="2313432"/>
+            <a:ext cx="1947672" cy="292608"/>
+          </a:xfrm>
+          <a:prstGeom prst="rect">
+            <a:avLst/>
+          </a:prstGeom>
+          <a:noFill/>
+        </p:spPr>
+        <p:txBody>
+          <a:bodyPr wrap="square">
+            <a:spAutoFit/>
+          </a:bodyPr>
+          <a:lstStyle/>
+          <a:p>
+            <a:pPr algn="ctr"/>
+            <a:r>
+              <a:rPr sz="1600" b="1">
+                <a:solidFill>
+                  <a:srgbClr val="007482"/>
+                </a:solidFill>
+                <a:latin typeface="Microsoft YaHei"/>
+              </a:rPr>
+              <a:t>QEMU</a:t>
+            </a:r>
+          </a:p>
+        </p:txBody>
+      </p:sp>
+      <p:sp>
+        <p:nvSpPr>
+          <p:cNvPr id="20" name="TextBox 19"/>
+          <p:cNvSpPr txBox="1"/>
+          <p:nvPr/>
+        </p:nvSpPr>
+        <p:spPr>
+          <a:xfrm>
+            <a:off x="8138160" y="2706624"/>
+            <a:ext cx="1911096" cy="749808"/>
+          </a:xfrm>
+          <a:prstGeom prst="rect">
+            <a:avLst/>
+          </a:prstGeom>
+          <a:noFill/>
+        </p:spPr>
+        <p:txBody>
+          <a:bodyPr wrap="square">
+            <a:spAutoFit/>
+          </a:bodyPr>
+          <a:lstStyle/>
+          <a:p>
+            <a:pPr algn="ctr"/>
+            <a:r>
+              <a:rPr sz="1300" b="0">
                 <a:solidFill>
                   <a:srgbClr val="22252B"/>
                 </a:solidFill>
                 <a:latin typeface="Microsoft YaHei"/>
               </a:rPr>
-              <a:t>帮你管理磁盘文件、网络、显示器这些硬件，你只需要调用统一的接口。</a:t>
+              <a:t>加载内核
+开始执行</a:t>
             </a:r>
           </a:p>
         </p:txBody>
@@ -3844,14 +4328,49 @@
                 </a:solidFill>
                 <a:latin typeface="Microsoft YaHei"/>
               </a:rPr>
-              <a:t>普通程序和裸机程序的启动差异</a:t>
-            </a:r>
-          </a:p>
-        </p:txBody>
-      </p:sp>
-      <p:sp>
-        <p:nvSpPr>
-          <p:cNvPr id="4" name="Rectangle 3"/>
+              <a:t>Makefile 语法速览</a:t>
+            </a:r>
+          </a:p>
+        </p:txBody>
+      </p:sp>
+      <p:sp>
+        <p:nvSpPr>
+          <p:cNvPr id="4" name="TextBox 3"/>
+          <p:cNvSpPr txBox="1"/>
+          <p:nvPr/>
+        </p:nvSpPr>
+        <p:spPr>
+          <a:xfrm>
+            <a:off x="658368" y="1042415"/>
+            <a:ext cx="10881360" cy="320040"/>
+          </a:xfrm>
+          <a:prstGeom prst="rect">
+            <a:avLst/>
+          </a:prstGeom>
+          <a:noFill/>
+        </p:spPr>
+        <p:txBody>
+          <a:bodyPr wrap="square">
+            <a:spAutoFit/>
+          </a:bodyPr>
+          <a:lstStyle/>
+          <a:p>
+            <a:pPr algn="l"/>
+            <a:r>
+              <a:rPr sz="1400" b="0">
+                <a:solidFill>
+                  <a:srgbClr val="5B6370"/>
+                </a:solidFill>
+                <a:latin typeface="Microsoft YaHei"/>
+              </a:rPr>
+              <a:t>先认识目标/依赖/命令三段式，再看本项目 Makefile 是怎么用这些语法的。</a:t>
+            </a:r>
+          </a:p>
+        </p:txBody>
+      </p:sp>
+      <p:sp>
+        <p:nvSpPr>
+          <p:cNvPr id="5" name="Rectangle 4"/>
           <p:cNvSpPr/>
           <p:nvPr/>
         </p:nvSpPr>
@@ -3894,87 +4413,64 @@
       </p:sp>
       <p:sp>
         <p:nvSpPr>
-          <p:cNvPr id="5" name="TextBox 4"/>
-          <p:cNvSpPr txBox="1"/>
-          <p:nvPr/>
-        </p:nvSpPr>
-        <p:spPr>
-          <a:xfrm>
-            <a:off x="868680" y="1691640"/>
-            <a:ext cx="10469880" cy="4709160"/>
-          </a:xfrm>
-          <a:prstGeom prst="rect">
-            <a:avLst/>
-          </a:prstGeom>
-          <a:noFill/>
-        </p:spPr>
-        <p:txBody>
-          <a:bodyPr wrap="square">
-            <a:spAutoFit/>
-          </a:bodyPr>
-          <a:lstStyle/>
-          <a:p>
-            <a:pPr>
-              <a:spcAft>
-                <a:spcPts val="900"/>
-              </a:spcAft>
-            </a:pPr>
-            <a:r>
-              <a:rPr sz="2000" b="0">
-                <a:solidFill>
-                  <a:srgbClr val="22252B"/>
-                </a:solidFill>
-                <a:latin typeface="Microsoft YaHei"/>
-              </a:rPr>
-              <a:t>普通 Linux 程序：操作系统和 C 运行库准备运行环境。</a:t>
-            </a:r>
-          </a:p>
-          <a:p>
-            <a:pPr>
-              <a:spcAft>
-                <a:spcPts val="900"/>
-              </a:spcAft>
-            </a:pPr>
-            <a:r>
-              <a:rPr sz="1700" b="0">
-                <a:solidFill>
-                  <a:srgbClr val="22252B"/>
-                </a:solidFill>
-                <a:latin typeface="Microsoft YaHei"/>
-              </a:rPr>
-              <a:t>miniOS 裸机程序：没有 libc，没有操作系统帮忙调用 main。</a:t>
-            </a:r>
-          </a:p>
-          <a:p>
-            <a:pPr>
-              <a:spcAft>
-                <a:spcPts val="900"/>
-              </a:spcAft>
-            </a:pPr>
-            <a:r>
-              <a:rPr sz="2000" b="0">
-                <a:solidFill>
-                  <a:srgbClr val="22252B"/>
-                </a:solidFill>
-                <a:latin typeface="Microsoft YaHei"/>
-              </a:rPr>
-              <a:t>所以我们需要 _start、栈、链接脚本和串口输出。</a:t>
-            </a:r>
-          </a:p>
-          <a:p>
-            <a:pPr>
-              <a:spcAft>
-                <a:spcPts val="900"/>
-              </a:spcAft>
-            </a:pPr>
-            <a:r>
-              <a:rPr sz="2000" b="0">
-                <a:solidFill>
-                  <a:srgbClr val="22252B"/>
-                </a:solidFill>
-                <a:latin typeface="Microsoft YaHei"/>
-              </a:rPr>
-              <a:t>这正是第 1 周 Hello miniOS 的教学价值。</a:t>
+          <p:cNvPr id="6" name="Rounded Rectangle 5"/>
+          <p:cNvSpPr/>
+          <p:nvPr/>
+        </p:nvSpPr>
+        <p:spPr>
+          <a:xfrm>
+            <a:off x="749808" y="1600200"/>
+            <a:ext cx="10716768" cy="4645152"/>
+          </a:xfrm>
+          <a:prstGeom prst="roundRect">
+            <a:avLst/>
+          </a:prstGeom>
+          <a:solidFill>
+            <a:srgbClr val="20242C"/>
+          </a:solidFill>
+          <a:ln>
+            <a:solidFill>
+              <a:srgbClr val="20242C"/>
+            </a:solidFill>
+          </a:ln>
+        </p:spPr>
+        <p:style>
+          <a:lnRef idx="1">
+            <a:schemeClr val="accent1"/>
+          </a:lnRef>
+          <a:fillRef idx="3">
+            <a:schemeClr val="accent1"/>
+          </a:fillRef>
+          <a:effectRef idx="2">
+            <a:schemeClr val="accent1"/>
+          </a:effectRef>
+          <a:fontRef idx="minor">
+            <a:schemeClr val="lt1"/>
+          </a:fontRef>
+        </p:style>
+        <p:txBody>
+          <a:bodyPr rtlCol="0" anchor="ctr" wrap="square" lIns="182880" rIns="182880" tIns="146304"/>
+          <a:lstStyle/>
+          <a:p>
+            <a:pPr algn="ctr"/>
+            <a:r>
+              <a:rPr sz="1200" b="0">
+                <a:solidFill>
+                  <a:srgbClr val="EEF1F6"/>
+                </a:solidFill>
+                <a:latin typeface="Consolas"/>
+              </a:rPr>
+              <a:t># Makefile 最小语法结构（通用示例，不是本项目代码）
+目标: 依赖1 依赖2
+	命令              # 命令前必须是 Tab，不能是空格
+# 例子：把 hello.c 编译成 hello.o
+hello.o: hello.c
+	gcc -c hello.c -o hello.o
+CC := gcc            # := 立即展开赋值
+CFLAGS ?= -Wall       # ?= 只在变量还没被设置时才赋值
+.PHONY: clean         # 声明伪目标，clean 不是一个真实文件
+clean:
+	rm -f *.o</a:t>
             </a:r>
           </a:p>
         </p:txBody>
@@ -4035,7 +4531,7 @@
                 </a:solidFill>
                 <a:latin typeface="Microsoft YaHei"/>
               </a:rPr>
-              <a:t>板块四</a:t>
+              <a:t>板块三</a:t>
             </a:r>
           </a:p>
         </p:txBody>
@@ -4070,14 +4566,49 @@
                 </a:solidFill>
                 <a:latin typeface="Microsoft YaHei"/>
               </a:rPr>
-              <a:t>第 1 周核心文件</a:t>
-            </a:r>
-          </a:p>
-        </p:txBody>
-      </p:sp>
-      <p:sp>
-        <p:nvSpPr>
-          <p:cNvPr id="4" name="Rectangle 3"/>
+              <a:t>Makefile 的核心含义</a:t>
+            </a:r>
+          </a:p>
+        </p:txBody>
+      </p:sp>
+      <p:sp>
+        <p:nvSpPr>
+          <p:cNvPr id="4" name="TextBox 3"/>
+          <p:cNvSpPr txBox="1"/>
+          <p:nvPr/>
+        </p:nvSpPr>
+        <p:spPr>
+          <a:xfrm>
+            <a:off x="658368" y="1042415"/>
+            <a:ext cx="10881360" cy="320040"/>
+          </a:xfrm>
+          <a:prstGeom prst="rect">
+            <a:avLst/>
+          </a:prstGeom>
+          <a:noFill/>
+        </p:spPr>
+        <p:txBody>
+          <a:bodyPr wrap="square">
+            <a:spAutoFit/>
+          </a:bodyPr>
+          <a:lstStyle/>
+          <a:p>
+            <a:pPr algn="l"/>
+            <a:r>
+              <a:rPr sz="1400" b="0">
+                <a:solidFill>
+                  <a:srgbClr val="5B6370"/>
+                </a:solidFill>
+                <a:latin typeface="Microsoft YaHei"/>
+              </a:rPr>
+              <a:t>不能用宿主机 x86_64 gcc 冒充 LoongArch 工具链。</a:t>
+            </a:r>
+          </a:p>
+        </p:txBody>
+      </p:sp>
+      <p:sp>
+        <p:nvSpPr>
+          <p:cNvPr id="5" name="Rectangle 4"/>
           <p:cNvSpPr/>
           <p:nvPr/>
         </p:nvSpPr>
@@ -4120,119 +4651,59 @@
       </p:sp>
       <p:sp>
         <p:nvSpPr>
-          <p:cNvPr id="5" name="TextBox 4"/>
-          <p:cNvSpPr txBox="1"/>
-          <p:nvPr/>
-        </p:nvSpPr>
-        <p:spPr>
-          <a:xfrm>
-            <a:off x="868680" y="1691640"/>
-            <a:ext cx="10469880" cy="4709160"/>
-          </a:xfrm>
-          <a:prstGeom prst="rect">
-            <a:avLst/>
-          </a:prstGeom>
-          <a:noFill/>
-        </p:spPr>
-        <p:txBody>
-          <a:bodyPr wrap="square">
-            <a:spAutoFit/>
-          </a:bodyPr>
-          <a:lstStyle/>
-          <a:p>
-            <a:pPr>
-              <a:spcAft>
-                <a:spcPts val="900"/>
-              </a:spcAft>
-            </a:pPr>
-            <a:r>
-              <a:rPr sz="1700" b="0">
-                <a:solidFill>
-                  <a:srgbClr val="22252B"/>
-                </a:solidFill>
-                <a:latin typeface="Microsoft YaHei"/>
-              </a:rPr>
-              <a:t>boot/start.S：启动入口，设置栈，跳转 kernel_main。</a:t>
-            </a:r>
-          </a:p>
-          <a:p>
-            <a:pPr>
-              <a:spcAft>
-                <a:spcPts val="900"/>
-              </a:spcAft>
-            </a:pPr>
-            <a:r>
-              <a:rPr sz="2000" b="0">
-                <a:solidFill>
-                  <a:srgbClr val="22252B"/>
-                </a:solidFill>
-                <a:latin typeface="Microsoft YaHei"/>
-              </a:rPr>
-              <a:t>kernel/linker.ld：规定入口地址和段布局。</a:t>
-            </a:r>
-          </a:p>
-          <a:p>
-            <a:pPr>
-              <a:spcAft>
-                <a:spcPts val="900"/>
-              </a:spcAft>
-            </a:pPr>
-            <a:r>
-              <a:rPr sz="2000" b="0">
-                <a:solidFill>
-                  <a:srgbClr val="22252B"/>
-                </a:solidFill>
-                <a:latin typeface="Microsoft YaHei"/>
-              </a:rPr>
-              <a:t>kernel/main.c：C 语言内核入口，调用 printk。</a:t>
-            </a:r>
-          </a:p>
-          <a:p>
-            <a:pPr>
-              <a:spcAft>
-                <a:spcPts val="900"/>
-              </a:spcAft>
-            </a:pPr>
-            <a:r>
-              <a:rPr sz="2000" b="0">
-                <a:solidFill>
-                  <a:srgbClr val="22252B"/>
-                </a:solidFill>
-                <a:latin typeface="Microsoft YaHei"/>
-              </a:rPr>
-              <a:t>kernel/printk.c：最小字符串输出。</a:t>
-            </a:r>
-          </a:p>
-          <a:p>
-            <a:pPr>
-              <a:spcAft>
-                <a:spcPts val="900"/>
-              </a:spcAft>
-            </a:pPr>
-            <a:r>
-              <a:rPr sz="1700" b="0">
-                <a:solidFill>
-                  <a:srgbClr val="22252B"/>
-                </a:solidFill>
-                <a:latin typeface="Microsoft YaHei"/>
-              </a:rPr>
-              <a:t>include/printk.h、include/uart.h：函数原型和 UART 地址。</a:t>
-            </a:r>
-          </a:p>
-          <a:p>
-            <a:pPr>
-              <a:spcAft>
-                <a:spcPts val="900"/>
-              </a:spcAft>
-            </a:pPr>
-            <a:r>
-              <a:rPr sz="2000" b="0">
-                <a:solidFill>
-                  <a:srgbClr val="22252B"/>
-                </a:solidFill>
-                <a:latin typeface="Microsoft YaHei"/>
-              </a:rPr>
-              <a:t>Makefile：编译、运行和清理命令。</a:t>
+          <p:cNvPr id="6" name="Rounded Rectangle 5"/>
+          <p:cNvSpPr/>
+          <p:nvPr/>
+        </p:nvSpPr>
+        <p:spPr>
+          <a:xfrm>
+            <a:off x="749808" y="1600200"/>
+            <a:ext cx="10716768" cy="4645152"/>
+          </a:xfrm>
+          <a:prstGeom prst="roundRect">
+            <a:avLst/>
+          </a:prstGeom>
+          <a:solidFill>
+            <a:srgbClr val="20242C"/>
+          </a:solidFill>
+          <a:ln>
+            <a:solidFill>
+              <a:srgbClr val="20242C"/>
+            </a:solidFill>
+          </a:ln>
+        </p:spPr>
+        <p:style>
+          <a:lnRef idx="1">
+            <a:schemeClr val="accent1"/>
+          </a:lnRef>
+          <a:fillRef idx="3">
+            <a:schemeClr val="accent1"/>
+          </a:fillRef>
+          <a:effectRef idx="2">
+            <a:schemeClr val="accent1"/>
+          </a:effectRef>
+          <a:fontRef idx="minor">
+            <a:schemeClr val="lt1"/>
+          </a:fontRef>
+        </p:style>
+        <p:txBody>
+          <a:bodyPr rtlCol="0" anchor="ctr" wrap="square" lIns="182880" rIns="182880" tIns="146304"/>
+          <a:lstStyle/>
+          <a:p>
+            <a:pPr algn="ctr"/>
+            <a:r>
+              <a:rPr sz="1300" b="0">
+                <a:solidFill>
+                  <a:srgbClr val="EEF1F6"/>
+                </a:solidFill>
+                <a:latin typeface="Consolas"/>
+              </a:rPr>
+              <a:t>CROSS_COMPILE ?= loongarch64-linux-gnu-
+CC      := $(CROSS_COMPILE)gcc
+OBJCOPY := $(CROSS_COMPILE)objcopy
+QEMU    ?= qemu-system-loongarch64
+TARGET  := build/minios.elf
+LDFLAGS := -T kernel/linker.ld -nostdlib -static</a:t>
             </a:r>
           </a:p>
         </p:txBody>
@@ -4293,7 +4764,7 @@
                 </a:solidFill>
                 <a:latin typeface="Microsoft YaHei"/>
               </a:rPr>
-              <a:t>板块四</a:t>
+              <a:t>板块三</a:t>
             </a:r>
           </a:p>
         </p:txBody>
@@ -4328,7 +4799,7 @@
                 </a:solidFill>
                 <a:latin typeface="Microsoft YaHei"/>
               </a:rPr>
-              <a:t>boot/start.S 主路径逐行讲解</a:t>
+              <a:t>链接脚本先讲三件事</a:t>
             </a:r>
           </a:p>
         </p:txBody>
@@ -4363,7 +4834,7 @@
                 </a:solidFill>
                 <a:latin typeface="Microsoft YaHei"/>
               </a:rPr>
-              <a:t>这是 miniOS 里真实的 boot/start.S 主路径，不是教学示意代码。</a:t>
+              <a:t>入口是谁、从哪个地址开始、各类内容放在哪里。</a:t>
             </a:r>
           </a:p>
         </p:txBody>
@@ -4419,8 +4890,8 @@
         </p:nvSpPr>
         <p:spPr>
           <a:xfrm>
-            <a:off x="640080" y="1600200"/>
-            <a:ext cx="6035040" cy="4645152"/>
+            <a:off x="749808" y="1600200"/>
+            <a:ext cx="10716768" cy="4645152"/>
           </a:xfrm>
           <a:prstGeom prst="roundRect">
             <a:avLst/>
@@ -4449,130 +4920,26 @@
           </a:fontRef>
         </p:style>
         <p:txBody>
-          <a:bodyPr rtlCol="0" anchor="ctr" wrap="square" lIns="164592" rIns="164592" tIns="128016"/>
+          <a:bodyPr rtlCol="0" anchor="ctr" wrap="square" lIns="182880" rIns="182880" tIns="146304"/>
           <a:lstStyle/>
           <a:p>
             <a:pPr algn="ctr"/>
             <a:r>
-              <a:rPr sz="1200" b="0">
+              <a:rPr sz="1300" b="0">
                 <a:solidFill>
                   <a:srgbClr val="EEF1F6"/>
                 </a:solidFill>
                 <a:latin typeface="Consolas"/>
               </a:rPr>
-              <a:t>    .section .text.boot, "ax"
-    .globl _start
-_start:
-    # 设置内核栈，$sp 是 r3 的 ABI 别名
-    la.global   $sp, boot_stack_top
-    # 进入 C 语言内核主函数
-    bl          kernel_main
-halt:
-    idle        0
-    b           halt</a:t>
-            </a:r>
-          </a:p>
-        </p:txBody>
-      </p:sp>
-      <p:sp>
-        <p:nvSpPr>
-          <p:cNvPr id="7" name="TextBox 6"/>
-          <p:cNvSpPr txBox="1"/>
-          <p:nvPr/>
-        </p:nvSpPr>
-        <p:spPr>
-          <a:xfrm>
-            <a:off x="6858000" y="1691640"/>
-            <a:ext cx="4709160" cy="4526280"/>
-          </a:xfrm>
-          <a:prstGeom prst="rect">
-            <a:avLst/>
-          </a:prstGeom>
-          <a:noFill/>
-        </p:spPr>
-        <p:txBody>
-          <a:bodyPr wrap="square">
-            <a:spAutoFit/>
-          </a:bodyPr>
-          <a:lstStyle/>
-          <a:p>
-            <a:pPr>
-              <a:spcAft>
-                <a:spcPts val="800"/>
-              </a:spcAft>
-            </a:pPr>
-            <a:r>
-              <a:rPr sz="1400" b="0">
-                <a:solidFill>
-                  <a:srgbClr val="22252B"/>
-                </a:solidFill>
-                <a:latin typeface="Microsoft YaHei"/>
-              </a:rPr>
-              <a:t>① .section .text.boot 把这段代码放到链接脚本指定的启动区域，保证它在最前面。</a:t>
-            </a:r>
-          </a:p>
-          <a:p>
-            <a:pPr>
-              <a:spcAft>
-                <a:spcPts val="800"/>
-              </a:spcAft>
-            </a:pPr>
-            <a:r>
-              <a:rPr sz="1400" b="0">
-                <a:solidFill>
-                  <a:srgbClr val="22252B"/>
-                </a:solidFill>
-                <a:latin typeface="Microsoft YaHei"/>
-              </a:rPr>
-              <a:t>② .globl _start 让链接器能找到这个入口符号，对应链接脚本里的 ENTRY(_start)。</a:t>
-            </a:r>
-          </a:p>
-          <a:p>
-            <a:pPr>
-              <a:spcAft>
-                <a:spcPts val="800"/>
-              </a:spcAft>
-            </a:pPr>
-            <a:r>
-              <a:rPr sz="1400" b="0">
-                <a:solidFill>
-                  <a:srgbClr val="22252B"/>
-                </a:solidFill>
-                <a:latin typeface="Microsoft YaHei"/>
-              </a:rPr>
-              <a:t>③ la.global $sp, boot_stack_top：CPU 上电后 $sp 是垃圾值，必须先指向预留的栈顶。</a:t>
-            </a:r>
-          </a:p>
-          <a:p>
-            <a:pPr>
-              <a:spcAft>
-                <a:spcPts val="800"/>
-              </a:spcAft>
-            </a:pPr>
-            <a:r>
-              <a:rPr sz="1400" b="0">
-                <a:solidFill>
-                  <a:srgbClr val="22252B"/>
-                </a:solidFill>
-                <a:latin typeface="Microsoft YaHei"/>
-              </a:rPr>
-              <a:t>④ bl kernel_main：调用 C 函数，同时把返回地址写入 $ra——但 kernel_main 不会返回。</a:t>
-            </a:r>
-          </a:p>
-          <a:p>
-            <a:pPr>
-              <a:spcAft>
-                <a:spcPts val="800"/>
-              </a:spcAft>
-            </a:pPr>
-            <a:r>
-              <a:rPr sz="1400" b="0">
-                <a:solidFill>
-                  <a:srgbClr val="22252B"/>
-                </a:solidFill>
-                <a:latin typeface="Microsoft YaHei"/>
-              </a:rPr>
-              <a:t>⑤ halt 循环：防止 kernel_main 意外返回后，CPU 从未知内存继续取指执行。</a:t>
+              <a:t>ENTRY(_start)
+SECTIONS
+{
+    . = 0x9000000000200000;
+    .text : { *(.text.boot) *(.text*) }
+    .rodata : { *(.rodata*) }
+    .data : { *(.data*) }
+    .bss : { *(.bss*) *(COMMON) }
+}</a:t>
             </a:r>
           </a:p>
         </p:txBody>
@@ -4633,7 +5000,7 @@
                 </a:solidFill>
                 <a:latin typeface="Microsoft YaHei"/>
               </a:rPr>
-              <a:t>板块四</a:t>
+              <a:t>板块三</a:t>
             </a:r>
           </a:p>
         </p:txBody>
@@ -4668,7 +5035,7 @@
                 </a:solidFill>
                 <a:latin typeface="Microsoft YaHei"/>
               </a:rPr>
-              <a:t>建议第 1 周使用的最小 kernel_main</a:t>
+              <a:t>操作系统平时帮你做了什么</a:t>
             </a:r>
           </a:p>
         </p:txBody>
@@ -4703,7 +5070,7 @@
                 </a:solidFill>
                 <a:latin typeface="Microsoft YaHei"/>
               </a:rPr>
-              <a:t>当前 master 有第 2 周检查代码；课堂先抽出这条最小路径。</a:t>
+              <a:t>普通 C 程序能“写完就跑”，全靠操作系统在背后先把环境搭好。</a:t>
             </a:r>
           </a:p>
         </p:txBody>
@@ -4753,61 +5120,87 @@
       </p:sp>
       <p:sp>
         <p:nvSpPr>
-          <p:cNvPr id="6" name="Rounded Rectangle 5"/>
-          <p:cNvSpPr/>
-          <p:nvPr/>
-        </p:nvSpPr>
-        <p:spPr>
-          <a:xfrm>
-            <a:off x="749808" y="1600200"/>
-            <a:ext cx="10716768" cy="4645152"/>
-          </a:xfrm>
-          <a:prstGeom prst="roundRect">
-            <a:avLst/>
-          </a:prstGeom>
-          <a:solidFill>
-            <a:srgbClr val="20242C"/>
-          </a:solidFill>
-          <a:ln>
-            <a:solidFill>
-              <a:srgbClr val="20242C"/>
-            </a:solidFill>
-          </a:ln>
-        </p:spPr>
-        <p:style>
-          <a:lnRef idx="1">
-            <a:schemeClr val="accent1"/>
-          </a:lnRef>
-          <a:fillRef idx="3">
-            <a:schemeClr val="accent1"/>
-          </a:fillRef>
-          <a:effectRef idx="2">
-            <a:schemeClr val="accent1"/>
-          </a:effectRef>
-          <a:fontRef idx="minor">
-            <a:schemeClr val="lt1"/>
-          </a:fontRef>
-        </p:style>
-        <p:txBody>
-          <a:bodyPr rtlCol="0" anchor="ctr" wrap="square" lIns="182880" rIns="182880" tIns="146304"/>
-          <a:lstStyle/>
-          <a:p>
-            <a:pPr algn="ctr"/>
-            <a:r>
-              <a:rPr sz="1300" b="0">
-                <a:solidFill>
-                  <a:srgbClr val="EEF1F6"/>
-                </a:solidFill>
-                <a:latin typeface="Consolas"/>
-              </a:rPr>
-              <a:t>#include "printk.h"
-void kernel_main(void)
-{
-    printk("Hello miniOS on LoongArch64\n");
-    while (1) {
-        __asm__ volatile("idle 0");
-    }
-}</a:t>
+          <p:cNvPr id="6" name="TextBox 5"/>
+          <p:cNvSpPr txBox="1"/>
+          <p:nvPr/>
+        </p:nvSpPr>
+        <p:spPr>
+          <a:xfrm>
+            <a:off x="868680" y="1691640"/>
+            <a:ext cx="10469880" cy="4709160"/>
+          </a:xfrm>
+          <a:prstGeom prst="rect">
+            <a:avLst/>
+          </a:prstGeom>
+          <a:noFill/>
+        </p:spPr>
+        <p:txBody>
+          <a:bodyPr wrap="square">
+            <a:spAutoFit/>
+          </a:bodyPr>
+          <a:lstStyle/>
+          <a:p>
+            <a:pPr>
+              <a:spcAft>
+                <a:spcPts val="900"/>
+              </a:spcAft>
+            </a:pPr>
+            <a:r>
+              <a:rPr sz="2000" b="0">
+                <a:solidFill>
+                  <a:srgbClr val="22252B"/>
+                </a:solidFill>
+                <a:latin typeface="Microsoft YaHei"/>
+              </a:rPr>
+              <a:t>帮你把程序加载到内存、分配好栈和堆，你的 C 代码打开就能跑。</a:t>
+            </a:r>
+          </a:p>
+          <a:p>
+            <a:pPr>
+              <a:spcAft>
+                <a:spcPts val="900"/>
+              </a:spcAft>
+            </a:pPr>
+            <a:r>
+              <a:rPr sz="1700" b="0">
+                <a:solidFill>
+                  <a:srgbClr val="22252B"/>
+                </a:solidFill>
+                <a:latin typeface="Microsoft YaHei"/>
+              </a:rPr>
+              <a:t>帮你管理多个程序同时运行（进程调度），你不用关心 CPU 什么时候轮到你。</a:t>
+            </a:r>
+          </a:p>
+          <a:p>
+            <a:pPr>
+              <a:spcAft>
+                <a:spcPts val="900"/>
+              </a:spcAft>
+            </a:pPr>
+            <a:r>
+              <a:rPr sz="1700" b="0">
+                <a:solidFill>
+                  <a:srgbClr val="22252B"/>
+                </a:solidFill>
+                <a:latin typeface="Microsoft YaHei"/>
+              </a:rPr>
+              <a:t>帮你把 printf、malloc 这些函数背后的系统调用接好，你才能直接调用。</a:t>
+            </a:r>
+          </a:p>
+          <a:p>
+            <a:pPr>
+              <a:spcAft>
+                <a:spcPts val="900"/>
+              </a:spcAft>
+            </a:pPr>
+            <a:r>
+              <a:rPr sz="2000" b="0">
+                <a:solidFill>
+                  <a:srgbClr val="22252B"/>
+                </a:solidFill>
+                <a:latin typeface="Microsoft YaHei"/>
+              </a:rPr>
+              <a:t>帮你管理磁盘文件、网络、显示器这些硬件，你只需要调用统一的接口。</a:t>
             </a:r>
           </a:p>
         </p:txBody>
@@ -4868,7 +5261,7 @@
                 </a:solidFill>
                 <a:latin typeface="Microsoft YaHei"/>
               </a:rPr>
-              <a:t>板块四</a:t>
+              <a:t>板块三</a:t>
             </a:r>
           </a:p>
         </p:txBody>
@@ -4903,49 +5296,14 @@
                 </a:solidFill>
                 <a:latin typeface="Microsoft YaHei"/>
               </a:rPr>
-              <a:t>printk 到 UART</a:t>
-            </a:r>
-          </a:p>
-        </p:txBody>
-      </p:sp>
-      <p:sp>
-        <p:nvSpPr>
-          <p:cNvPr id="4" name="TextBox 3"/>
-          <p:cNvSpPr txBox="1"/>
-          <p:nvPr/>
-        </p:nvSpPr>
-        <p:spPr>
-          <a:xfrm>
-            <a:off x="658368" y="1042415"/>
-            <a:ext cx="10881360" cy="320040"/>
-          </a:xfrm>
-          <a:prstGeom prst="rect">
-            <a:avLst/>
-          </a:prstGeom>
-          <a:noFill/>
-        </p:spPr>
-        <p:txBody>
-          <a:bodyPr wrap="square">
-            <a:spAutoFit/>
-          </a:bodyPr>
-          <a:lstStyle/>
-          <a:p>
-            <a:pPr algn="l"/>
-            <a:r>
-              <a:rPr sz="1400" b="0">
-                <a:solidFill>
-                  <a:srgbClr val="5B6370"/>
-                </a:solidFill>
-                <a:latin typeface="Microsoft YaHei"/>
-              </a:rPr>
-              <a:t>UART0_BASE 是 QEMU virt 平台地址，不代表 2K0300 开发板地址。</a:t>
-            </a:r>
-          </a:p>
-        </p:txBody>
-      </p:sp>
-      <p:sp>
-        <p:nvSpPr>
-          <p:cNvPr id="5" name="Rectangle 4"/>
+              <a:t>普通程序和裸机程序的启动差异</a:t>
+            </a:r>
+          </a:p>
+        </p:txBody>
+      </p:sp>
+      <p:sp>
+        <p:nvSpPr>
+          <p:cNvPr id="4" name="Rectangle 3"/>
           <p:cNvSpPr/>
           <p:nvPr/>
         </p:nvSpPr>
@@ -4988,65 +5346,87 @@
       </p:sp>
       <p:sp>
         <p:nvSpPr>
-          <p:cNvPr id="6" name="Rounded Rectangle 5"/>
-          <p:cNvSpPr/>
-          <p:nvPr/>
-        </p:nvSpPr>
-        <p:spPr>
-          <a:xfrm>
-            <a:off x="749808" y="1600200"/>
-            <a:ext cx="10716768" cy="4645152"/>
-          </a:xfrm>
-          <a:prstGeom prst="roundRect">
-            <a:avLst/>
-          </a:prstGeom>
-          <a:solidFill>
-            <a:srgbClr val="20242C"/>
-          </a:solidFill>
-          <a:ln>
-            <a:solidFill>
-              <a:srgbClr val="20242C"/>
-            </a:solidFill>
-          </a:ln>
-        </p:spPr>
-        <p:style>
-          <a:lnRef idx="1">
-            <a:schemeClr val="accent1"/>
-          </a:lnRef>
-          <a:fillRef idx="3">
-            <a:schemeClr val="accent1"/>
-          </a:fillRef>
-          <a:effectRef idx="2">
-            <a:schemeClr val="accent1"/>
-          </a:effectRef>
-          <a:fontRef idx="minor">
-            <a:schemeClr val="lt1"/>
-          </a:fontRef>
-        </p:style>
-        <p:txBody>
-          <a:bodyPr rtlCol="0" anchor="ctr" wrap="square" lIns="182880" rIns="182880" tIns="146304"/>
-          <a:lstStyle/>
-          <a:p>
-            <a:pPr algn="ctr"/>
-            <a:r>
-              <a:rPr sz="1300" b="0">
-                <a:solidFill>
-                  <a:srgbClr val="EEF1F6"/>
-                </a:solidFill>
-                <a:latin typeface="Consolas"/>
-              </a:rPr>
-              <a:t>void uart_putc(char ch)
-{
-    volatile unsigned char *uart =
-        (volatile unsigned char *)UART0_BASE;
-    *uart = (unsigned char)ch;
-}
-void printk(const char *s)
-{
-    while (*s) {
-        uart_putc(*s++);
-    }
-}</a:t>
+          <p:cNvPr id="5" name="TextBox 4"/>
+          <p:cNvSpPr txBox="1"/>
+          <p:nvPr/>
+        </p:nvSpPr>
+        <p:spPr>
+          <a:xfrm>
+            <a:off x="868680" y="1691640"/>
+            <a:ext cx="10469880" cy="4709160"/>
+          </a:xfrm>
+          <a:prstGeom prst="rect">
+            <a:avLst/>
+          </a:prstGeom>
+          <a:noFill/>
+        </p:spPr>
+        <p:txBody>
+          <a:bodyPr wrap="square">
+            <a:spAutoFit/>
+          </a:bodyPr>
+          <a:lstStyle/>
+          <a:p>
+            <a:pPr>
+              <a:spcAft>
+                <a:spcPts val="900"/>
+              </a:spcAft>
+            </a:pPr>
+            <a:r>
+              <a:rPr sz="2000" b="0">
+                <a:solidFill>
+                  <a:srgbClr val="22252B"/>
+                </a:solidFill>
+                <a:latin typeface="Microsoft YaHei"/>
+              </a:rPr>
+              <a:t>普通 Linux 程序：操作系统和 C 运行库准备运行环境。</a:t>
+            </a:r>
+          </a:p>
+          <a:p>
+            <a:pPr>
+              <a:spcAft>
+                <a:spcPts val="900"/>
+              </a:spcAft>
+            </a:pPr>
+            <a:r>
+              <a:rPr sz="1700" b="0">
+                <a:solidFill>
+                  <a:srgbClr val="22252B"/>
+                </a:solidFill>
+                <a:latin typeface="Microsoft YaHei"/>
+              </a:rPr>
+              <a:t>miniOS 裸机程序：没有 libc，没有操作系统帮忙调用 main。</a:t>
+            </a:r>
+          </a:p>
+          <a:p>
+            <a:pPr>
+              <a:spcAft>
+                <a:spcPts val="900"/>
+              </a:spcAft>
+            </a:pPr>
+            <a:r>
+              <a:rPr sz="2000" b="0">
+                <a:solidFill>
+                  <a:srgbClr val="22252B"/>
+                </a:solidFill>
+                <a:latin typeface="Microsoft YaHei"/>
+              </a:rPr>
+              <a:t>所以我们需要 _start、栈、链接脚本和串口输出。</a:t>
+            </a:r>
+          </a:p>
+          <a:p>
+            <a:pPr>
+              <a:spcAft>
+                <a:spcPts val="900"/>
+              </a:spcAft>
+            </a:pPr>
+            <a:r>
+              <a:rPr sz="2000" b="0">
+                <a:solidFill>
+                  <a:srgbClr val="22252B"/>
+                </a:solidFill>
+                <a:latin typeface="Microsoft YaHei"/>
+              </a:rPr>
+              <a:t>这正是第 1 周 Hello miniOS 的教学价值。</a:t>
             </a:r>
           </a:p>
         </p:txBody>
@@ -5142,49 +5522,14 @@
                 </a:solidFill>
                 <a:latin typeface="Microsoft YaHei"/>
               </a:rPr>
-              <a:t>第 1 周最小运行链路</a:t>
-            </a:r>
-          </a:p>
-        </p:txBody>
-      </p:sp>
-      <p:sp>
-        <p:nvSpPr>
-          <p:cNvPr id="4" name="TextBox 3"/>
-          <p:cNvSpPr txBox="1"/>
-          <p:nvPr/>
-        </p:nvSpPr>
-        <p:spPr>
-          <a:xfrm>
-            <a:off x="658368" y="1042415"/>
-            <a:ext cx="10881360" cy="320040"/>
-          </a:xfrm>
-          <a:prstGeom prst="rect">
-            <a:avLst/>
-          </a:prstGeom>
-          <a:noFill/>
-        </p:spPr>
-        <p:txBody>
-          <a:bodyPr wrap="square">
-            <a:spAutoFit/>
-          </a:bodyPr>
-          <a:lstStyle/>
-          <a:p>
-            <a:pPr algn="l"/>
-            <a:r>
-              <a:rPr sz="1400" b="0">
-                <a:solidFill>
-                  <a:srgbClr val="5B6370"/>
-                </a:solidFill>
-                <a:latin typeface="Microsoft YaHei"/>
-              </a:rPr>
-              <a:t>这条链路跑通，才进入第 2 周。</a:t>
-            </a:r>
-          </a:p>
-        </p:txBody>
-      </p:sp>
-      <p:sp>
-        <p:nvSpPr>
-          <p:cNvPr id="5" name="Rectangle 4"/>
+              <a:t>第 1 周核心文件</a:t>
+            </a:r>
+          </a:p>
+        </p:txBody>
+      </p:sp>
+      <p:sp>
+        <p:nvSpPr>
+          <p:cNvPr id="4" name="Rectangle 3"/>
           <p:cNvSpPr/>
           <p:nvPr/>
         </p:nvSpPr>
@@ -5227,59 +5572,14 @@
       </p:sp>
       <p:sp>
         <p:nvSpPr>
-          <p:cNvPr id="6" name="Rounded Rectangle 5"/>
-          <p:cNvSpPr/>
-          <p:nvPr/>
-        </p:nvSpPr>
-        <p:spPr>
-          <a:xfrm>
-            <a:off x="566928" y="2148840"/>
-            <a:ext cx="1993392" cy="1600200"/>
-          </a:xfrm>
-          <a:prstGeom prst="roundRect">
-            <a:avLst/>
-          </a:prstGeom>
-          <a:solidFill>
-            <a:srgbClr val="FFFFFF"/>
-          </a:solidFill>
-          <a:ln>
-            <a:solidFill>
-              <a:srgbClr val="D8DDE6"/>
-            </a:solidFill>
-          </a:ln>
-        </p:spPr>
-        <p:style>
-          <a:lnRef idx="1">
-            <a:schemeClr val="accent1"/>
-          </a:lnRef>
-          <a:fillRef idx="3">
-            <a:schemeClr val="accent1"/>
-          </a:fillRef>
-          <a:effectRef idx="2">
-            <a:schemeClr val="accent1"/>
-          </a:effectRef>
-          <a:fontRef idx="minor">
-            <a:schemeClr val="lt1"/>
-          </a:fontRef>
-        </p:style>
-        <p:txBody>
-          <a:bodyPr rtlCol="0" anchor="ctr"/>
-          <a:lstStyle/>
-          <a:p>
-            <a:pPr algn="ctr"/>
-          </a:p>
-        </p:txBody>
-      </p:sp>
-      <p:sp>
-        <p:nvSpPr>
-          <p:cNvPr id="7" name="TextBox 6"/>
+          <p:cNvPr id="5" name="TextBox 4"/>
           <p:cNvSpPr txBox="1"/>
           <p:nvPr/>
         </p:nvSpPr>
         <p:spPr>
           <a:xfrm>
-            <a:off x="713232" y="2313432"/>
-            <a:ext cx="1700784" cy="292608"/>
+            <a:off x="868680" y="1691640"/>
+            <a:ext cx="10469880" cy="4709160"/>
           </a:xfrm>
           <a:prstGeom prst="rect">
             <a:avLst/>
@@ -5292,655 +5592,99 @@
           </a:bodyPr>
           <a:lstStyle/>
           <a:p>
-            <a:pPr algn="ctr"/>
-            <a:r>
-              <a:rPr sz="1600" b="1">
-                <a:solidFill>
-                  <a:srgbClr val="1C53A0"/>
-                </a:solidFill>
-                <a:latin typeface="Microsoft YaHei"/>
-              </a:rPr>
-              <a:t>make</a:t>
-            </a:r>
-          </a:p>
-        </p:txBody>
-      </p:sp>
-      <p:sp>
-        <p:nvSpPr>
-          <p:cNvPr id="8" name="TextBox 7"/>
-          <p:cNvSpPr txBox="1"/>
-          <p:nvPr/>
-        </p:nvSpPr>
-        <p:spPr>
-          <a:xfrm>
-            <a:off x="731520" y="2706624"/>
-            <a:ext cx="1664208" cy="749808"/>
-          </a:xfrm>
-          <a:prstGeom prst="rect">
-            <a:avLst/>
-          </a:prstGeom>
-          <a:noFill/>
-        </p:spPr>
-        <p:txBody>
-          <a:bodyPr wrap="square">
-            <a:spAutoFit/>
-          </a:bodyPr>
-          <a:lstStyle/>
-          <a:p>
-            <a:pPr algn="ctr"/>
-            <a:r>
-              <a:rPr sz="1300" b="0">
+            <a:pPr>
+              <a:spcAft>
+                <a:spcPts val="900"/>
+              </a:spcAft>
+            </a:pPr>
+            <a:r>
+              <a:rPr sz="1700" b="0">
                 <a:solidFill>
                   <a:srgbClr val="22252B"/>
                 </a:solidFill>
                 <a:latin typeface="Microsoft YaHei"/>
               </a:rPr>
-              <a:t>交叉编译
-生成 ELF</a:t>
-            </a:r>
-          </a:p>
-        </p:txBody>
-      </p:sp>
-      <p:sp>
-        <p:nvSpPr>
-          <p:cNvPr id="9" name="TextBox 8"/>
-          <p:cNvSpPr txBox="1"/>
-          <p:nvPr/>
-        </p:nvSpPr>
-        <p:spPr>
-          <a:xfrm>
-            <a:off x="2743200" y="2743200"/>
-            <a:ext cx="228600" cy="274320"/>
-          </a:xfrm>
-          <a:prstGeom prst="rect">
-            <a:avLst/>
-          </a:prstGeom>
-          <a:noFill/>
-        </p:spPr>
-        <p:txBody>
-          <a:bodyPr wrap="square">
-            <a:spAutoFit/>
-          </a:bodyPr>
-          <a:lstStyle/>
-          <a:p>
-            <a:pPr algn="ctr"/>
-            <a:r>
-              <a:rPr sz="2000" b="1">
-                <a:solidFill>
-                  <a:srgbClr val="5B6370"/>
-                </a:solidFill>
-                <a:latin typeface="Microsoft YaHei"/>
-              </a:rPr>
-              <a:t>→</a:t>
-            </a:r>
-          </a:p>
-        </p:txBody>
-      </p:sp>
-      <p:sp>
-        <p:nvSpPr>
-          <p:cNvPr id="10" name="Rounded Rectangle 9"/>
-          <p:cNvSpPr/>
-          <p:nvPr/>
-        </p:nvSpPr>
-        <p:spPr>
-          <a:xfrm>
-            <a:off x="2788920" y="2148840"/>
-            <a:ext cx="1993392" cy="1600200"/>
-          </a:xfrm>
-          <a:prstGeom prst="roundRect">
-            <a:avLst/>
-          </a:prstGeom>
-          <a:solidFill>
-            <a:srgbClr val="FFFFFF"/>
-          </a:solidFill>
-          <a:ln>
-            <a:solidFill>
-              <a:srgbClr val="D8DDE6"/>
-            </a:solidFill>
-          </a:ln>
-        </p:spPr>
-        <p:style>
-          <a:lnRef idx="1">
-            <a:schemeClr val="accent1"/>
-          </a:lnRef>
-          <a:fillRef idx="3">
-            <a:schemeClr val="accent1"/>
-          </a:fillRef>
-          <a:effectRef idx="2">
-            <a:schemeClr val="accent1"/>
-          </a:effectRef>
-          <a:fontRef idx="minor">
-            <a:schemeClr val="lt1"/>
-          </a:fontRef>
-        </p:style>
-        <p:txBody>
-          <a:bodyPr rtlCol="0" anchor="ctr"/>
-          <a:lstStyle/>
-          <a:p>
-            <a:pPr algn="ctr"/>
-          </a:p>
-        </p:txBody>
-      </p:sp>
-      <p:sp>
-        <p:nvSpPr>
-          <p:cNvPr id="11" name="TextBox 10"/>
-          <p:cNvSpPr txBox="1"/>
-          <p:nvPr/>
-        </p:nvSpPr>
-        <p:spPr>
-          <a:xfrm>
-            <a:off x="2935224" y="2313432"/>
-            <a:ext cx="1700784" cy="292608"/>
-          </a:xfrm>
-          <a:prstGeom prst="rect">
-            <a:avLst/>
-          </a:prstGeom>
-          <a:noFill/>
-        </p:spPr>
-        <p:txBody>
-          <a:bodyPr wrap="square">
-            <a:spAutoFit/>
-          </a:bodyPr>
-          <a:lstStyle/>
-          <a:p>
-            <a:pPr algn="ctr"/>
-            <a:r>
-              <a:rPr sz="1600" b="1">
-                <a:solidFill>
-                  <a:srgbClr val="007482"/>
-                </a:solidFill>
-                <a:latin typeface="Microsoft YaHei"/>
-              </a:rPr>
-              <a:t>QEMU</a:t>
-            </a:r>
-          </a:p>
-        </p:txBody>
-      </p:sp>
-      <p:sp>
-        <p:nvSpPr>
-          <p:cNvPr id="12" name="TextBox 11"/>
-          <p:cNvSpPr txBox="1"/>
-          <p:nvPr/>
-        </p:nvSpPr>
-        <p:spPr>
-          <a:xfrm>
-            <a:off x="2953512" y="2706624"/>
-            <a:ext cx="1664208" cy="749808"/>
-          </a:xfrm>
-          <a:prstGeom prst="rect">
-            <a:avLst/>
-          </a:prstGeom>
-          <a:noFill/>
-        </p:spPr>
-        <p:txBody>
-          <a:bodyPr wrap="square">
-            <a:spAutoFit/>
-          </a:bodyPr>
-          <a:lstStyle/>
-          <a:p>
-            <a:pPr algn="ctr"/>
-            <a:r>
-              <a:rPr sz="1300" b="0">
+              <a:t>boot/start.S：启动入口，设置栈，跳转 kernel_main。</a:t>
+            </a:r>
+          </a:p>
+          <a:p>
+            <a:pPr>
+              <a:spcAft>
+                <a:spcPts val="900"/>
+              </a:spcAft>
+            </a:pPr>
+            <a:r>
+              <a:rPr sz="2000" b="0">
                 <a:solidFill>
                   <a:srgbClr val="22252B"/>
                 </a:solidFill>
                 <a:latin typeface="Microsoft YaHei"/>
               </a:rPr>
-              <a:t>模拟 virt
-加载内核</a:t>
-            </a:r>
-          </a:p>
-        </p:txBody>
-      </p:sp>
-      <p:sp>
-        <p:nvSpPr>
-          <p:cNvPr id="13" name="TextBox 12"/>
-          <p:cNvSpPr txBox="1"/>
-          <p:nvPr/>
-        </p:nvSpPr>
-        <p:spPr>
-          <a:xfrm>
-            <a:off x="4965192" y="2743200"/>
-            <a:ext cx="228600" cy="274320"/>
-          </a:xfrm>
-          <a:prstGeom prst="rect">
-            <a:avLst/>
-          </a:prstGeom>
-          <a:noFill/>
-        </p:spPr>
-        <p:txBody>
-          <a:bodyPr wrap="square">
-            <a:spAutoFit/>
-          </a:bodyPr>
-          <a:lstStyle/>
-          <a:p>
-            <a:pPr algn="ctr"/>
-            <a:r>
-              <a:rPr sz="2000" b="1">
-                <a:solidFill>
-                  <a:srgbClr val="5B6370"/>
-                </a:solidFill>
-                <a:latin typeface="Microsoft YaHei"/>
-              </a:rPr>
-              <a:t>→</a:t>
-            </a:r>
-          </a:p>
-        </p:txBody>
-      </p:sp>
-      <p:sp>
-        <p:nvSpPr>
-          <p:cNvPr id="14" name="Rounded Rectangle 13"/>
-          <p:cNvSpPr/>
-          <p:nvPr/>
-        </p:nvSpPr>
-        <p:spPr>
-          <a:xfrm>
-            <a:off x="5010912" y="2148840"/>
-            <a:ext cx="1993392" cy="1600200"/>
-          </a:xfrm>
-          <a:prstGeom prst="roundRect">
-            <a:avLst/>
-          </a:prstGeom>
-          <a:solidFill>
-            <a:srgbClr val="FFFFFF"/>
-          </a:solidFill>
-          <a:ln>
-            <a:solidFill>
-              <a:srgbClr val="D8DDE6"/>
-            </a:solidFill>
-          </a:ln>
-        </p:spPr>
-        <p:style>
-          <a:lnRef idx="1">
-            <a:schemeClr val="accent1"/>
-          </a:lnRef>
-          <a:fillRef idx="3">
-            <a:schemeClr val="accent1"/>
-          </a:fillRef>
-          <a:effectRef idx="2">
-            <a:schemeClr val="accent1"/>
-          </a:effectRef>
-          <a:fontRef idx="minor">
-            <a:schemeClr val="lt1"/>
-          </a:fontRef>
-        </p:style>
-        <p:txBody>
-          <a:bodyPr rtlCol="0" anchor="ctr"/>
-          <a:lstStyle/>
-          <a:p>
-            <a:pPr algn="ctr"/>
-          </a:p>
-        </p:txBody>
-      </p:sp>
-      <p:sp>
-        <p:nvSpPr>
-          <p:cNvPr id="15" name="TextBox 14"/>
-          <p:cNvSpPr txBox="1"/>
-          <p:nvPr/>
-        </p:nvSpPr>
-        <p:spPr>
-          <a:xfrm>
-            <a:off x="5157216" y="2313432"/>
-            <a:ext cx="1700784" cy="292608"/>
-          </a:xfrm>
-          <a:prstGeom prst="rect">
-            <a:avLst/>
-          </a:prstGeom>
-          <a:noFill/>
-        </p:spPr>
-        <p:txBody>
-          <a:bodyPr wrap="square">
-            <a:spAutoFit/>
-          </a:bodyPr>
-          <a:lstStyle/>
-          <a:p>
-            <a:pPr algn="ctr"/>
-            <a:r>
-              <a:rPr sz="1600" b="1">
-                <a:solidFill>
-                  <a:srgbClr val="B85F22"/>
-                </a:solidFill>
-                <a:latin typeface="Microsoft YaHei"/>
-              </a:rPr>
-              <a:t>_start</a:t>
-            </a:r>
-          </a:p>
-        </p:txBody>
-      </p:sp>
-      <p:sp>
-        <p:nvSpPr>
-          <p:cNvPr id="16" name="TextBox 15"/>
-          <p:cNvSpPr txBox="1"/>
-          <p:nvPr/>
-        </p:nvSpPr>
-        <p:spPr>
-          <a:xfrm>
-            <a:off x="5175504" y="2706624"/>
-            <a:ext cx="1664208" cy="749808"/>
-          </a:xfrm>
-          <a:prstGeom prst="rect">
-            <a:avLst/>
-          </a:prstGeom>
-          <a:noFill/>
-        </p:spPr>
-        <p:txBody>
-          <a:bodyPr wrap="square">
-            <a:spAutoFit/>
-          </a:bodyPr>
-          <a:lstStyle/>
-          <a:p>
-            <a:pPr algn="ctr"/>
-            <a:r>
-              <a:rPr sz="1300" b="0">
+              <a:t>kernel/linker.ld：规定入口地址和段布局。</a:t>
+            </a:r>
+          </a:p>
+          <a:p>
+            <a:pPr>
+              <a:spcAft>
+                <a:spcPts val="900"/>
+              </a:spcAft>
+            </a:pPr>
+            <a:r>
+              <a:rPr sz="2000" b="0">
                 <a:solidFill>
                   <a:srgbClr val="22252B"/>
                 </a:solidFill>
                 <a:latin typeface="Microsoft YaHei"/>
               </a:rPr>
-              <a:t>设置 sp
-调用 C</a:t>
-            </a:r>
-          </a:p>
-        </p:txBody>
-      </p:sp>
-      <p:sp>
-        <p:nvSpPr>
-          <p:cNvPr id="17" name="TextBox 16"/>
-          <p:cNvSpPr txBox="1"/>
-          <p:nvPr/>
-        </p:nvSpPr>
-        <p:spPr>
-          <a:xfrm>
-            <a:off x="7187184" y="2743200"/>
-            <a:ext cx="228600" cy="274320"/>
-          </a:xfrm>
-          <a:prstGeom prst="rect">
-            <a:avLst/>
-          </a:prstGeom>
-          <a:noFill/>
-        </p:spPr>
-        <p:txBody>
-          <a:bodyPr wrap="square">
-            <a:spAutoFit/>
-          </a:bodyPr>
-          <a:lstStyle/>
-          <a:p>
-            <a:pPr algn="ctr"/>
-            <a:r>
-              <a:rPr sz="2000" b="1">
-                <a:solidFill>
-                  <a:srgbClr val="5B6370"/>
-                </a:solidFill>
-                <a:latin typeface="Microsoft YaHei"/>
-              </a:rPr>
-              <a:t>→</a:t>
-            </a:r>
-          </a:p>
-        </p:txBody>
-      </p:sp>
-      <p:sp>
-        <p:nvSpPr>
-          <p:cNvPr id="18" name="Rounded Rectangle 17"/>
-          <p:cNvSpPr/>
-          <p:nvPr/>
-        </p:nvSpPr>
-        <p:spPr>
-          <a:xfrm>
-            <a:off x="7232904" y="2148840"/>
-            <a:ext cx="1993392" cy="1600200"/>
-          </a:xfrm>
-          <a:prstGeom prst="roundRect">
-            <a:avLst/>
-          </a:prstGeom>
-          <a:solidFill>
-            <a:srgbClr val="FFFFFF"/>
-          </a:solidFill>
-          <a:ln>
-            <a:solidFill>
-              <a:srgbClr val="D8DDE6"/>
-            </a:solidFill>
-          </a:ln>
-        </p:spPr>
-        <p:style>
-          <a:lnRef idx="1">
-            <a:schemeClr val="accent1"/>
-          </a:lnRef>
-          <a:fillRef idx="3">
-            <a:schemeClr val="accent1"/>
-          </a:fillRef>
-          <a:effectRef idx="2">
-            <a:schemeClr val="accent1"/>
-          </a:effectRef>
-          <a:fontRef idx="minor">
-            <a:schemeClr val="lt1"/>
-          </a:fontRef>
-        </p:style>
-        <p:txBody>
-          <a:bodyPr rtlCol="0" anchor="ctr"/>
-          <a:lstStyle/>
-          <a:p>
-            <a:pPr algn="ctr"/>
-          </a:p>
-        </p:txBody>
-      </p:sp>
-      <p:sp>
-        <p:nvSpPr>
-          <p:cNvPr id="19" name="TextBox 18"/>
-          <p:cNvSpPr txBox="1"/>
-          <p:nvPr/>
-        </p:nvSpPr>
-        <p:spPr>
-          <a:xfrm>
-            <a:off x="7379208" y="2313432"/>
-            <a:ext cx="1700784" cy="292608"/>
-          </a:xfrm>
-          <a:prstGeom prst="rect">
-            <a:avLst/>
-          </a:prstGeom>
-          <a:noFill/>
-        </p:spPr>
-        <p:txBody>
-          <a:bodyPr wrap="square">
-            <a:spAutoFit/>
-          </a:bodyPr>
-          <a:lstStyle/>
-          <a:p>
-            <a:pPr algn="ctr"/>
-            <a:r>
-              <a:rPr sz="1600" b="1">
-                <a:solidFill>
-                  <a:srgbClr val="2A7E4E"/>
-                </a:solidFill>
-                <a:latin typeface="Microsoft YaHei"/>
-              </a:rPr>
-              <a:t>kernel_main</a:t>
-            </a:r>
-          </a:p>
-        </p:txBody>
-      </p:sp>
-      <p:sp>
-        <p:nvSpPr>
-          <p:cNvPr id="20" name="TextBox 19"/>
-          <p:cNvSpPr txBox="1"/>
-          <p:nvPr/>
-        </p:nvSpPr>
-        <p:spPr>
-          <a:xfrm>
-            <a:off x="7397496" y="2706624"/>
-            <a:ext cx="1664208" cy="749808"/>
-          </a:xfrm>
-          <a:prstGeom prst="rect">
-            <a:avLst/>
-          </a:prstGeom>
-          <a:noFill/>
-        </p:spPr>
-        <p:txBody>
-          <a:bodyPr wrap="square">
-            <a:spAutoFit/>
-          </a:bodyPr>
-          <a:lstStyle/>
-          <a:p>
-            <a:pPr algn="ctr"/>
-            <a:r>
-              <a:rPr sz="1300" b="0">
+              <a:t>kernel/main.c：C 语言内核入口，调用 printk。</a:t>
+            </a:r>
+          </a:p>
+          <a:p>
+            <a:pPr>
+              <a:spcAft>
+                <a:spcPts val="900"/>
+              </a:spcAft>
+            </a:pPr>
+            <a:r>
+              <a:rPr sz="2000" b="0">
                 <a:solidFill>
                   <a:srgbClr val="22252B"/>
                 </a:solidFill>
                 <a:latin typeface="Microsoft YaHei"/>
               </a:rPr>
-              <a:t>调用 printk
-输出字符串</a:t>
-            </a:r>
-          </a:p>
-        </p:txBody>
-      </p:sp>
-      <p:sp>
-        <p:nvSpPr>
-          <p:cNvPr id="21" name="TextBox 20"/>
-          <p:cNvSpPr txBox="1"/>
-          <p:nvPr/>
-        </p:nvSpPr>
-        <p:spPr>
-          <a:xfrm>
-            <a:off x="9409176" y="2743200"/>
-            <a:ext cx="228600" cy="274320"/>
-          </a:xfrm>
-          <a:prstGeom prst="rect">
-            <a:avLst/>
-          </a:prstGeom>
-          <a:noFill/>
-        </p:spPr>
-        <p:txBody>
-          <a:bodyPr wrap="square">
-            <a:spAutoFit/>
-          </a:bodyPr>
-          <a:lstStyle/>
-          <a:p>
-            <a:pPr algn="ctr"/>
-            <a:r>
-              <a:rPr sz="2000" b="1">
-                <a:solidFill>
-                  <a:srgbClr val="5B6370"/>
-                </a:solidFill>
-                <a:latin typeface="Microsoft YaHei"/>
-              </a:rPr>
-              <a:t>→</a:t>
-            </a:r>
-          </a:p>
-        </p:txBody>
-      </p:sp>
-      <p:sp>
-        <p:nvSpPr>
-          <p:cNvPr id="22" name="Rounded Rectangle 21"/>
-          <p:cNvSpPr/>
-          <p:nvPr/>
-        </p:nvSpPr>
-        <p:spPr>
-          <a:xfrm>
-            <a:off x="9454896" y="2148840"/>
-            <a:ext cx="1993392" cy="1600200"/>
-          </a:xfrm>
-          <a:prstGeom prst="roundRect">
-            <a:avLst/>
-          </a:prstGeom>
-          <a:solidFill>
-            <a:srgbClr val="FFFFFF"/>
-          </a:solidFill>
-          <a:ln>
-            <a:solidFill>
-              <a:srgbClr val="D8DDE6"/>
-            </a:solidFill>
-          </a:ln>
-        </p:spPr>
-        <p:style>
-          <a:lnRef idx="1">
-            <a:schemeClr val="accent1"/>
-          </a:lnRef>
-          <a:fillRef idx="3">
-            <a:schemeClr val="accent1"/>
-          </a:fillRef>
-          <a:effectRef idx="2">
-            <a:schemeClr val="accent1"/>
-          </a:effectRef>
-          <a:fontRef idx="minor">
-            <a:schemeClr val="lt1"/>
-          </a:fontRef>
-        </p:style>
-        <p:txBody>
-          <a:bodyPr rtlCol="0" anchor="ctr"/>
-          <a:lstStyle/>
-          <a:p>
-            <a:pPr algn="ctr"/>
-          </a:p>
-        </p:txBody>
-      </p:sp>
-      <p:sp>
-        <p:nvSpPr>
-          <p:cNvPr id="23" name="TextBox 22"/>
-          <p:cNvSpPr txBox="1"/>
-          <p:nvPr/>
-        </p:nvSpPr>
-        <p:spPr>
-          <a:xfrm>
-            <a:off x="9601200" y="2313432"/>
-            <a:ext cx="1700784" cy="292608"/>
-          </a:xfrm>
-          <a:prstGeom prst="rect">
-            <a:avLst/>
-          </a:prstGeom>
-          <a:noFill/>
-        </p:spPr>
-        <p:txBody>
-          <a:bodyPr wrap="square">
-            <a:spAutoFit/>
-          </a:bodyPr>
-          <a:lstStyle/>
-          <a:p>
-            <a:pPr algn="ctr"/>
-            <a:r>
-              <a:rPr sz="1600" b="1">
-                <a:solidFill>
-                  <a:srgbClr val="A44440"/>
-                </a:solidFill>
-                <a:latin typeface="Microsoft YaHei"/>
-              </a:rPr>
-              <a:t>UART</a:t>
-            </a:r>
-          </a:p>
-        </p:txBody>
-      </p:sp>
-      <p:sp>
-        <p:nvSpPr>
-          <p:cNvPr id="24" name="TextBox 23"/>
-          <p:cNvSpPr txBox="1"/>
-          <p:nvPr/>
-        </p:nvSpPr>
-        <p:spPr>
-          <a:xfrm>
-            <a:off x="9619488" y="2706624"/>
-            <a:ext cx="1664208" cy="749808"/>
-          </a:xfrm>
-          <a:prstGeom prst="rect">
-            <a:avLst/>
-          </a:prstGeom>
-          <a:noFill/>
-        </p:spPr>
-        <p:txBody>
-          <a:bodyPr wrap="square">
-            <a:spAutoFit/>
-          </a:bodyPr>
-          <a:lstStyle/>
-          <a:p>
-            <a:pPr algn="ctr"/>
-            <a:r>
-              <a:rPr sz="1300" b="0">
+              <a:t>kernel/printk.c：最小字符串输出。</a:t>
+            </a:r>
+          </a:p>
+          <a:p>
+            <a:pPr>
+              <a:spcAft>
+                <a:spcPts val="900"/>
+              </a:spcAft>
+            </a:pPr>
+            <a:r>
+              <a:rPr sz="1700" b="0">
                 <a:solidFill>
                   <a:srgbClr val="22252B"/>
                 </a:solidFill>
                 <a:latin typeface="Microsoft YaHei"/>
               </a:rPr>
-              <a:t>终端显示
-Hello</a:t>
+              <a:t>include/printk.h、include/uart.h：函数原型和 UART 地址。</a:t>
+            </a:r>
+          </a:p>
+          <a:p>
+            <a:pPr>
+              <a:spcAft>
+                <a:spcPts val="900"/>
+              </a:spcAft>
+            </a:pPr>
+            <a:r>
+              <a:rPr sz="2000" b="0">
+                <a:solidFill>
+                  <a:srgbClr val="22252B"/>
+                </a:solidFill>
+                <a:latin typeface="Microsoft YaHei"/>
+              </a:rPr>
+              <a:t>Makefile：编译、运行和清理命令。</a:t>
             </a:r>
           </a:p>
         </p:txBody>
@@ -6036,7 +5780,7 @@
                 </a:solidFill>
                 <a:latin typeface="Microsoft YaHei"/>
               </a:rPr>
-              <a:t>裸机启动逐步说明</a:t>
+              <a:t>boot/start.S 主路径逐行讲解</a:t>
             </a:r>
           </a:p>
         </p:txBody>
@@ -6071,7 +5815,7 @@
                 </a:solidFill>
                 <a:latin typeface="Microsoft YaHei"/>
               </a:rPr>
-              <a:t>对照上一页的流程图，这里是文字版逐步说明。</a:t>
+              <a:t>这是 miniOS 里真实的 boot/start.S 主路径，不是教学示意代码。</a:t>
             </a:r>
           </a:p>
         </p:txBody>
@@ -6121,14 +5865,77 @@
       </p:sp>
       <p:sp>
         <p:nvSpPr>
-          <p:cNvPr id="6" name="TextBox 5"/>
+          <p:cNvPr id="6" name="Rounded Rectangle 5"/>
+          <p:cNvSpPr/>
+          <p:nvPr/>
+        </p:nvSpPr>
+        <p:spPr>
+          <a:xfrm>
+            <a:off x="640080" y="1600200"/>
+            <a:ext cx="6035040" cy="4645152"/>
+          </a:xfrm>
+          <a:prstGeom prst="roundRect">
+            <a:avLst/>
+          </a:prstGeom>
+          <a:solidFill>
+            <a:srgbClr val="20242C"/>
+          </a:solidFill>
+          <a:ln>
+            <a:solidFill>
+              <a:srgbClr val="20242C"/>
+            </a:solidFill>
+          </a:ln>
+        </p:spPr>
+        <p:style>
+          <a:lnRef idx="1">
+            <a:schemeClr val="accent1"/>
+          </a:lnRef>
+          <a:fillRef idx="3">
+            <a:schemeClr val="accent1"/>
+          </a:fillRef>
+          <a:effectRef idx="2">
+            <a:schemeClr val="accent1"/>
+          </a:effectRef>
+          <a:fontRef idx="minor">
+            <a:schemeClr val="lt1"/>
+          </a:fontRef>
+        </p:style>
+        <p:txBody>
+          <a:bodyPr rtlCol="0" anchor="ctr" wrap="square" lIns="164592" rIns="164592" tIns="128016"/>
+          <a:lstStyle/>
+          <a:p>
+            <a:pPr algn="ctr"/>
+            <a:r>
+              <a:rPr sz="1200" b="0">
+                <a:solidFill>
+                  <a:srgbClr val="EEF1F6"/>
+                </a:solidFill>
+                <a:latin typeface="Consolas"/>
+              </a:rPr>
+              <a:t>    .section .text.boot, "ax"
+    .globl _start
+_start:
+    # 设置内核栈，$sp 是 r3 的 ABI 别名
+    la.global   $sp, boot_stack_top
+    # 进入 C 语言内核主函数
+    bl          kernel_main
+halt:
+    idle        0
+    b           halt</a:t>
+            </a:r>
+          </a:p>
+        </p:txBody>
+      </p:sp>
+      <p:sp>
+        <p:nvSpPr>
+          <p:cNvPr id="7" name="TextBox 6"/>
           <p:cNvSpPr txBox="1"/>
           <p:nvPr/>
         </p:nvSpPr>
         <p:spPr>
           <a:xfrm>
-            <a:off x="868680" y="1691640"/>
-            <a:ext cx="10469880" cy="4709160"/>
+            <a:off x="6858000" y="1691640"/>
+            <a:ext cx="4709160" cy="4526280"/>
           </a:xfrm>
           <a:prstGeom prst="rect">
             <a:avLst/>
@@ -6143,129 +5950,81 @@
           <a:p>
             <a:pPr>
               <a:spcAft>
-                <a:spcPts val="900"/>
+                <a:spcPts val="800"/>
               </a:spcAft>
             </a:pPr>
             <a:r>
-              <a:rPr sz="1700" b="0">
+              <a:rPr sz="1400" b="0">
                 <a:solidFill>
                   <a:srgbClr val="22252B"/>
                 </a:solidFill>
                 <a:latin typeface="Microsoft YaHei"/>
               </a:rPr>
-              <a:t>① QEMU 把 build/minios.elf 加载进虚拟内存，按 ELF 头找到入口地址。</a:t>
+              <a:t>① .section .text.boot 把这段代码放到链接脚本指定的启动区域，保证它在最前面。</a:t>
             </a:r>
           </a:p>
           <a:p>
             <a:pPr>
               <a:spcAft>
-                <a:spcPts val="900"/>
+                <a:spcPts val="800"/>
               </a:spcAft>
             </a:pPr>
             <a:r>
-              <a:rPr sz="1700" b="0">
+              <a:rPr sz="1400" b="0">
                 <a:solidFill>
                   <a:srgbClr val="22252B"/>
                 </a:solidFill>
                 <a:latin typeface="Microsoft YaHei"/>
               </a:rPr>
-              <a:t>② CPU 从入口地址（_start）取出第一条指令开始执行，此时还没有任何 C 环境。</a:t>
+              <a:t>② .globl _start 让链接器能找到这个入口符号，对应链接脚本里的 ENTRY(_start)。</a:t>
             </a:r>
           </a:p>
           <a:p>
             <a:pPr>
               <a:spcAft>
-                <a:spcPts val="900"/>
+                <a:spcPts val="800"/>
               </a:spcAft>
             </a:pPr>
             <a:r>
-              <a:rPr sz="1700" b="0">
+              <a:rPr sz="1400" b="0">
                 <a:solidFill>
                   <a:srgbClr val="22252B"/>
                 </a:solidFill>
                 <a:latin typeface="Microsoft YaHei"/>
               </a:rPr>
-              <a:t>③ _start 把 $sp 指向预留的栈空间——没有这一步，C 函数完全不能用。</a:t>
+              <a:t>③ la.global $sp, boot_stack_top：CPU 上电后 $sp 是垃圾值，必须先指向预留的栈顶。</a:t>
             </a:r>
           </a:p>
           <a:p>
             <a:pPr>
               <a:spcAft>
-                <a:spcPts val="900"/>
+                <a:spcPts val="800"/>
               </a:spcAft>
             </a:pPr>
             <a:r>
-              <a:rPr sz="1700" b="0">
+              <a:rPr sz="1400" b="0">
                 <a:solidFill>
                   <a:srgbClr val="22252B"/>
                 </a:solidFill>
                 <a:latin typeface="Microsoft YaHei"/>
               </a:rPr>
-              <a:t>④ bl kernel_main 跳转进 C 代码，从这里开始才是我们熟悉的 C 语言世界。</a:t>
+              <a:t>④ bl kernel_main：调用 C 函数，同时把返回地址写入 $ra——但 kernel_main 不会返回。</a:t>
             </a:r>
           </a:p>
           <a:p>
             <a:pPr>
               <a:spcAft>
-                <a:spcPts val="900"/>
+                <a:spcPts val="800"/>
               </a:spcAft>
             </a:pPr>
             <a:r>
-              <a:rPr sz="1700" b="0">
+              <a:rPr sz="1400" b="0">
                 <a:solidFill>
                   <a:srgbClr val="22252B"/>
                 </a:solidFill>
                 <a:latin typeface="Microsoft YaHei"/>
               </a:rPr>
-              <a:t>⑤ kernel_main 调用 printk，printk 逐字符调用 uart_putc。</a:t>
-            </a:r>
-          </a:p>
-          <a:p>
-            <a:pPr>
-              <a:spcAft>
-                <a:spcPts val="900"/>
-              </a:spcAft>
-            </a:pPr>
-            <a:r>
-              <a:rPr sz="1700" b="0">
-                <a:solidFill>
-                  <a:srgbClr val="22252B"/>
-                </a:solidFill>
-                <a:latin typeface="Microsoft YaHei"/>
-              </a:rPr>
-              <a:t>⑥ uart_putc 直接向 UART0_BASE 这个内存地址写字节——这不是普通内存，是外设寄存器。</a:t>
-            </a:r>
-          </a:p>
-          <a:p>
-            <a:pPr>
-              <a:spcAft>
-                <a:spcPts val="900"/>
-              </a:spcAft>
-            </a:pPr>
-            <a:r>
-              <a:rPr sz="1700" b="0">
-                <a:solidFill>
-                  <a:srgbClr val="22252B"/>
-                </a:solidFill>
-                <a:latin typeface="Microsoft YaHei"/>
-              </a:rPr>
-              <a:t>⑦ QEMU 把这次写操作翻译成终端输出，我们才看到 Hello miniOS。</a:t>
-            </a:r>
-          </a:p>
-          <a:p>
-            <a:pPr>
-              <a:spcAft>
-                <a:spcPts val="900"/>
-              </a:spcAft>
-            </a:pPr>
-            <a:r>
-              <a:rPr sz="1700" b="0">
-                <a:solidFill>
-                  <a:srgbClr val="22252B"/>
-                </a:solidFill>
-                <a:latin typeface="Microsoft YaHei"/>
-              </a:rPr>
-              <a:t>⑧ kernel_main 结束后代码进入 halt 死循环，因为裸机没有“返回到操作系统”这回事。</a:t>
+              <a:t>⑤ halt 循环：防止 kernel_main 意外返回后，CPU 从未知内存继续取指执行。</a:t>
             </a:r>
           </a:p>
         </p:txBody>
@@ -6361,7 +6120,7 @@
                 </a:solidFill>
                 <a:latin typeface="Microsoft YaHei"/>
               </a:rPr>
-              <a:t>实验命令</a:t>
+              <a:t>建议第 1 周使用的最小 kernel_main</a:t>
             </a:r>
           </a:p>
         </p:txBody>
@@ -6396,7 +6155,7 @@
                 </a:solidFill>
                 <a:latin typeface="Microsoft YaHei"/>
               </a:rPr>
-              <a:t>预期串口输出：Hello miniOS on LoongArch64。未执行过 make run 就不能写“已通过”，工具链缺失要记录“未执行”和失败原因。</a:t>
+              <a:t>当前 master 有第 2 周检查代码；课堂先抽出这条最小路径。</a:t>
             </a:r>
           </a:p>
         </p:txBody>
@@ -6493,13 +6252,14 @@
                 </a:solidFill>
                 <a:latin typeface="Consolas"/>
               </a:rPr>
-              <a:t># 环境检查
-sh scripts/check-env.sh
-# 编译
-make clean
-make
-# 运行
-make run</a:t>
+              <a:t>#include "printk.h"
+void kernel_main(void)
+{
+    printk("Hello miniOS on LoongArch64\n");
+    while (1) {
+        __asm__ volatile("idle 0");
+    }
+}</a:t>
             </a:r>
           </a:p>
         </p:txBody>
@@ -6560,7 +6320,7 @@
                 </a:solidFill>
                 <a:latin typeface="Microsoft YaHei"/>
               </a:rPr>
-              <a:t>本次课安排（90 分钟）</a:t>
+              <a:t>本次课安排</a:t>
             </a:r>
           </a:p>
         </p:txBody>
@@ -6662,9 +6422,8 @@
                 <a:tableStyleId>{5C22544A-7EE6-4342-B048-85BDC9FD1C3A}</a:tableStyleId>
               </a:tblPr>
               <a:tblGrid>
-                <a:gridCol w="1463040"/>
-                <a:gridCol w="1463040"/>
-                <a:gridCol w="7818120"/>
+                <a:gridCol w="2194560"/>
+                <a:gridCol w="8549640"/>
               </a:tblGrid>
               <a:tr h="647700">
                 <a:tc>
@@ -6680,28 +6439,6 @@
                           <a:latin typeface="Microsoft YaHei"/>
                         </a:rPr>
                         <a:t>板块</a:t>
-                      </a:r>
-                    </a:p>
-                  </a:txBody>
-                  <a:tcPr>
-                    <a:solidFill>
-                      <a:srgbClr val="1C53A0"/>
-                    </a:solidFill>
-                  </a:tcPr>
-                </a:tc>
-                <a:tc>
-                  <a:txBody>
-                    <a:bodyPr/>
-                    <a:lstStyle/>
-                    <a:p>
-                      <a:r>
-                        <a:rPr sz="1300" b="1">
-                          <a:solidFill>
-                            <a:srgbClr val="FFFFFF"/>
-                          </a:solidFill>
-                          <a:latin typeface="Microsoft YaHei"/>
-                        </a:rPr>
-                        <a:t>时间</a:t>
                       </a:r>
                     </a:p>
                   </a:txBody>
@@ -6769,28 +6506,6 @@
                           </a:solidFill>
                           <a:latin typeface="Microsoft YaHei"/>
                         </a:rPr>
-                        <a:t>12 分钟</a:t>
-                      </a:r>
-                    </a:p>
-                  </a:txBody>
-                  <a:tcPr>
-                    <a:solidFill>
-                      <a:srgbClr val="FFFFFF"/>
-                    </a:solidFill>
-                  </a:tcPr>
-                </a:tc>
-                <a:tc>
-                  <a:txBody>
-                    <a:bodyPr/>
-                    <a:lstStyle/>
-                    <a:p>
-                      <a:r>
-                        <a:rPr sz="1200" b="0">
-                          <a:solidFill>
-                            <a:srgbClr val="22252B"/>
-                          </a:solidFill>
-                          <a:latin typeface="Microsoft YaHei"/>
-                        </a:rPr>
                         <a:t>为什么学习汇编：C 语言经验如何连接到 CPU 执行</a:t>
                       </a:r>
                     </a:p>
@@ -6816,28 +6531,6 @@
                           <a:latin typeface="Microsoft YaHei"/>
                         </a:rPr>
                         <a:t>板块二</a:t>
-                      </a:r>
-                    </a:p>
-                  </a:txBody>
-                  <a:tcPr>
-                    <a:solidFill>
-                      <a:srgbClr val="FFFFFF"/>
-                    </a:solidFill>
-                  </a:tcPr>
-                </a:tc>
-                <a:tc>
-                  <a:txBody>
-                    <a:bodyPr/>
-                    <a:lstStyle/>
-                    <a:p>
-                      <a:r>
-                        <a:rPr sz="1200" b="0">
-                          <a:solidFill>
-                            <a:srgbClr val="22252B"/>
-                          </a:solidFill>
-                          <a:latin typeface="Microsoft YaHei"/>
-                        </a:rPr>
-                        <a:t>13 分钟</a:t>
                       </a:r>
                     </a:p>
                   </a:txBody>
@@ -6905,28 +6598,6 @@
                           </a:solidFill>
                           <a:latin typeface="Microsoft YaHei"/>
                         </a:rPr>
-                        <a:t>25 分钟</a:t>
-                      </a:r>
-                    </a:p>
-                  </a:txBody>
-                  <a:tcPr>
-                    <a:solidFill>
-                      <a:srgbClr val="FFFFFF"/>
-                    </a:solidFill>
-                  </a:tcPr>
-                </a:tc>
-                <a:tc>
-                  <a:txBody>
-                    <a:bodyPr/>
-                    <a:lstStyle/>
-                    <a:p>
-                      <a:r>
-                        <a:rPr sz="1200" b="0">
-                          <a:solidFill>
-                            <a:srgbClr val="22252B"/>
-                          </a:solidFill>
-                          <a:latin typeface="Microsoft YaHei"/>
-                        </a:rPr>
                         <a:t>从 C 到可执行文件：编译链接、Makefile 语法、操作系统做什么、裸机差异</a:t>
                       </a:r>
                     </a:p>
@@ -6952,28 +6623,6 @@
                           <a:latin typeface="Microsoft YaHei"/>
                         </a:rPr>
                         <a:t>板块四</a:t>
-                      </a:r>
-                    </a:p>
-                  </a:txBody>
-                  <a:tcPr>
-                    <a:solidFill>
-                      <a:srgbClr val="FFFFFF"/>
-                    </a:solidFill>
-                  </a:tcPr>
-                </a:tc>
-                <a:tc>
-                  <a:txBody>
-                    <a:bodyPr/>
-                    <a:lstStyle/>
-                    <a:p>
-                      <a:r>
-                        <a:rPr sz="1200" b="0">
-                          <a:solidFill>
-                            <a:srgbClr val="22252B"/>
-                          </a:solidFill>
-                          <a:latin typeface="Microsoft YaHei"/>
-                        </a:rPr>
-                        <a:t>30 分钟</a:t>
                       </a:r>
                     </a:p>
                   </a:txBody>
@@ -7041,28 +6690,6 @@
                           </a:solidFill>
                           <a:latin typeface="Microsoft YaHei"/>
                         </a:rPr>
-                        <a:t>10 分钟</a:t>
-                      </a:r>
-                    </a:p>
-                  </a:txBody>
-                  <a:tcPr>
-                    <a:solidFill>
-                      <a:srgbClr val="FFFFFF"/>
-                    </a:solidFill>
-                  </a:tcPr>
-                </a:tc>
-                <a:tc>
-                  <a:txBody>
-                    <a:bodyPr/>
-                    <a:lstStyle/>
-                    <a:p>
-                      <a:r>
-                        <a:rPr sz="1200" b="0">
-                          <a:solidFill>
-                            <a:srgbClr val="22252B"/>
-                          </a:solidFill>
-                          <a:latin typeface="Microsoft YaHei"/>
-                        </a:rPr>
                         <a:t>本周边界、思考题与作业</a:t>
                       </a:r>
                     </a:p>
@@ -7169,7 +6796,7 @@
                 </a:solidFill>
                 <a:latin typeface="Microsoft YaHei"/>
               </a:rPr>
-              <a:t>收尾</a:t>
+              <a:t>板块四</a:t>
             </a:r>
           </a:p>
         </p:txBody>
@@ -7204,14 +6831,49 @@
                 </a:solidFill>
                 <a:latin typeface="Microsoft YaHei"/>
               </a:rPr>
-              <a:t>本周边界</a:t>
-            </a:r>
-          </a:p>
-        </p:txBody>
-      </p:sp>
-      <p:sp>
-        <p:nvSpPr>
-          <p:cNvPr id="4" name="Rectangle 3"/>
+              <a:t>printk 到 UART</a:t>
+            </a:r>
+          </a:p>
+        </p:txBody>
+      </p:sp>
+      <p:sp>
+        <p:nvSpPr>
+          <p:cNvPr id="4" name="TextBox 3"/>
+          <p:cNvSpPr txBox="1"/>
+          <p:nvPr/>
+        </p:nvSpPr>
+        <p:spPr>
+          <a:xfrm>
+            <a:off x="658368" y="1042415"/>
+            <a:ext cx="10881360" cy="320040"/>
+          </a:xfrm>
+          <a:prstGeom prst="rect">
+            <a:avLst/>
+          </a:prstGeom>
+          <a:noFill/>
+        </p:spPr>
+        <p:txBody>
+          <a:bodyPr wrap="square">
+            <a:spAutoFit/>
+          </a:bodyPr>
+          <a:lstStyle/>
+          <a:p>
+            <a:pPr algn="l"/>
+            <a:r>
+              <a:rPr sz="1400" b="0">
+                <a:solidFill>
+                  <a:srgbClr val="5B6370"/>
+                </a:solidFill>
+                <a:latin typeface="Microsoft YaHei"/>
+              </a:rPr>
+              <a:t>UART0_BASE 是 QEMU virt 平台地址，不代表 2K0300 开发板地址。</a:t>
+            </a:r>
+          </a:p>
+        </p:txBody>
+      </p:sp>
+      <p:sp>
+        <p:nvSpPr>
+          <p:cNvPr id="5" name="Rectangle 4"/>
           <p:cNvSpPr/>
           <p:nvPr/>
         </p:nvSpPr>
@@ -7254,119 +6916,65 @@
       </p:sp>
       <p:sp>
         <p:nvSpPr>
-          <p:cNvPr id="5" name="TextBox 4"/>
-          <p:cNvSpPr txBox="1"/>
-          <p:nvPr/>
-        </p:nvSpPr>
-        <p:spPr>
-          <a:xfrm>
-            <a:off x="868680" y="1691640"/>
-            <a:ext cx="10469880" cy="4709160"/>
-          </a:xfrm>
-          <a:prstGeom prst="rect">
-            <a:avLst/>
-          </a:prstGeom>
-          <a:noFill/>
-        </p:spPr>
-        <p:txBody>
-          <a:bodyPr wrap="square">
-            <a:spAutoFit/>
-          </a:bodyPr>
-          <a:lstStyle/>
-          <a:p>
-            <a:pPr>
-              <a:spcAft>
-                <a:spcPts val="900"/>
-              </a:spcAft>
-            </a:pPr>
-            <a:r>
-              <a:rPr sz="2000" b="0">
-                <a:solidFill>
-                  <a:srgbClr val="22252B"/>
-                </a:solidFill>
-                <a:latin typeface="Microsoft YaHei"/>
-              </a:rPr>
-              <a:t>不讲完整操作系统，不讲进程、文件系统、虚拟内存。</a:t>
-            </a:r>
-          </a:p>
-          <a:p>
-            <a:pPr>
-              <a:spcAft>
-                <a:spcPts val="900"/>
-              </a:spcAft>
-            </a:pPr>
-            <a:r>
-              <a:rPr sz="2000" b="0">
-                <a:solidFill>
-                  <a:srgbClr val="22252B"/>
-                </a:solidFill>
-                <a:latin typeface="Microsoft YaHei"/>
-              </a:rPr>
-              <a:t>不直接适配 2K0300 开发板。</a:t>
-            </a:r>
-          </a:p>
-          <a:p>
-            <a:pPr>
-              <a:spcAft>
-                <a:spcPts val="900"/>
-              </a:spcAft>
-            </a:pPr>
-            <a:r>
-              <a:rPr sz="2000" b="0">
-                <a:solidFill>
-                  <a:srgbClr val="22252B"/>
-                </a:solidFill>
-                <a:latin typeface="Microsoft YaHei"/>
-              </a:rPr>
-              <a:t>不把未实测结果写成已通过——工具链缺失就记录“未执行”。</a:t>
-            </a:r>
-          </a:p>
-          <a:p>
-            <a:pPr>
-              <a:spcAft>
-                <a:spcPts val="900"/>
-              </a:spcAft>
-            </a:pPr>
-            <a:r>
-              <a:rPr sz="1700" b="0">
-                <a:solidFill>
-                  <a:srgbClr val="22252B"/>
-                </a:solidFill>
-                <a:latin typeface="Microsoft YaHei"/>
-              </a:rPr>
-              <a:t>当前 master 已包含第 2 周 .data/.bss 检查代码和 clear_bss，第 1 周课堂只讲 Hello 链路，这部分下周展开。</a:t>
-            </a:r>
-          </a:p>
-          <a:p>
-            <a:pPr>
-              <a:spcAft>
-                <a:spcPts val="900"/>
-              </a:spcAft>
-            </a:pPr>
-            <a:r>
-              <a:rPr sz="1700" b="0">
-                <a:solidFill>
-                  <a:srgbClr val="22252B"/>
-                </a:solidFill>
-                <a:latin typeface="Microsoft YaHei"/>
-              </a:rPr>
-              <a:t>lib/string.S、kernel/exception.c、kernel/syscall.c 属于后续周次铺垫，本周不展开。</a:t>
-            </a:r>
-          </a:p>
-          <a:p>
-            <a:pPr>
-              <a:spcAft>
-                <a:spcPts val="900"/>
-              </a:spcAft>
-            </a:pPr>
-            <a:r>
-              <a:rPr sz="1700" b="0">
-                <a:solidFill>
-                  <a:srgbClr val="22252B"/>
-                </a:solidFill>
-                <a:latin typeface="Microsoft YaHei"/>
-              </a:rPr>
-              <a:t>AI 共学：可以让 AI 解释代码、画流程图，不允许让 AI 直接生成实验代码或代替写实验报告。</a:t>
+          <p:cNvPr id="6" name="Rounded Rectangle 5"/>
+          <p:cNvSpPr/>
+          <p:nvPr/>
+        </p:nvSpPr>
+        <p:spPr>
+          <a:xfrm>
+            <a:off x="749808" y="1600200"/>
+            <a:ext cx="10716768" cy="4645152"/>
+          </a:xfrm>
+          <a:prstGeom prst="roundRect">
+            <a:avLst/>
+          </a:prstGeom>
+          <a:solidFill>
+            <a:srgbClr val="20242C"/>
+          </a:solidFill>
+          <a:ln>
+            <a:solidFill>
+              <a:srgbClr val="20242C"/>
+            </a:solidFill>
+          </a:ln>
+        </p:spPr>
+        <p:style>
+          <a:lnRef idx="1">
+            <a:schemeClr val="accent1"/>
+          </a:lnRef>
+          <a:fillRef idx="3">
+            <a:schemeClr val="accent1"/>
+          </a:fillRef>
+          <a:effectRef idx="2">
+            <a:schemeClr val="accent1"/>
+          </a:effectRef>
+          <a:fontRef idx="minor">
+            <a:schemeClr val="lt1"/>
+          </a:fontRef>
+        </p:style>
+        <p:txBody>
+          <a:bodyPr rtlCol="0" anchor="ctr" wrap="square" lIns="182880" rIns="182880" tIns="146304"/>
+          <a:lstStyle/>
+          <a:p>
+            <a:pPr algn="ctr"/>
+            <a:r>
+              <a:rPr sz="1300" b="0">
+                <a:solidFill>
+                  <a:srgbClr val="EEF1F6"/>
+                </a:solidFill>
+                <a:latin typeface="Consolas"/>
+              </a:rPr>
+              <a:t>void uart_putc(char ch)
+{
+    volatile unsigned char *uart =
+        (volatile unsigned char *)UART0_BASE;
+    *uart = (unsigned char)ch;
+}
+void printk(const char *s)
+{
+    while (*s) {
+        uart_putc(*s++);
+    }
+}</a:t>
             </a:r>
           </a:p>
         </p:txBody>
@@ -7427,6 +7035,2010 @@
                 </a:solidFill>
                 <a:latin typeface="Microsoft YaHei"/>
               </a:rPr>
+              <a:t>板块四</a:t>
+            </a:r>
+          </a:p>
+        </p:txBody>
+      </p:sp>
+      <p:sp>
+        <p:nvSpPr>
+          <p:cNvPr id="3" name="TextBox 2"/>
+          <p:cNvSpPr txBox="1"/>
+          <p:nvPr/>
+        </p:nvSpPr>
+        <p:spPr>
+          <a:xfrm>
+            <a:off x="640080" y="502920"/>
+            <a:ext cx="10972800" cy="530352"/>
+          </a:xfrm>
+          <a:prstGeom prst="rect">
+            <a:avLst/>
+          </a:prstGeom>
+          <a:noFill/>
+        </p:spPr>
+        <p:txBody>
+          <a:bodyPr wrap="square">
+            <a:spAutoFit/>
+          </a:bodyPr>
+          <a:lstStyle/>
+          <a:p>
+            <a:pPr algn="l"/>
+            <a:r>
+              <a:rPr sz="3000" b="1">
+                <a:solidFill>
+                  <a:srgbClr val="22252B"/>
+                </a:solidFill>
+                <a:latin typeface="Microsoft YaHei"/>
+              </a:rPr>
+              <a:t>打个比方：一场接力赛</a:t>
+            </a:r>
+          </a:p>
+        </p:txBody>
+      </p:sp>
+      <p:sp>
+        <p:nvSpPr>
+          <p:cNvPr id="4" name="TextBox 3"/>
+          <p:cNvSpPr txBox="1"/>
+          <p:nvPr/>
+        </p:nvSpPr>
+        <p:spPr>
+          <a:xfrm>
+            <a:off x="658368" y="1042415"/>
+            <a:ext cx="10881360" cy="320040"/>
+          </a:xfrm>
+          <a:prstGeom prst="rect">
+            <a:avLst/>
+          </a:prstGeom>
+          <a:noFill/>
+        </p:spPr>
+        <p:txBody>
+          <a:bodyPr wrap="square">
+            <a:spAutoFit/>
+          </a:bodyPr>
+          <a:lstStyle/>
+          <a:p>
+            <a:pPr algn="l"/>
+            <a:r>
+              <a:rPr sz="1400" b="0">
+                <a:solidFill>
+                  <a:srgbClr val="5B6370"/>
+                </a:solidFill>
+                <a:latin typeface="Microsoft YaHei"/>
+              </a:rPr>
+              <a:t>对照下一页的流程图和文字版逐步说明，这里先建立直观印象。</a:t>
+            </a:r>
+          </a:p>
+        </p:txBody>
+      </p:sp>
+      <p:sp>
+        <p:nvSpPr>
+          <p:cNvPr id="5" name="Rectangle 4"/>
+          <p:cNvSpPr/>
+          <p:nvPr/>
+        </p:nvSpPr>
+        <p:spPr>
+          <a:xfrm>
+            <a:off x="640080" y="1353312"/>
+            <a:ext cx="10927080" cy="18288"/>
+          </a:xfrm>
+          <a:prstGeom prst="rect">
+            <a:avLst/>
+          </a:prstGeom>
+          <a:solidFill>
+            <a:srgbClr val="D8DDE6"/>
+          </a:solidFill>
+          <a:ln>
+            <a:noFill/>
+          </a:ln>
+        </p:spPr>
+        <p:style>
+          <a:lnRef idx="1">
+            <a:schemeClr val="accent1"/>
+          </a:lnRef>
+          <a:fillRef idx="3">
+            <a:schemeClr val="accent1"/>
+          </a:fillRef>
+          <a:effectRef idx="2">
+            <a:schemeClr val="accent1"/>
+          </a:effectRef>
+          <a:fontRef idx="minor">
+            <a:schemeClr val="lt1"/>
+          </a:fontRef>
+        </p:style>
+        <p:txBody>
+          <a:bodyPr rtlCol="0" anchor="ctr"/>
+          <a:lstStyle/>
+          <a:p>
+            <a:pPr algn="ctr"/>
+          </a:p>
+        </p:txBody>
+      </p:sp>
+      <p:sp>
+        <p:nvSpPr>
+          <p:cNvPr id="6" name="TextBox 5"/>
+          <p:cNvSpPr txBox="1"/>
+          <p:nvPr/>
+        </p:nvSpPr>
+        <p:spPr>
+          <a:xfrm>
+            <a:off x="868680" y="1691640"/>
+            <a:ext cx="10469880" cy="4709160"/>
+          </a:xfrm>
+          <a:prstGeom prst="rect">
+            <a:avLst/>
+          </a:prstGeom>
+          <a:noFill/>
+        </p:spPr>
+        <p:txBody>
+          <a:bodyPr wrap="square">
+            <a:spAutoFit/>
+          </a:bodyPr>
+          <a:lstStyle/>
+          <a:p>
+            <a:pPr>
+              <a:spcAft>
+                <a:spcPts val="900"/>
+              </a:spcAft>
+            </a:pPr>
+            <a:r>
+              <a:rPr sz="1700" b="0">
+                <a:solidFill>
+                  <a:srgbClr val="22252B"/>
+                </a:solidFill>
+                <a:latin typeface="Microsoft YaHei"/>
+              </a:rPr>
+              <a:t>QEMU 是裁判员：把 minios.elf 放上起跑线（加载进内存），鸣枪示意从入口地址开始（CPU 取指）。</a:t>
+            </a:r>
+          </a:p>
+          <a:p>
+            <a:pPr>
+              <a:spcAft>
+                <a:spcPts val="900"/>
+              </a:spcAft>
+            </a:pPr>
+            <a:r>
+              <a:rPr sz="1700" b="0">
+                <a:solidFill>
+                  <a:srgbClr val="22252B"/>
+                </a:solidFill>
+                <a:latin typeface="Microsoft YaHei"/>
+              </a:rPr>
+              <a:t>_start 是第一棒选手：上场先系好鞋带（设置 $sp 指向栈），再把接力棒交给下一棒（bl kernel_main）。</a:t>
+            </a:r>
+          </a:p>
+          <a:p>
+            <a:pPr>
+              <a:spcAft>
+                <a:spcPts val="900"/>
+              </a:spcAft>
+            </a:pPr>
+            <a:r>
+              <a:rPr sz="1700" b="0">
+                <a:solidFill>
+                  <a:srgbClr val="22252B"/>
+                </a:solidFill>
+                <a:latin typeface="Microsoft YaHei"/>
+              </a:rPr>
+              <a:t>kernel_main 是第二棒主力选手：真正跑出比赛内容（调用 printk）。</a:t>
+            </a:r>
+          </a:p>
+          <a:p>
+            <a:pPr>
+              <a:spcAft>
+                <a:spcPts val="900"/>
+              </a:spcAft>
+            </a:pPr>
+            <a:r>
+              <a:rPr sz="1700" b="0">
+                <a:solidFill>
+                  <a:srgbClr val="22252B"/>
+                </a:solidFill>
+                <a:latin typeface="Microsoft YaHei"/>
+              </a:rPr>
+              <a:t>printk/uart_putc 是选手把成绩喊给场边记录员（把字节写进 UART0_BASE 寄存器）。</a:t>
+            </a:r>
+          </a:p>
+          <a:p>
+            <a:pPr>
+              <a:spcAft>
+                <a:spcPts val="900"/>
+              </a:spcAft>
+            </a:pPr>
+            <a:r>
+              <a:rPr sz="1700" b="0">
+                <a:solidFill>
+                  <a:srgbClr val="22252B"/>
+                </a:solidFill>
+                <a:latin typeface="Microsoft YaHei"/>
+              </a:rPr>
+              <a:t>QEMU 终端是记分牌：把喊出的成绩显示给所有观众看（终端里出现 Hello miniOS）。</a:t>
+            </a:r>
+          </a:p>
+          <a:p>
+            <a:pPr>
+              <a:spcAft>
+                <a:spcPts val="900"/>
+              </a:spcAft>
+            </a:pPr>
+            <a:r>
+              <a:rPr sz="1700" b="0">
+                <a:solidFill>
+                  <a:srgbClr val="22252B"/>
+                </a:solidFill>
+                <a:latin typeface="Microsoft YaHei"/>
+              </a:rPr>
+              <a:t>halt 循环是比赛结束后运动员原地休息——裸机没有『下一场』可跑，不会返回。</a:t>
+            </a:r>
+          </a:p>
+        </p:txBody>
+      </p:sp>
+    </p:spTree>
+  </p:cSld>
+  <p:clrMapOvr>
+    <a:masterClrMapping/>
+  </p:clrMapOvr>
+</p:sld>
+</file>
+
+<file path=ppt/slides/slide22.xml><?xml version="1.0" encoding="utf-8"?>
+<p:sld xmlns:a="http://schemas.openxmlformats.org/drawingml/2006/main" xmlns:p="http://schemas.openxmlformats.org/presentationml/2006/main" xmlns:r="http://schemas.openxmlformats.org/officeDocument/2006/relationships">
+  <p:cSld>
+    <p:bg>
+      <p:bgPr>
+        <a:solidFill>
+          <a:srgbClr val="F8F9FB"/>
+        </a:solidFill>
+        <a:effectLst/>
+      </p:bgPr>
+    </p:bg>
+    <p:spTree>
+      <p:nvGrpSpPr>
+        <p:cNvPr id="1" name=""/>
+        <p:cNvGrpSpPr/>
+        <p:nvPr/>
+      </p:nvGrpSpPr>
+      <p:grpSpPr/>
+      <p:sp>
+        <p:nvSpPr>
+          <p:cNvPr id="2" name="TextBox 1"/>
+          <p:cNvSpPr txBox="1"/>
+          <p:nvPr/>
+        </p:nvSpPr>
+        <p:spPr>
+          <a:xfrm>
+            <a:off x="640080" y="256032"/>
+            <a:ext cx="2194560" cy="274320"/>
+          </a:xfrm>
+          <a:prstGeom prst="rect">
+            <a:avLst/>
+          </a:prstGeom>
+          <a:noFill/>
+        </p:spPr>
+        <p:txBody>
+          <a:bodyPr wrap="square">
+            <a:spAutoFit/>
+          </a:bodyPr>
+          <a:lstStyle/>
+          <a:p>
+            <a:pPr algn="l"/>
+            <a:r>
+              <a:rPr sz="1300" b="1">
+                <a:solidFill>
+                  <a:srgbClr val="1C53A0"/>
+                </a:solidFill>
+                <a:latin typeface="Microsoft YaHei"/>
+              </a:rPr>
+              <a:t>板块四</a:t>
+            </a:r>
+          </a:p>
+        </p:txBody>
+      </p:sp>
+      <p:sp>
+        <p:nvSpPr>
+          <p:cNvPr id="3" name="TextBox 2"/>
+          <p:cNvSpPr txBox="1"/>
+          <p:nvPr/>
+        </p:nvSpPr>
+        <p:spPr>
+          <a:xfrm>
+            <a:off x="640080" y="502920"/>
+            <a:ext cx="10972800" cy="530352"/>
+          </a:xfrm>
+          <a:prstGeom prst="rect">
+            <a:avLst/>
+          </a:prstGeom>
+          <a:noFill/>
+        </p:spPr>
+        <p:txBody>
+          <a:bodyPr wrap="square">
+            <a:spAutoFit/>
+          </a:bodyPr>
+          <a:lstStyle/>
+          <a:p>
+            <a:pPr algn="l"/>
+            <a:r>
+              <a:rPr sz="3000" b="1">
+                <a:solidFill>
+                  <a:srgbClr val="22252B"/>
+                </a:solidFill>
+                <a:latin typeface="Microsoft YaHei"/>
+              </a:rPr>
+              <a:t>第 1 周最小运行链路</a:t>
+            </a:r>
+          </a:p>
+        </p:txBody>
+      </p:sp>
+      <p:sp>
+        <p:nvSpPr>
+          <p:cNvPr id="4" name="TextBox 3"/>
+          <p:cNvSpPr txBox="1"/>
+          <p:nvPr/>
+        </p:nvSpPr>
+        <p:spPr>
+          <a:xfrm>
+            <a:off x="658368" y="1042415"/>
+            <a:ext cx="10881360" cy="320040"/>
+          </a:xfrm>
+          <a:prstGeom prst="rect">
+            <a:avLst/>
+          </a:prstGeom>
+          <a:noFill/>
+        </p:spPr>
+        <p:txBody>
+          <a:bodyPr wrap="square">
+            <a:spAutoFit/>
+          </a:bodyPr>
+          <a:lstStyle/>
+          <a:p>
+            <a:pPr algn="l"/>
+            <a:r>
+              <a:rPr sz="1400" b="0">
+                <a:solidFill>
+                  <a:srgbClr val="5B6370"/>
+                </a:solidFill>
+                <a:latin typeface="Microsoft YaHei"/>
+              </a:rPr>
+              <a:t>这条链路跑通，才进入第 2 周。</a:t>
+            </a:r>
+          </a:p>
+        </p:txBody>
+      </p:sp>
+      <p:sp>
+        <p:nvSpPr>
+          <p:cNvPr id="5" name="Rectangle 4"/>
+          <p:cNvSpPr/>
+          <p:nvPr/>
+        </p:nvSpPr>
+        <p:spPr>
+          <a:xfrm>
+            <a:off x="640080" y="1353312"/>
+            <a:ext cx="10927080" cy="18288"/>
+          </a:xfrm>
+          <a:prstGeom prst="rect">
+            <a:avLst/>
+          </a:prstGeom>
+          <a:solidFill>
+            <a:srgbClr val="D8DDE6"/>
+          </a:solidFill>
+          <a:ln>
+            <a:noFill/>
+          </a:ln>
+        </p:spPr>
+        <p:style>
+          <a:lnRef idx="1">
+            <a:schemeClr val="accent1"/>
+          </a:lnRef>
+          <a:fillRef idx="3">
+            <a:schemeClr val="accent1"/>
+          </a:fillRef>
+          <a:effectRef idx="2">
+            <a:schemeClr val="accent1"/>
+          </a:effectRef>
+          <a:fontRef idx="minor">
+            <a:schemeClr val="lt1"/>
+          </a:fontRef>
+        </p:style>
+        <p:txBody>
+          <a:bodyPr rtlCol="0" anchor="ctr"/>
+          <a:lstStyle/>
+          <a:p>
+            <a:pPr algn="ctr"/>
+          </a:p>
+        </p:txBody>
+      </p:sp>
+      <p:sp>
+        <p:nvSpPr>
+          <p:cNvPr id="6" name="Rounded Rectangle 5"/>
+          <p:cNvSpPr/>
+          <p:nvPr/>
+        </p:nvSpPr>
+        <p:spPr>
+          <a:xfrm>
+            <a:off x="566928" y="2148840"/>
+            <a:ext cx="1993392" cy="1600200"/>
+          </a:xfrm>
+          <a:prstGeom prst="roundRect">
+            <a:avLst/>
+          </a:prstGeom>
+          <a:solidFill>
+            <a:srgbClr val="FFFFFF"/>
+          </a:solidFill>
+          <a:ln>
+            <a:solidFill>
+              <a:srgbClr val="D8DDE6"/>
+            </a:solidFill>
+          </a:ln>
+        </p:spPr>
+        <p:style>
+          <a:lnRef idx="1">
+            <a:schemeClr val="accent1"/>
+          </a:lnRef>
+          <a:fillRef idx="3">
+            <a:schemeClr val="accent1"/>
+          </a:fillRef>
+          <a:effectRef idx="2">
+            <a:schemeClr val="accent1"/>
+          </a:effectRef>
+          <a:fontRef idx="minor">
+            <a:schemeClr val="lt1"/>
+          </a:fontRef>
+        </p:style>
+        <p:txBody>
+          <a:bodyPr rtlCol="0" anchor="ctr"/>
+          <a:lstStyle/>
+          <a:p>
+            <a:pPr algn="ctr"/>
+          </a:p>
+        </p:txBody>
+      </p:sp>
+      <p:sp>
+        <p:nvSpPr>
+          <p:cNvPr id="7" name="TextBox 6"/>
+          <p:cNvSpPr txBox="1"/>
+          <p:nvPr/>
+        </p:nvSpPr>
+        <p:spPr>
+          <a:xfrm>
+            <a:off x="713232" y="2313432"/>
+            <a:ext cx="1700784" cy="292608"/>
+          </a:xfrm>
+          <a:prstGeom prst="rect">
+            <a:avLst/>
+          </a:prstGeom>
+          <a:noFill/>
+        </p:spPr>
+        <p:txBody>
+          <a:bodyPr wrap="square">
+            <a:spAutoFit/>
+          </a:bodyPr>
+          <a:lstStyle/>
+          <a:p>
+            <a:pPr algn="ctr"/>
+            <a:r>
+              <a:rPr sz="1600" b="1">
+                <a:solidFill>
+                  <a:srgbClr val="1C53A0"/>
+                </a:solidFill>
+                <a:latin typeface="Microsoft YaHei"/>
+              </a:rPr>
+              <a:t>make</a:t>
+            </a:r>
+          </a:p>
+        </p:txBody>
+      </p:sp>
+      <p:sp>
+        <p:nvSpPr>
+          <p:cNvPr id="8" name="TextBox 7"/>
+          <p:cNvSpPr txBox="1"/>
+          <p:nvPr/>
+        </p:nvSpPr>
+        <p:spPr>
+          <a:xfrm>
+            <a:off x="731520" y="2706624"/>
+            <a:ext cx="1664208" cy="749808"/>
+          </a:xfrm>
+          <a:prstGeom prst="rect">
+            <a:avLst/>
+          </a:prstGeom>
+          <a:noFill/>
+        </p:spPr>
+        <p:txBody>
+          <a:bodyPr wrap="square">
+            <a:spAutoFit/>
+          </a:bodyPr>
+          <a:lstStyle/>
+          <a:p>
+            <a:pPr algn="ctr"/>
+            <a:r>
+              <a:rPr sz="1300" b="0">
+                <a:solidFill>
+                  <a:srgbClr val="22252B"/>
+                </a:solidFill>
+                <a:latin typeface="Microsoft YaHei"/>
+              </a:rPr>
+              <a:t>交叉编译
+生成 ELF</a:t>
+            </a:r>
+          </a:p>
+        </p:txBody>
+      </p:sp>
+      <p:sp>
+        <p:nvSpPr>
+          <p:cNvPr id="9" name="TextBox 8"/>
+          <p:cNvSpPr txBox="1"/>
+          <p:nvPr/>
+        </p:nvSpPr>
+        <p:spPr>
+          <a:xfrm>
+            <a:off x="2743200" y="2743200"/>
+            <a:ext cx="228600" cy="274320"/>
+          </a:xfrm>
+          <a:prstGeom prst="rect">
+            <a:avLst/>
+          </a:prstGeom>
+          <a:noFill/>
+        </p:spPr>
+        <p:txBody>
+          <a:bodyPr wrap="square">
+            <a:spAutoFit/>
+          </a:bodyPr>
+          <a:lstStyle/>
+          <a:p>
+            <a:pPr algn="ctr"/>
+            <a:r>
+              <a:rPr sz="2000" b="1">
+                <a:solidFill>
+                  <a:srgbClr val="5B6370"/>
+                </a:solidFill>
+                <a:latin typeface="Microsoft YaHei"/>
+              </a:rPr>
+              <a:t>→</a:t>
+            </a:r>
+          </a:p>
+        </p:txBody>
+      </p:sp>
+      <p:sp>
+        <p:nvSpPr>
+          <p:cNvPr id="10" name="Rounded Rectangle 9"/>
+          <p:cNvSpPr/>
+          <p:nvPr/>
+        </p:nvSpPr>
+        <p:spPr>
+          <a:xfrm>
+            <a:off x="2788920" y="2148840"/>
+            <a:ext cx="1993392" cy="1600200"/>
+          </a:xfrm>
+          <a:prstGeom prst="roundRect">
+            <a:avLst/>
+          </a:prstGeom>
+          <a:solidFill>
+            <a:srgbClr val="FFFFFF"/>
+          </a:solidFill>
+          <a:ln>
+            <a:solidFill>
+              <a:srgbClr val="D8DDE6"/>
+            </a:solidFill>
+          </a:ln>
+        </p:spPr>
+        <p:style>
+          <a:lnRef idx="1">
+            <a:schemeClr val="accent1"/>
+          </a:lnRef>
+          <a:fillRef idx="3">
+            <a:schemeClr val="accent1"/>
+          </a:fillRef>
+          <a:effectRef idx="2">
+            <a:schemeClr val="accent1"/>
+          </a:effectRef>
+          <a:fontRef idx="minor">
+            <a:schemeClr val="lt1"/>
+          </a:fontRef>
+        </p:style>
+        <p:txBody>
+          <a:bodyPr rtlCol="0" anchor="ctr"/>
+          <a:lstStyle/>
+          <a:p>
+            <a:pPr algn="ctr"/>
+          </a:p>
+        </p:txBody>
+      </p:sp>
+      <p:sp>
+        <p:nvSpPr>
+          <p:cNvPr id="11" name="TextBox 10"/>
+          <p:cNvSpPr txBox="1"/>
+          <p:nvPr/>
+        </p:nvSpPr>
+        <p:spPr>
+          <a:xfrm>
+            <a:off x="2935224" y="2313432"/>
+            <a:ext cx="1700784" cy="292608"/>
+          </a:xfrm>
+          <a:prstGeom prst="rect">
+            <a:avLst/>
+          </a:prstGeom>
+          <a:noFill/>
+        </p:spPr>
+        <p:txBody>
+          <a:bodyPr wrap="square">
+            <a:spAutoFit/>
+          </a:bodyPr>
+          <a:lstStyle/>
+          <a:p>
+            <a:pPr algn="ctr"/>
+            <a:r>
+              <a:rPr sz="1600" b="1">
+                <a:solidFill>
+                  <a:srgbClr val="007482"/>
+                </a:solidFill>
+                <a:latin typeface="Microsoft YaHei"/>
+              </a:rPr>
+              <a:t>QEMU</a:t>
+            </a:r>
+          </a:p>
+        </p:txBody>
+      </p:sp>
+      <p:sp>
+        <p:nvSpPr>
+          <p:cNvPr id="12" name="TextBox 11"/>
+          <p:cNvSpPr txBox="1"/>
+          <p:nvPr/>
+        </p:nvSpPr>
+        <p:spPr>
+          <a:xfrm>
+            <a:off x="2953512" y="2706624"/>
+            <a:ext cx="1664208" cy="749808"/>
+          </a:xfrm>
+          <a:prstGeom prst="rect">
+            <a:avLst/>
+          </a:prstGeom>
+          <a:noFill/>
+        </p:spPr>
+        <p:txBody>
+          <a:bodyPr wrap="square">
+            <a:spAutoFit/>
+          </a:bodyPr>
+          <a:lstStyle/>
+          <a:p>
+            <a:pPr algn="ctr"/>
+            <a:r>
+              <a:rPr sz="1300" b="0">
+                <a:solidFill>
+                  <a:srgbClr val="22252B"/>
+                </a:solidFill>
+                <a:latin typeface="Microsoft YaHei"/>
+              </a:rPr>
+              <a:t>模拟 virt
+加载内核</a:t>
+            </a:r>
+          </a:p>
+        </p:txBody>
+      </p:sp>
+      <p:sp>
+        <p:nvSpPr>
+          <p:cNvPr id="13" name="TextBox 12"/>
+          <p:cNvSpPr txBox="1"/>
+          <p:nvPr/>
+        </p:nvSpPr>
+        <p:spPr>
+          <a:xfrm>
+            <a:off x="4965192" y="2743200"/>
+            <a:ext cx="228600" cy="274320"/>
+          </a:xfrm>
+          <a:prstGeom prst="rect">
+            <a:avLst/>
+          </a:prstGeom>
+          <a:noFill/>
+        </p:spPr>
+        <p:txBody>
+          <a:bodyPr wrap="square">
+            <a:spAutoFit/>
+          </a:bodyPr>
+          <a:lstStyle/>
+          <a:p>
+            <a:pPr algn="ctr"/>
+            <a:r>
+              <a:rPr sz="2000" b="1">
+                <a:solidFill>
+                  <a:srgbClr val="5B6370"/>
+                </a:solidFill>
+                <a:latin typeface="Microsoft YaHei"/>
+              </a:rPr>
+              <a:t>→</a:t>
+            </a:r>
+          </a:p>
+        </p:txBody>
+      </p:sp>
+      <p:sp>
+        <p:nvSpPr>
+          <p:cNvPr id="14" name="Rounded Rectangle 13"/>
+          <p:cNvSpPr/>
+          <p:nvPr/>
+        </p:nvSpPr>
+        <p:spPr>
+          <a:xfrm>
+            <a:off x="5010912" y="2148840"/>
+            <a:ext cx="1993392" cy="1600200"/>
+          </a:xfrm>
+          <a:prstGeom prst="roundRect">
+            <a:avLst/>
+          </a:prstGeom>
+          <a:solidFill>
+            <a:srgbClr val="FFFFFF"/>
+          </a:solidFill>
+          <a:ln>
+            <a:solidFill>
+              <a:srgbClr val="D8DDE6"/>
+            </a:solidFill>
+          </a:ln>
+        </p:spPr>
+        <p:style>
+          <a:lnRef idx="1">
+            <a:schemeClr val="accent1"/>
+          </a:lnRef>
+          <a:fillRef idx="3">
+            <a:schemeClr val="accent1"/>
+          </a:fillRef>
+          <a:effectRef idx="2">
+            <a:schemeClr val="accent1"/>
+          </a:effectRef>
+          <a:fontRef idx="minor">
+            <a:schemeClr val="lt1"/>
+          </a:fontRef>
+        </p:style>
+        <p:txBody>
+          <a:bodyPr rtlCol="0" anchor="ctr"/>
+          <a:lstStyle/>
+          <a:p>
+            <a:pPr algn="ctr"/>
+          </a:p>
+        </p:txBody>
+      </p:sp>
+      <p:sp>
+        <p:nvSpPr>
+          <p:cNvPr id="15" name="TextBox 14"/>
+          <p:cNvSpPr txBox="1"/>
+          <p:nvPr/>
+        </p:nvSpPr>
+        <p:spPr>
+          <a:xfrm>
+            <a:off x="5157216" y="2313432"/>
+            <a:ext cx="1700784" cy="292608"/>
+          </a:xfrm>
+          <a:prstGeom prst="rect">
+            <a:avLst/>
+          </a:prstGeom>
+          <a:noFill/>
+        </p:spPr>
+        <p:txBody>
+          <a:bodyPr wrap="square">
+            <a:spAutoFit/>
+          </a:bodyPr>
+          <a:lstStyle/>
+          <a:p>
+            <a:pPr algn="ctr"/>
+            <a:r>
+              <a:rPr sz="1600" b="1">
+                <a:solidFill>
+                  <a:srgbClr val="B85F22"/>
+                </a:solidFill>
+                <a:latin typeface="Microsoft YaHei"/>
+              </a:rPr>
+              <a:t>_start</a:t>
+            </a:r>
+          </a:p>
+        </p:txBody>
+      </p:sp>
+      <p:sp>
+        <p:nvSpPr>
+          <p:cNvPr id="16" name="TextBox 15"/>
+          <p:cNvSpPr txBox="1"/>
+          <p:nvPr/>
+        </p:nvSpPr>
+        <p:spPr>
+          <a:xfrm>
+            <a:off x="5175504" y="2706624"/>
+            <a:ext cx="1664208" cy="749808"/>
+          </a:xfrm>
+          <a:prstGeom prst="rect">
+            <a:avLst/>
+          </a:prstGeom>
+          <a:noFill/>
+        </p:spPr>
+        <p:txBody>
+          <a:bodyPr wrap="square">
+            <a:spAutoFit/>
+          </a:bodyPr>
+          <a:lstStyle/>
+          <a:p>
+            <a:pPr algn="ctr"/>
+            <a:r>
+              <a:rPr sz="1300" b="0">
+                <a:solidFill>
+                  <a:srgbClr val="22252B"/>
+                </a:solidFill>
+                <a:latin typeface="Microsoft YaHei"/>
+              </a:rPr>
+              <a:t>设置 sp
+调用 C</a:t>
+            </a:r>
+          </a:p>
+        </p:txBody>
+      </p:sp>
+      <p:sp>
+        <p:nvSpPr>
+          <p:cNvPr id="17" name="TextBox 16"/>
+          <p:cNvSpPr txBox="1"/>
+          <p:nvPr/>
+        </p:nvSpPr>
+        <p:spPr>
+          <a:xfrm>
+            <a:off x="7187184" y="2743200"/>
+            <a:ext cx="228600" cy="274320"/>
+          </a:xfrm>
+          <a:prstGeom prst="rect">
+            <a:avLst/>
+          </a:prstGeom>
+          <a:noFill/>
+        </p:spPr>
+        <p:txBody>
+          <a:bodyPr wrap="square">
+            <a:spAutoFit/>
+          </a:bodyPr>
+          <a:lstStyle/>
+          <a:p>
+            <a:pPr algn="ctr"/>
+            <a:r>
+              <a:rPr sz="2000" b="1">
+                <a:solidFill>
+                  <a:srgbClr val="5B6370"/>
+                </a:solidFill>
+                <a:latin typeface="Microsoft YaHei"/>
+              </a:rPr>
+              <a:t>→</a:t>
+            </a:r>
+          </a:p>
+        </p:txBody>
+      </p:sp>
+      <p:sp>
+        <p:nvSpPr>
+          <p:cNvPr id="18" name="Rounded Rectangle 17"/>
+          <p:cNvSpPr/>
+          <p:nvPr/>
+        </p:nvSpPr>
+        <p:spPr>
+          <a:xfrm>
+            <a:off x="7232904" y="2148840"/>
+            <a:ext cx="1993392" cy="1600200"/>
+          </a:xfrm>
+          <a:prstGeom prst="roundRect">
+            <a:avLst/>
+          </a:prstGeom>
+          <a:solidFill>
+            <a:srgbClr val="FFFFFF"/>
+          </a:solidFill>
+          <a:ln>
+            <a:solidFill>
+              <a:srgbClr val="D8DDE6"/>
+            </a:solidFill>
+          </a:ln>
+        </p:spPr>
+        <p:style>
+          <a:lnRef idx="1">
+            <a:schemeClr val="accent1"/>
+          </a:lnRef>
+          <a:fillRef idx="3">
+            <a:schemeClr val="accent1"/>
+          </a:fillRef>
+          <a:effectRef idx="2">
+            <a:schemeClr val="accent1"/>
+          </a:effectRef>
+          <a:fontRef idx="minor">
+            <a:schemeClr val="lt1"/>
+          </a:fontRef>
+        </p:style>
+        <p:txBody>
+          <a:bodyPr rtlCol="0" anchor="ctr"/>
+          <a:lstStyle/>
+          <a:p>
+            <a:pPr algn="ctr"/>
+          </a:p>
+        </p:txBody>
+      </p:sp>
+      <p:sp>
+        <p:nvSpPr>
+          <p:cNvPr id="19" name="TextBox 18"/>
+          <p:cNvSpPr txBox="1"/>
+          <p:nvPr/>
+        </p:nvSpPr>
+        <p:spPr>
+          <a:xfrm>
+            <a:off x="7379208" y="2313432"/>
+            <a:ext cx="1700784" cy="292608"/>
+          </a:xfrm>
+          <a:prstGeom prst="rect">
+            <a:avLst/>
+          </a:prstGeom>
+          <a:noFill/>
+        </p:spPr>
+        <p:txBody>
+          <a:bodyPr wrap="square">
+            <a:spAutoFit/>
+          </a:bodyPr>
+          <a:lstStyle/>
+          <a:p>
+            <a:pPr algn="ctr"/>
+            <a:r>
+              <a:rPr sz="1600" b="1">
+                <a:solidFill>
+                  <a:srgbClr val="2A7E4E"/>
+                </a:solidFill>
+                <a:latin typeface="Microsoft YaHei"/>
+              </a:rPr>
+              <a:t>kernel_main</a:t>
+            </a:r>
+          </a:p>
+        </p:txBody>
+      </p:sp>
+      <p:sp>
+        <p:nvSpPr>
+          <p:cNvPr id="20" name="TextBox 19"/>
+          <p:cNvSpPr txBox="1"/>
+          <p:nvPr/>
+        </p:nvSpPr>
+        <p:spPr>
+          <a:xfrm>
+            <a:off x="7397496" y="2706624"/>
+            <a:ext cx="1664208" cy="749808"/>
+          </a:xfrm>
+          <a:prstGeom prst="rect">
+            <a:avLst/>
+          </a:prstGeom>
+          <a:noFill/>
+        </p:spPr>
+        <p:txBody>
+          <a:bodyPr wrap="square">
+            <a:spAutoFit/>
+          </a:bodyPr>
+          <a:lstStyle/>
+          <a:p>
+            <a:pPr algn="ctr"/>
+            <a:r>
+              <a:rPr sz="1300" b="0">
+                <a:solidFill>
+                  <a:srgbClr val="22252B"/>
+                </a:solidFill>
+                <a:latin typeface="Microsoft YaHei"/>
+              </a:rPr>
+              <a:t>调用 printk
+输出字符串</a:t>
+            </a:r>
+          </a:p>
+        </p:txBody>
+      </p:sp>
+      <p:sp>
+        <p:nvSpPr>
+          <p:cNvPr id="21" name="TextBox 20"/>
+          <p:cNvSpPr txBox="1"/>
+          <p:nvPr/>
+        </p:nvSpPr>
+        <p:spPr>
+          <a:xfrm>
+            <a:off x="9409176" y="2743200"/>
+            <a:ext cx="228600" cy="274320"/>
+          </a:xfrm>
+          <a:prstGeom prst="rect">
+            <a:avLst/>
+          </a:prstGeom>
+          <a:noFill/>
+        </p:spPr>
+        <p:txBody>
+          <a:bodyPr wrap="square">
+            <a:spAutoFit/>
+          </a:bodyPr>
+          <a:lstStyle/>
+          <a:p>
+            <a:pPr algn="ctr"/>
+            <a:r>
+              <a:rPr sz="2000" b="1">
+                <a:solidFill>
+                  <a:srgbClr val="5B6370"/>
+                </a:solidFill>
+                <a:latin typeface="Microsoft YaHei"/>
+              </a:rPr>
+              <a:t>→</a:t>
+            </a:r>
+          </a:p>
+        </p:txBody>
+      </p:sp>
+      <p:sp>
+        <p:nvSpPr>
+          <p:cNvPr id="22" name="Rounded Rectangle 21"/>
+          <p:cNvSpPr/>
+          <p:nvPr/>
+        </p:nvSpPr>
+        <p:spPr>
+          <a:xfrm>
+            <a:off x="9454896" y="2148840"/>
+            <a:ext cx="1993392" cy="1600200"/>
+          </a:xfrm>
+          <a:prstGeom prst="roundRect">
+            <a:avLst/>
+          </a:prstGeom>
+          <a:solidFill>
+            <a:srgbClr val="FFFFFF"/>
+          </a:solidFill>
+          <a:ln>
+            <a:solidFill>
+              <a:srgbClr val="D8DDE6"/>
+            </a:solidFill>
+          </a:ln>
+        </p:spPr>
+        <p:style>
+          <a:lnRef idx="1">
+            <a:schemeClr val="accent1"/>
+          </a:lnRef>
+          <a:fillRef idx="3">
+            <a:schemeClr val="accent1"/>
+          </a:fillRef>
+          <a:effectRef idx="2">
+            <a:schemeClr val="accent1"/>
+          </a:effectRef>
+          <a:fontRef idx="minor">
+            <a:schemeClr val="lt1"/>
+          </a:fontRef>
+        </p:style>
+        <p:txBody>
+          <a:bodyPr rtlCol="0" anchor="ctr"/>
+          <a:lstStyle/>
+          <a:p>
+            <a:pPr algn="ctr"/>
+          </a:p>
+        </p:txBody>
+      </p:sp>
+      <p:sp>
+        <p:nvSpPr>
+          <p:cNvPr id="23" name="TextBox 22"/>
+          <p:cNvSpPr txBox="1"/>
+          <p:nvPr/>
+        </p:nvSpPr>
+        <p:spPr>
+          <a:xfrm>
+            <a:off x="9601200" y="2313432"/>
+            <a:ext cx="1700784" cy="292608"/>
+          </a:xfrm>
+          <a:prstGeom prst="rect">
+            <a:avLst/>
+          </a:prstGeom>
+          <a:noFill/>
+        </p:spPr>
+        <p:txBody>
+          <a:bodyPr wrap="square">
+            <a:spAutoFit/>
+          </a:bodyPr>
+          <a:lstStyle/>
+          <a:p>
+            <a:pPr algn="ctr"/>
+            <a:r>
+              <a:rPr sz="1600" b="1">
+                <a:solidFill>
+                  <a:srgbClr val="A44440"/>
+                </a:solidFill>
+                <a:latin typeface="Microsoft YaHei"/>
+              </a:rPr>
+              <a:t>UART</a:t>
+            </a:r>
+          </a:p>
+        </p:txBody>
+      </p:sp>
+      <p:sp>
+        <p:nvSpPr>
+          <p:cNvPr id="24" name="TextBox 23"/>
+          <p:cNvSpPr txBox="1"/>
+          <p:nvPr/>
+        </p:nvSpPr>
+        <p:spPr>
+          <a:xfrm>
+            <a:off x="9619488" y="2706624"/>
+            <a:ext cx="1664208" cy="749808"/>
+          </a:xfrm>
+          <a:prstGeom prst="rect">
+            <a:avLst/>
+          </a:prstGeom>
+          <a:noFill/>
+        </p:spPr>
+        <p:txBody>
+          <a:bodyPr wrap="square">
+            <a:spAutoFit/>
+          </a:bodyPr>
+          <a:lstStyle/>
+          <a:p>
+            <a:pPr algn="ctr"/>
+            <a:r>
+              <a:rPr sz="1300" b="0">
+                <a:solidFill>
+                  <a:srgbClr val="22252B"/>
+                </a:solidFill>
+                <a:latin typeface="Microsoft YaHei"/>
+              </a:rPr>
+              <a:t>终端显示
+Hello</a:t>
+            </a:r>
+          </a:p>
+        </p:txBody>
+      </p:sp>
+    </p:spTree>
+  </p:cSld>
+  <p:clrMapOvr>
+    <a:masterClrMapping/>
+  </p:clrMapOvr>
+</p:sld>
+</file>
+
+<file path=ppt/slides/slide23.xml><?xml version="1.0" encoding="utf-8"?>
+<p:sld xmlns:a="http://schemas.openxmlformats.org/drawingml/2006/main" xmlns:p="http://schemas.openxmlformats.org/presentationml/2006/main" xmlns:r="http://schemas.openxmlformats.org/officeDocument/2006/relationships">
+  <p:cSld>
+    <p:bg>
+      <p:bgPr>
+        <a:solidFill>
+          <a:srgbClr val="F8F9FB"/>
+        </a:solidFill>
+        <a:effectLst/>
+      </p:bgPr>
+    </p:bg>
+    <p:spTree>
+      <p:nvGrpSpPr>
+        <p:cNvPr id="1" name=""/>
+        <p:cNvGrpSpPr/>
+        <p:nvPr/>
+      </p:nvGrpSpPr>
+      <p:grpSpPr/>
+      <p:sp>
+        <p:nvSpPr>
+          <p:cNvPr id="2" name="TextBox 1"/>
+          <p:cNvSpPr txBox="1"/>
+          <p:nvPr/>
+        </p:nvSpPr>
+        <p:spPr>
+          <a:xfrm>
+            <a:off x="640080" y="256032"/>
+            <a:ext cx="2194560" cy="274320"/>
+          </a:xfrm>
+          <a:prstGeom prst="rect">
+            <a:avLst/>
+          </a:prstGeom>
+          <a:noFill/>
+        </p:spPr>
+        <p:txBody>
+          <a:bodyPr wrap="square">
+            <a:spAutoFit/>
+          </a:bodyPr>
+          <a:lstStyle/>
+          <a:p>
+            <a:pPr algn="l"/>
+            <a:r>
+              <a:rPr sz="1300" b="1">
+                <a:solidFill>
+                  <a:srgbClr val="1C53A0"/>
+                </a:solidFill>
+                <a:latin typeface="Microsoft YaHei"/>
+              </a:rPr>
+              <a:t>板块四</a:t>
+            </a:r>
+          </a:p>
+        </p:txBody>
+      </p:sp>
+      <p:sp>
+        <p:nvSpPr>
+          <p:cNvPr id="3" name="TextBox 2"/>
+          <p:cNvSpPr txBox="1"/>
+          <p:nvPr/>
+        </p:nvSpPr>
+        <p:spPr>
+          <a:xfrm>
+            <a:off x="640080" y="502920"/>
+            <a:ext cx="10972800" cy="530352"/>
+          </a:xfrm>
+          <a:prstGeom prst="rect">
+            <a:avLst/>
+          </a:prstGeom>
+          <a:noFill/>
+        </p:spPr>
+        <p:txBody>
+          <a:bodyPr wrap="square">
+            <a:spAutoFit/>
+          </a:bodyPr>
+          <a:lstStyle/>
+          <a:p>
+            <a:pPr algn="l"/>
+            <a:r>
+              <a:rPr sz="3000" b="1">
+                <a:solidFill>
+                  <a:srgbClr val="22252B"/>
+                </a:solidFill>
+                <a:latin typeface="Microsoft YaHei"/>
+              </a:rPr>
+              <a:t>裸机启动逐步说明</a:t>
+            </a:r>
+          </a:p>
+        </p:txBody>
+      </p:sp>
+      <p:sp>
+        <p:nvSpPr>
+          <p:cNvPr id="4" name="TextBox 3"/>
+          <p:cNvSpPr txBox="1"/>
+          <p:nvPr/>
+        </p:nvSpPr>
+        <p:spPr>
+          <a:xfrm>
+            <a:off x="658368" y="1042415"/>
+            <a:ext cx="10881360" cy="320040"/>
+          </a:xfrm>
+          <a:prstGeom prst="rect">
+            <a:avLst/>
+          </a:prstGeom>
+          <a:noFill/>
+        </p:spPr>
+        <p:txBody>
+          <a:bodyPr wrap="square">
+            <a:spAutoFit/>
+          </a:bodyPr>
+          <a:lstStyle/>
+          <a:p>
+            <a:pPr algn="l"/>
+            <a:r>
+              <a:rPr sz="1400" b="0">
+                <a:solidFill>
+                  <a:srgbClr val="5B6370"/>
+                </a:solidFill>
+                <a:latin typeface="Microsoft YaHei"/>
+              </a:rPr>
+              <a:t>对照上一页的流程图，这里是文字版逐步说明。</a:t>
+            </a:r>
+          </a:p>
+        </p:txBody>
+      </p:sp>
+      <p:sp>
+        <p:nvSpPr>
+          <p:cNvPr id="5" name="Rectangle 4"/>
+          <p:cNvSpPr/>
+          <p:nvPr/>
+        </p:nvSpPr>
+        <p:spPr>
+          <a:xfrm>
+            <a:off x="640080" y="1353312"/>
+            <a:ext cx="10927080" cy="18288"/>
+          </a:xfrm>
+          <a:prstGeom prst="rect">
+            <a:avLst/>
+          </a:prstGeom>
+          <a:solidFill>
+            <a:srgbClr val="D8DDE6"/>
+          </a:solidFill>
+          <a:ln>
+            <a:noFill/>
+          </a:ln>
+        </p:spPr>
+        <p:style>
+          <a:lnRef idx="1">
+            <a:schemeClr val="accent1"/>
+          </a:lnRef>
+          <a:fillRef idx="3">
+            <a:schemeClr val="accent1"/>
+          </a:fillRef>
+          <a:effectRef idx="2">
+            <a:schemeClr val="accent1"/>
+          </a:effectRef>
+          <a:fontRef idx="minor">
+            <a:schemeClr val="lt1"/>
+          </a:fontRef>
+        </p:style>
+        <p:txBody>
+          <a:bodyPr rtlCol="0" anchor="ctr"/>
+          <a:lstStyle/>
+          <a:p>
+            <a:pPr algn="ctr"/>
+          </a:p>
+        </p:txBody>
+      </p:sp>
+      <p:sp>
+        <p:nvSpPr>
+          <p:cNvPr id="6" name="TextBox 5"/>
+          <p:cNvSpPr txBox="1"/>
+          <p:nvPr/>
+        </p:nvSpPr>
+        <p:spPr>
+          <a:xfrm>
+            <a:off x="868680" y="1691640"/>
+            <a:ext cx="10469880" cy="4709160"/>
+          </a:xfrm>
+          <a:prstGeom prst="rect">
+            <a:avLst/>
+          </a:prstGeom>
+          <a:noFill/>
+        </p:spPr>
+        <p:txBody>
+          <a:bodyPr wrap="square">
+            <a:spAutoFit/>
+          </a:bodyPr>
+          <a:lstStyle/>
+          <a:p>
+            <a:pPr>
+              <a:spcAft>
+                <a:spcPts val="900"/>
+              </a:spcAft>
+            </a:pPr>
+            <a:r>
+              <a:rPr sz="1700" b="0">
+                <a:solidFill>
+                  <a:srgbClr val="22252B"/>
+                </a:solidFill>
+                <a:latin typeface="Microsoft YaHei"/>
+              </a:rPr>
+              <a:t>① QEMU 把 build/minios.elf 加载进虚拟内存，按 ELF 头找到入口地址。</a:t>
+            </a:r>
+          </a:p>
+          <a:p>
+            <a:pPr>
+              <a:spcAft>
+                <a:spcPts val="900"/>
+              </a:spcAft>
+            </a:pPr>
+            <a:r>
+              <a:rPr sz="1700" b="0">
+                <a:solidFill>
+                  <a:srgbClr val="22252B"/>
+                </a:solidFill>
+                <a:latin typeface="Microsoft YaHei"/>
+              </a:rPr>
+              <a:t>② CPU 从入口地址（_start）取出第一条指令开始执行，此时还没有任何 C 环境。</a:t>
+            </a:r>
+          </a:p>
+          <a:p>
+            <a:pPr>
+              <a:spcAft>
+                <a:spcPts val="900"/>
+              </a:spcAft>
+            </a:pPr>
+            <a:r>
+              <a:rPr sz="1700" b="0">
+                <a:solidFill>
+                  <a:srgbClr val="22252B"/>
+                </a:solidFill>
+                <a:latin typeface="Microsoft YaHei"/>
+              </a:rPr>
+              <a:t>③ _start 把 $sp 指向预留的栈空间——没有这一步，C 函数完全不能用。</a:t>
+            </a:r>
+          </a:p>
+          <a:p>
+            <a:pPr>
+              <a:spcAft>
+                <a:spcPts val="900"/>
+              </a:spcAft>
+            </a:pPr>
+            <a:r>
+              <a:rPr sz="1700" b="0">
+                <a:solidFill>
+                  <a:srgbClr val="22252B"/>
+                </a:solidFill>
+                <a:latin typeface="Microsoft YaHei"/>
+              </a:rPr>
+              <a:t>④ bl kernel_main 跳转进 C 代码，从这里开始才是我们熟悉的 C 语言世界。</a:t>
+            </a:r>
+          </a:p>
+          <a:p>
+            <a:pPr>
+              <a:spcAft>
+                <a:spcPts val="900"/>
+              </a:spcAft>
+            </a:pPr>
+            <a:r>
+              <a:rPr sz="1700" b="0">
+                <a:solidFill>
+                  <a:srgbClr val="22252B"/>
+                </a:solidFill>
+                <a:latin typeface="Microsoft YaHei"/>
+              </a:rPr>
+              <a:t>⑤ kernel_main 调用 printk，printk 逐字符调用 uart_putc。</a:t>
+            </a:r>
+          </a:p>
+          <a:p>
+            <a:pPr>
+              <a:spcAft>
+                <a:spcPts val="900"/>
+              </a:spcAft>
+            </a:pPr>
+            <a:r>
+              <a:rPr sz="1700" b="0">
+                <a:solidFill>
+                  <a:srgbClr val="22252B"/>
+                </a:solidFill>
+                <a:latin typeface="Microsoft YaHei"/>
+              </a:rPr>
+              <a:t>⑥ uart_putc 直接向 UART0_BASE 这个内存地址写字节——这不是普通内存，是外设寄存器。</a:t>
+            </a:r>
+          </a:p>
+          <a:p>
+            <a:pPr>
+              <a:spcAft>
+                <a:spcPts val="900"/>
+              </a:spcAft>
+            </a:pPr>
+            <a:r>
+              <a:rPr sz="1700" b="0">
+                <a:solidFill>
+                  <a:srgbClr val="22252B"/>
+                </a:solidFill>
+                <a:latin typeface="Microsoft YaHei"/>
+              </a:rPr>
+              <a:t>⑦ QEMU 把这次写操作翻译成终端输出，我们才看到 Hello miniOS。</a:t>
+            </a:r>
+          </a:p>
+          <a:p>
+            <a:pPr>
+              <a:spcAft>
+                <a:spcPts val="900"/>
+              </a:spcAft>
+            </a:pPr>
+            <a:r>
+              <a:rPr sz="1700" b="0">
+                <a:solidFill>
+                  <a:srgbClr val="22252B"/>
+                </a:solidFill>
+                <a:latin typeface="Microsoft YaHei"/>
+              </a:rPr>
+              <a:t>⑧ kernel_main 结束后代码进入 halt 死循环，因为裸机没有“返回到操作系统”这回事。</a:t>
+            </a:r>
+          </a:p>
+        </p:txBody>
+      </p:sp>
+    </p:spTree>
+  </p:cSld>
+  <p:clrMapOvr>
+    <a:masterClrMapping/>
+  </p:clrMapOvr>
+</p:sld>
+</file>
+
+<file path=ppt/slides/slide24.xml><?xml version="1.0" encoding="utf-8"?>
+<p:sld xmlns:a="http://schemas.openxmlformats.org/drawingml/2006/main" xmlns:p="http://schemas.openxmlformats.org/presentationml/2006/main" xmlns:r="http://schemas.openxmlformats.org/officeDocument/2006/relationships">
+  <p:cSld>
+    <p:bg>
+      <p:bgPr>
+        <a:solidFill>
+          <a:srgbClr val="F8F9FB"/>
+        </a:solidFill>
+        <a:effectLst/>
+      </p:bgPr>
+    </p:bg>
+    <p:spTree>
+      <p:nvGrpSpPr>
+        <p:cNvPr id="1" name=""/>
+        <p:cNvGrpSpPr/>
+        <p:nvPr/>
+      </p:nvGrpSpPr>
+      <p:grpSpPr/>
+      <p:sp>
+        <p:nvSpPr>
+          <p:cNvPr id="2" name="TextBox 1"/>
+          <p:cNvSpPr txBox="1"/>
+          <p:nvPr/>
+        </p:nvSpPr>
+        <p:spPr>
+          <a:xfrm>
+            <a:off x="640080" y="256032"/>
+            <a:ext cx="2194560" cy="274320"/>
+          </a:xfrm>
+          <a:prstGeom prst="rect">
+            <a:avLst/>
+          </a:prstGeom>
+          <a:noFill/>
+        </p:spPr>
+        <p:txBody>
+          <a:bodyPr wrap="square">
+            <a:spAutoFit/>
+          </a:bodyPr>
+          <a:lstStyle/>
+          <a:p>
+            <a:pPr algn="l"/>
+            <a:r>
+              <a:rPr sz="1300" b="1">
+                <a:solidFill>
+                  <a:srgbClr val="1C53A0"/>
+                </a:solidFill>
+                <a:latin typeface="Microsoft YaHei"/>
+              </a:rPr>
+              <a:t>板块四</a:t>
+            </a:r>
+          </a:p>
+        </p:txBody>
+      </p:sp>
+      <p:sp>
+        <p:nvSpPr>
+          <p:cNvPr id="3" name="TextBox 2"/>
+          <p:cNvSpPr txBox="1"/>
+          <p:nvPr/>
+        </p:nvSpPr>
+        <p:spPr>
+          <a:xfrm>
+            <a:off x="640080" y="502920"/>
+            <a:ext cx="10972800" cy="530352"/>
+          </a:xfrm>
+          <a:prstGeom prst="rect">
+            <a:avLst/>
+          </a:prstGeom>
+          <a:noFill/>
+        </p:spPr>
+        <p:txBody>
+          <a:bodyPr wrap="square">
+            <a:spAutoFit/>
+          </a:bodyPr>
+          <a:lstStyle/>
+          <a:p>
+            <a:pPr algn="l"/>
+            <a:r>
+              <a:rPr sz="3000" b="1">
+                <a:solidFill>
+                  <a:srgbClr val="22252B"/>
+                </a:solidFill>
+                <a:latin typeface="Microsoft YaHei"/>
+              </a:rPr>
+              <a:t>实验命令</a:t>
+            </a:r>
+          </a:p>
+        </p:txBody>
+      </p:sp>
+      <p:sp>
+        <p:nvSpPr>
+          <p:cNvPr id="4" name="TextBox 3"/>
+          <p:cNvSpPr txBox="1"/>
+          <p:nvPr/>
+        </p:nvSpPr>
+        <p:spPr>
+          <a:xfrm>
+            <a:off x="658368" y="1042415"/>
+            <a:ext cx="10881360" cy="320040"/>
+          </a:xfrm>
+          <a:prstGeom prst="rect">
+            <a:avLst/>
+          </a:prstGeom>
+          <a:noFill/>
+        </p:spPr>
+        <p:txBody>
+          <a:bodyPr wrap="square">
+            <a:spAutoFit/>
+          </a:bodyPr>
+          <a:lstStyle/>
+          <a:p>
+            <a:pPr algn="l"/>
+            <a:r>
+              <a:rPr sz="1400" b="0">
+                <a:solidFill>
+                  <a:srgbClr val="5B6370"/>
+                </a:solidFill>
+                <a:latin typeface="Microsoft YaHei"/>
+              </a:rPr>
+              <a:t>预期串口输出：Hello miniOS on LoongArch64。未执行过 make run 就不能写“已通过”，工具链缺失要记录“未执行”和失败原因。</a:t>
+            </a:r>
+          </a:p>
+        </p:txBody>
+      </p:sp>
+      <p:sp>
+        <p:nvSpPr>
+          <p:cNvPr id="5" name="Rectangle 4"/>
+          <p:cNvSpPr/>
+          <p:nvPr/>
+        </p:nvSpPr>
+        <p:spPr>
+          <a:xfrm>
+            <a:off x="640080" y="1353312"/>
+            <a:ext cx="10927080" cy="18288"/>
+          </a:xfrm>
+          <a:prstGeom prst="rect">
+            <a:avLst/>
+          </a:prstGeom>
+          <a:solidFill>
+            <a:srgbClr val="D8DDE6"/>
+          </a:solidFill>
+          <a:ln>
+            <a:noFill/>
+          </a:ln>
+        </p:spPr>
+        <p:style>
+          <a:lnRef idx="1">
+            <a:schemeClr val="accent1"/>
+          </a:lnRef>
+          <a:fillRef idx="3">
+            <a:schemeClr val="accent1"/>
+          </a:fillRef>
+          <a:effectRef idx="2">
+            <a:schemeClr val="accent1"/>
+          </a:effectRef>
+          <a:fontRef idx="minor">
+            <a:schemeClr val="lt1"/>
+          </a:fontRef>
+        </p:style>
+        <p:txBody>
+          <a:bodyPr rtlCol="0" anchor="ctr"/>
+          <a:lstStyle/>
+          <a:p>
+            <a:pPr algn="ctr"/>
+          </a:p>
+        </p:txBody>
+      </p:sp>
+      <p:sp>
+        <p:nvSpPr>
+          <p:cNvPr id="6" name="Rounded Rectangle 5"/>
+          <p:cNvSpPr/>
+          <p:nvPr/>
+        </p:nvSpPr>
+        <p:spPr>
+          <a:xfrm>
+            <a:off x="749808" y="1600200"/>
+            <a:ext cx="10716768" cy="4645152"/>
+          </a:xfrm>
+          <a:prstGeom prst="roundRect">
+            <a:avLst/>
+          </a:prstGeom>
+          <a:solidFill>
+            <a:srgbClr val="20242C"/>
+          </a:solidFill>
+          <a:ln>
+            <a:solidFill>
+              <a:srgbClr val="20242C"/>
+            </a:solidFill>
+          </a:ln>
+        </p:spPr>
+        <p:style>
+          <a:lnRef idx="1">
+            <a:schemeClr val="accent1"/>
+          </a:lnRef>
+          <a:fillRef idx="3">
+            <a:schemeClr val="accent1"/>
+          </a:fillRef>
+          <a:effectRef idx="2">
+            <a:schemeClr val="accent1"/>
+          </a:effectRef>
+          <a:fontRef idx="minor">
+            <a:schemeClr val="lt1"/>
+          </a:fontRef>
+        </p:style>
+        <p:txBody>
+          <a:bodyPr rtlCol="0" anchor="ctr" wrap="square" lIns="182880" rIns="182880" tIns="146304"/>
+          <a:lstStyle/>
+          <a:p>
+            <a:pPr algn="ctr"/>
+            <a:r>
+              <a:rPr sz="1300" b="0">
+                <a:solidFill>
+                  <a:srgbClr val="EEF1F6"/>
+                </a:solidFill>
+                <a:latin typeface="Consolas"/>
+              </a:rPr>
+              <a:t># 环境检查
+sh scripts/check-env.sh
+# 编译
+make clean
+make
+# 运行
+make run</a:t>
+            </a:r>
+          </a:p>
+        </p:txBody>
+      </p:sp>
+    </p:spTree>
+  </p:cSld>
+  <p:clrMapOvr>
+    <a:masterClrMapping/>
+  </p:clrMapOvr>
+</p:sld>
+</file>
+
+<file path=ppt/slides/slide25.xml><?xml version="1.0" encoding="utf-8"?>
+<p:sld xmlns:a="http://schemas.openxmlformats.org/drawingml/2006/main" xmlns:p="http://schemas.openxmlformats.org/presentationml/2006/main" xmlns:r="http://schemas.openxmlformats.org/officeDocument/2006/relationships">
+  <p:cSld>
+    <p:bg>
+      <p:bgPr>
+        <a:solidFill>
+          <a:srgbClr val="F8F9FB"/>
+        </a:solidFill>
+        <a:effectLst/>
+      </p:bgPr>
+    </p:bg>
+    <p:spTree>
+      <p:nvGrpSpPr>
+        <p:cNvPr id="1" name=""/>
+        <p:cNvGrpSpPr/>
+        <p:nvPr/>
+      </p:nvGrpSpPr>
+      <p:grpSpPr/>
+      <p:sp>
+        <p:nvSpPr>
+          <p:cNvPr id="2" name="TextBox 1"/>
+          <p:cNvSpPr txBox="1"/>
+          <p:nvPr/>
+        </p:nvSpPr>
+        <p:spPr>
+          <a:xfrm>
+            <a:off x="640080" y="256032"/>
+            <a:ext cx="2194560" cy="274320"/>
+          </a:xfrm>
+          <a:prstGeom prst="rect">
+            <a:avLst/>
+          </a:prstGeom>
+          <a:noFill/>
+        </p:spPr>
+        <p:txBody>
+          <a:bodyPr wrap="square">
+            <a:spAutoFit/>
+          </a:bodyPr>
+          <a:lstStyle/>
+          <a:p>
+            <a:pPr algn="l"/>
+            <a:r>
+              <a:rPr sz="1300" b="1">
+                <a:solidFill>
+                  <a:srgbClr val="1C53A0"/>
+                </a:solidFill>
+                <a:latin typeface="Microsoft YaHei"/>
+              </a:rPr>
+              <a:t>收尾</a:t>
+            </a:r>
+          </a:p>
+        </p:txBody>
+      </p:sp>
+      <p:sp>
+        <p:nvSpPr>
+          <p:cNvPr id="3" name="TextBox 2"/>
+          <p:cNvSpPr txBox="1"/>
+          <p:nvPr/>
+        </p:nvSpPr>
+        <p:spPr>
+          <a:xfrm>
+            <a:off x="640080" y="502920"/>
+            <a:ext cx="10972800" cy="530352"/>
+          </a:xfrm>
+          <a:prstGeom prst="rect">
+            <a:avLst/>
+          </a:prstGeom>
+          <a:noFill/>
+        </p:spPr>
+        <p:txBody>
+          <a:bodyPr wrap="square">
+            <a:spAutoFit/>
+          </a:bodyPr>
+          <a:lstStyle/>
+          <a:p>
+            <a:pPr algn="l"/>
+            <a:r>
+              <a:rPr sz="3000" b="1">
+                <a:solidFill>
+                  <a:srgbClr val="22252B"/>
+                </a:solidFill>
+                <a:latin typeface="Microsoft YaHei"/>
+              </a:rPr>
+              <a:t>本周边界</a:t>
+            </a:r>
+          </a:p>
+        </p:txBody>
+      </p:sp>
+      <p:sp>
+        <p:nvSpPr>
+          <p:cNvPr id="4" name="Rectangle 3"/>
+          <p:cNvSpPr/>
+          <p:nvPr/>
+        </p:nvSpPr>
+        <p:spPr>
+          <a:xfrm>
+            <a:off x="640080" y="1353312"/>
+            <a:ext cx="10927080" cy="18288"/>
+          </a:xfrm>
+          <a:prstGeom prst="rect">
+            <a:avLst/>
+          </a:prstGeom>
+          <a:solidFill>
+            <a:srgbClr val="D8DDE6"/>
+          </a:solidFill>
+          <a:ln>
+            <a:noFill/>
+          </a:ln>
+        </p:spPr>
+        <p:style>
+          <a:lnRef idx="1">
+            <a:schemeClr val="accent1"/>
+          </a:lnRef>
+          <a:fillRef idx="3">
+            <a:schemeClr val="accent1"/>
+          </a:fillRef>
+          <a:effectRef idx="2">
+            <a:schemeClr val="accent1"/>
+          </a:effectRef>
+          <a:fontRef idx="minor">
+            <a:schemeClr val="lt1"/>
+          </a:fontRef>
+        </p:style>
+        <p:txBody>
+          <a:bodyPr rtlCol="0" anchor="ctr"/>
+          <a:lstStyle/>
+          <a:p>
+            <a:pPr algn="ctr"/>
+          </a:p>
+        </p:txBody>
+      </p:sp>
+      <p:sp>
+        <p:nvSpPr>
+          <p:cNvPr id="5" name="TextBox 4"/>
+          <p:cNvSpPr txBox="1"/>
+          <p:nvPr/>
+        </p:nvSpPr>
+        <p:spPr>
+          <a:xfrm>
+            <a:off x="868680" y="1691640"/>
+            <a:ext cx="10469880" cy="4709160"/>
+          </a:xfrm>
+          <a:prstGeom prst="rect">
+            <a:avLst/>
+          </a:prstGeom>
+          <a:noFill/>
+        </p:spPr>
+        <p:txBody>
+          <a:bodyPr wrap="square">
+            <a:spAutoFit/>
+          </a:bodyPr>
+          <a:lstStyle/>
+          <a:p>
+            <a:pPr>
+              <a:spcAft>
+                <a:spcPts val="900"/>
+              </a:spcAft>
+            </a:pPr>
+            <a:r>
+              <a:rPr sz="2000" b="0">
+                <a:solidFill>
+                  <a:srgbClr val="22252B"/>
+                </a:solidFill>
+                <a:latin typeface="Microsoft YaHei"/>
+              </a:rPr>
+              <a:t>不讲完整操作系统，不讲进程、文件系统、虚拟内存。</a:t>
+            </a:r>
+          </a:p>
+          <a:p>
+            <a:pPr>
+              <a:spcAft>
+                <a:spcPts val="900"/>
+              </a:spcAft>
+            </a:pPr>
+            <a:r>
+              <a:rPr sz="2000" b="0">
+                <a:solidFill>
+                  <a:srgbClr val="22252B"/>
+                </a:solidFill>
+                <a:latin typeface="Microsoft YaHei"/>
+              </a:rPr>
+              <a:t>不直接适配 2K0300 开发板。</a:t>
+            </a:r>
+          </a:p>
+          <a:p>
+            <a:pPr>
+              <a:spcAft>
+                <a:spcPts val="900"/>
+              </a:spcAft>
+            </a:pPr>
+            <a:r>
+              <a:rPr sz="2000" b="0">
+                <a:solidFill>
+                  <a:srgbClr val="22252B"/>
+                </a:solidFill>
+                <a:latin typeface="Microsoft YaHei"/>
+              </a:rPr>
+              <a:t>不把未实测结果写成已通过——工具链缺失就记录“未执行”。</a:t>
+            </a:r>
+          </a:p>
+          <a:p>
+            <a:pPr>
+              <a:spcAft>
+                <a:spcPts val="900"/>
+              </a:spcAft>
+            </a:pPr>
+            <a:r>
+              <a:rPr sz="1700" b="0">
+                <a:solidFill>
+                  <a:srgbClr val="22252B"/>
+                </a:solidFill>
+                <a:latin typeface="Microsoft YaHei"/>
+              </a:rPr>
+              <a:t>当前 master 已包含第 2 周 .data/.bss 检查代码和 clear_bss，第 1 周课堂只讲 Hello 链路，这部分下周展开。</a:t>
+            </a:r>
+          </a:p>
+          <a:p>
+            <a:pPr>
+              <a:spcAft>
+                <a:spcPts val="900"/>
+              </a:spcAft>
+            </a:pPr>
+            <a:r>
+              <a:rPr sz="1700" b="0">
+                <a:solidFill>
+                  <a:srgbClr val="22252B"/>
+                </a:solidFill>
+                <a:latin typeface="Microsoft YaHei"/>
+              </a:rPr>
+              <a:t>lib/string.S、kernel/exception.c、kernel/syscall.c 属于后续周次铺垫，本周不展开。</a:t>
+            </a:r>
+          </a:p>
+          <a:p>
+            <a:pPr>
+              <a:spcAft>
+                <a:spcPts val="900"/>
+              </a:spcAft>
+            </a:pPr>
+            <a:r>
+              <a:rPr sz="1700" b="0">
+                <a:solidFill>
+                  <a:srgbClr val="22252B"/>
+                </a:solidFill>
+                <a:latin typeface="Microsoft YaHei"/>
+              </a:rPr>
+              <a:t>AI 共学：可以让 AI 解释代码、画流程图，不允许让 AI 直接生成实验代码或代替写实验报告。</a:t>
+            </a:r>
+          </a:p>
+        </p:txBody>
+      </p:sp>
+    </p:spTree>
+  </p:cSld>
+  <p:clrMapOvr>
+    <a:masterClrMapping/>
+  </p:clrMapOvr>
+</p:sld>
+</file>
+
+<file path=ppt/slides/slide26.xml><?xml version="1.0" encoding="utf-8"?>
+<p:sld xmlns:a="http://schemas.openxmlformats.org/drawingml/2006/main" xmlns:p="http://schemas.openxmlformats.org/presentationml/2006/main" xmlns:r="http://schemas.openxmlformats.org/officeDocument/2006/relationships">
+  <p:cSld>
+    <p:bg>
+      <p:bgPr>
+        <a:solidFill>
+          <a:srgbClr val="F8F9FB"/>
+        </a:solidFill>
+        <a:effectLst/>
+      </p:bgPr>
+    </p:bg>
+    <p:spTree>
+      <p:nvGrpSpPr>
+        <p:cNvPr id="1" name=""/>
+        <p:cNvGrpSpPr/>
+        <p:nvPr/>
+      </p:nvGrpSpPr>
+      <p:grpSpPr/>
+      <p:sp>
+        <p:nvSpPr>
+          <p:cNvPr id="2" name="TextBox 1"/>
+          <p:cNvSpPr txBox="1"/>
+          <p:nvPr/>
+        </p:nvSpPr>
+        <p:spPr>
+          <a:xfrm>
+            <a:off x="640080" y="256032"/>
+            <a:ext cx="2194560" cy="274320"/>
+          </a:xfrm>
+          <a:prstGeom prst="rect">
+            <a:avLst/>
+          </a:prstGeom>
+          <a:noFill/>
+        </p:spPr>
+        <p:txBody>
+          <a:bodyPr wrap="square">
+            <a:spAutoFit/>
+          </a:bodyPr>
+          <a:lstStyle/>
+          <a:p>
+            <a:pPr algn="l"/>
+            <a:r>
+              <a:rPr sz="1300" b="1">
+                <a:solidFill>
+                  <a:srgbClr val="1C53A0"/>
+                </a:solidFill>
+                <a:latin typeface="Microsoft YaHei"/>
+              </a:rPr>
               <a:t>收尾</a:t>
             </a:r>
           </a:p>
@@ -8450,7 +10062,7 @@
                 </a:solidFill>
                 <a:latin typeface="Microsoft YaHei"/>
               </a:rPr>
-              <a:t>用 C 语言经验理解汇编</a:t>
+              <a:t>打个比方：CPU 是只懂机器语言的专家</a:t>
             </a:r>
           </a:p>
         </p:txBody>
@@ -8526,13 +10138,13 @@
               </a:spcAft>
             </a:pPr>
             <a:r>
-              <a:rPr sz="2000" b="0">
+              <a:rPr sz="1700" b="0">
                 <a:solidFill>
                   <a:srgbClr val="22252B"/>
                 </a:solidFill>
                 <a:latin typeface="Microsoft YaHei"/>
               </a:rPr>
-              <a:t>C 里的变量：很多时候会临时放在寄存器或内存里。</a:t>
+              <a:t>CPU 就像一位只精通『机器语言』的专家，完全听不懂我们写的 C 语言。</a:t>
             </a:r>
           </a:p>
           <a:p>
@@ -8542,13 +10154,13 @@
               </a:spcAft>
             </a:pPr>
             <a:r>
-              <a:rPr sz="2000" b="0">
+              <a:rPr sz="1700" b="0">
                 <a:solidFill>
                   <a:srgbClr val="22252B"/>
                 </a:solidFill>
                 <a:latin typeface="Microsoft YaHei"/>
               </a:rPr>
-              <a:t>C 里的 if / while：底层会变成比较和跳转指令。</a:t>
+              <a:t>编译器/汇编器就是翻译：先把 C 语言译成汇编语言——这是一份贴近专家表达习惯的逐句译稿。</a:t>
             </a:r>
           </a:p>
           <a:p>
@@ -8558,13 +10170,13 @@
               </a:spcAft>
             </a:pPr>
             <a:r>
-              <a:rPr sz="2000" b="0">
+              <a:rPr sz="1700" b="0">
                 <a:solidFill>
                   <a:srgbClr val="22252B"/>
                 </a:solidFill>
                 <a:latin typeface="Microsoft YaHei"/>
               </a:rPr>
-              <a:t>C 里的函数调用：底层涉及参数寄存器、返回地址和栈。</a:t>
+              <a:t>汇编语言再被汇编器翻译成机器指令，这才是专家真正执行的语言，只剩 0 和 1。</a:t>
             </a:r>
           </a:p>
           <a:p>
@@ -8574,13 +10186,13 @@
               </a:spcAft>
             </a:pPr>
             <a:r>
-              <a:rPr sz="2000" b="0">
+              <a:rPr sz="1700" b="0">
                 <a:solidFill>
                   <a:srgbClr val="22252B"/>
                 </a:solidFill>
                 <a:latin typeface="Microsoft YaHei"/>
               </a:rPr>
-              <a:t>C 里的指针：底层就是地址，访存指令按地址读写数据。</a:t>
+              <a:t>我们学汇编，就是学会读懂这份『翻译中间稿』，看清 C 程序最终变成了什么。</a:t>
             </a:r>
           </a:p>
         </p:txBody>
@@ -8594,6 +10206,818 @@
 </file>
 
 <file path=ppt/slides/slide5.xml><?xml version="1.0" encoding="utf-8"?>
+<p:sld xmlns:a="http://schemas.openxmlformats.org/drawingml/2006/main" xmlns:p="http://schemas.openxmlformats.org/presentationml/2006/main" xmlns:r="http://schemas.openxmlformats.org/officeDocument/2006/relationships">
+  <p:cSld>
+    <p:bg>
+      <p:bgPr>
+        <a:solidFill>
+          <a:srgbClr val="F8F9FB"/>
+        </a:solidFill>
+        <a:effectLst/>
+      </p:bgPr>
+    </p:bg>
+    <p:spTree>
+      <p:nvGrpSpPr>
+        <p:cNvPr id="1" name=""/>
+        <p:cNvGrpSpPr/>
+        <p:nvPr/>
+      </p:nvGrpSpPr>
+      <p:grpSpPr/>
+      <p:sp>
+        <p:nvSpPr>
+          <p:cNvPr id="2" name="TextBox 1"/>
+          <p:cNvSpPr txBox="1"/>
+          <p:nvPr/>
+        </p:nvSpPr>
+        <p:spPr>
+          <a:xfrm>
+            <a:off x="640080" y="256032"/>
+            <a:ext cx="2194560" cy="274320"/>
+          </a:xfrm>
+          <a:prstGeom prst="rect">
+            <a:avLst/>
+          </a:prstGeom>
+          <a:noFill/>
+        </p:spPr>
+        <p:txBody>
+          <a:bodyPr wrap="square">
+            <a:spAutoFit/>
+          </a:bodyPr>
+          <a:lstStyle/>
+          <a:p>
+            <a:pPr algn="l"/>
+            <a:r>
+              <a:rPr sz="1300" b="1">
+                <a:solidFill>
+                  <a:srgbClr val="1C53A0"/>
+                </a:solidFill>
+                <a:latin typeface="Microsoft YaHei"/>
+              </a:rPr>
+              <a:t>板块一</a:t>
+            </a:r>
+          </a:p>
+        </p:txBody>
+      </p:sp>
+      <p:sp>
+        <p:nvSpPr>
+          <p:cNvPr id="3" name="TextBox 2"/>
+          <p:cNvSpPr txBox="1"/>
+          <p:nvPr/>
+        </p:nvSpPr>
+        <p:spPr>
+          <a:xfrm>
+            <a:off x="640080" y="502920"/>
+            <a:ext cx="10972800" cy="530352"/>
+          </a:xfrm>
+          <a:prstGeom prst="rect">
+            <a:avLst/>
+          </a:prstGeom>
+          <a:noFill/>
+        </p:spPr>
+        <p:txBody>
+          <a:bodyPr wrap="square">
+            <a:spAutoFit/>
+          </a:bodyPr>
+          <a:lstStyle/>
+          <a:p>
+            <a:pPr algn="l"/>
+            <a:r>
+              <a:rPr sz="3000" b="1">
+                <a:solidFill>
+                  <a:srgbClr val="22252B"/>
+                </a:solidFill>
+                <a:latin typeface="Microsoft YaHei"/>
+              </a:rPr>
+              <a:t>用 C 语言经验理解汇编</a:t>
+            </a:r>
+          </a:p>
+        </p:txBody>
+      </p:sp>
+      <p:sp>
+        <p:nvSpPr>
+          <p:cNvPr id="4" name="Rectangle 3"/>
+          <p:cNvSpPr/>
+          <p:nvPr/>
+        </p:nvSpPr>
+        <p:spPr>
+          <a:xfrm>
+            <a:off x="640080" y="1353312"/>
+            <a:ext cx="10927080" cy="18288"/>
+          </a:xfrm>
+          <a:prstGeom prst="rect">
+            <a:avLst/>
+          </a:prstGeom>
+          <a:solidFill>
+            <a:srgbClr val="D8DDE6"/>
+          </a:solidFill>
+          <a:ln>
+            <a:noFill/>
+          </a:ln>
+        </p:spPr>
+        <p:style>
+          <a:lnRef idx="1">
+            <a:schemeClr val="accent1"/>
+          </a:lnRef>
+          <a:fillRef idx="3">
+            <a:schemeClr val="accent1"/>
+          </a:fillRef>
+          <a:effectRef idx="2">
+            <a:schemeClr val="accent1"/>
+          </a:effectRef>
+          <a:fontRef idx="minor">
+            <a:schemeClr val="lt1"/>
+          </a:fontRef>
+        </p:style>
+        <p:txBody>
+          <a:bodyPr rtlCol="0" anchor="ctr"/>
+          <a:lstStyle/>
+          <a:p>
+            <a:pPr algn="ctr"/>
+          </a:p>
+        </p:txBody>
+      </p:sp>
+      <p:sp>
+        <p:nvSpPr>
+          <p:cNvPr id="5" name="TextBox 4"/>
+          <p:cNvSpPr txBox="1"/>
+          <p:nvPr/>
+        </p:nvSpPr>
+        <p:spPr>
+          <a:xfrm>
+            <a:off x="868680" y="1691640"/>
+            <a:ext cx="10469880" cy="4709160"/>
+          </a:xfrm>
+          <a:prstGeom prst="rect">
+            <a:avLst/>
+          </a:prstGeom>
+          <a:noFill/>
+        </p:spPr>
+        <p:txBody>
+          <a:bodyPr wrap="square">
+            <a:spAutoFit/>
+          </a:bodyPr>
+          <a:lstStyle/>
+          <a:p>
+            <a:pPr>
+              <a:spcAft>
+                <a:spcPts val="900"/>
+              </a:spcAft>
+            </a:pPr>
+            <a:r>
+              <a:rPr sz="2000" b="0">
+                <a:solidFill>
+                  <a:srgbClr val="22252B"/>
+                </a:solidFill>
+                <a:latin typeface="Microsoft YaHei"/>
+              </a:rPr>
+              <a:t>C 里的变量：很多时候会临时放在寄存器或内存里。</a:t>
+            </a:r>
+          </a:p>
+          <a:p>
+            <a:pPr>
+              <a:spcAft>
+                <a:spcPts val="900"/>
+              </a:spcAft>
+            </a:pPr>
+            <a:r>
+              <a:rPr sz="2000" b="0">
+                <a:solidFill>
+                  <a:srgbClr val="22252B"/>
+                </a:solidFill>
+                <a:latin typeface="Microsoft YaHei"/>
+              </a:rPr>
+              <a:t>C 里的 if / while：底层会变成比较和跳转指令。</a:t>
+            </a:r>
+          </a:p>
+          <a:p>
+            <a:pPr>
+              <a:spcAft>
+                <a:spcPts val="900"/>
+              </a:spcAft>
+            </a:pPr>
+            <a:r>
+              <a:rPr sz="2000" b="0">
+                <a:solidFill>
+                  <a:srgbClr val="22252B"/>
+                </a:solidFill>
+                <a:latin typeface="Microsoft YaHei"/>
+              </a:rPr>
+              <a:t>C 里的函数调用：底层涉及参数寄存器、返回地址和栈。</a:t>
+            </a:r>
+          </a:p>
+          <a:p>
+            <a:pPr>
+              <a:spcAft>
+                <a:spcPts val="900"/>
+              </a:spcAft>
+            </a:pPr>
+            <a:r>
+              <a:rPr sz="2000" b="0">
+                <a:solidFill>
+                  <a:srgbClr val="22252B"/>
+                </a:solidFill>
+                <a:latin typeface="Microsoft YaHei"/>
+              </a:rPr>
+              <a:t>C 里的指针：底层就是地址，访存指令按地址读写数据。</a:t>
+            </a:r>
+          </a:p>
+        </p:txBody>
+      </p:sp>
+    </p:spTree>
+  </p:cSld>
+  <p:clrMapOvr>
+    <a:masterClrMapping/>
+  </p:clrMapOvr>
+</p:sld>
+</file>
+
+<file path=ppt/slides/slide6.xml><?xml version="1.0" encoding="utf-8"?>
+<p:sld xmlns:a="http://schemas.openxmlformats.org/drawingml/2006/main" xmlns:p="http://schemas.openxmlformats.org/presentationml/2006/main" xmlns:r="http://schemas.openxmlformats.org/officeDocument/2006/relationships">
+  <p:cSld>
+    <p:bg>
+      <p:bgPr>
+        <a:solidFill>
+          <a:srgbClr val="F8F9FB"/>
+        </a:solidFill>
+        <a:effectLst/>
+      </p:bgPr>
+    </p:bg>
+    <p:spTree>
+      <p:nvGrpSpPr>
+        <p:cNvPr id="1" name=""/>
+        <p:cNvGrpSpPr/>
+        <p:nvPr/>
+      </p:nvGrpSpPr>
+      <p:grpSpPr/>
+      <p:sp>
+        <p:nvSpPr>
+          <p:cNvPr id="2" name="TextBox 1"/>
+          <p:cNvSpPr txBox="1"/>
+          <p:nvPr/>
+        </p:nvSpPr>
+        <p:spPr>
+          <a:xfrm>
+            <a:off x="640080" y="256032"/>
+            <a:ext cx="2194560" cy="274320"/>
+          </a:xfrm>
+          <a:prstGeom prst="rect">
+            <a:avLst/>
+          </a:prstGeom>
+          <a:noFill/>
+        </p:spPr>
+        <p:txBody>
+          <a:bodyPr wrap="square">
+            <a:spAutoFit/>
+          </a:bodyPr>
+          <a:lstStyle/>
+          <a:p>
+            <a:pPr algn="l"/>
+            <a:r>
+              <a:rPr sz="1300" b="1">
+                <a:solidFill>
+                  <a:srgbClr val="1C53A0"/>
+                </a:solidFill>
+                <a:latin typeface="Microsoft YaHei"/>
+              </a:rPr>
+              <a:t>板块一</a:t>
+            </a:r>
+          </a:p>
+        </p:txBody>
+      </p:sp>
+      <p:sp>
+        <p:nvSpPr>
+          <p:cNvPr id="3" name="TextBox 2"/>
+          <p:cNvSpPr txBox="1"/>
+          <p:nvPr/>
+        </p:nvSpPr>
+        <p:spPr>
+          <a:xfrm>
+            <a:off x="640080" y="502920"/>
+            <a:ext cx="10972800" cy="530352"/>
+          </a:xfrm>
+          <a:prstGeom prst="rect">
+            <a:avLst/>
+          </a:prstGeom>
+          <a:noFill/>
+        </p:spPr>
+        <p:txBody>
+          <a:bodyPr wrap="square">
+            <a:spAutoFit/>
+          </a:bodyPr>
+          <a:lstStyle/>
+          <a:p>
+            <a:pPr algn="l"/>
+            <a:r>
+              <a:rPr sz="3000" b="1">
+                <a:solidFill>
+                  <a:srgbClr val="22252B"/>
+                </a:solidFill>
+                <a:latin typeface="Microsoft YaHei"/>
+              </a:rPr>
+              <a:t>真实例子逐行拆解：add() 函数</a:t>
+            </a:r>
+          </a:p>
+        </p:txBody>
+      </p:sp>
+      <p:sp>
+        <p:nvSpPr>
+          <p:cNvPr id="4" name="TextBox 3"/>
+          <p:cNvSpPr txBox="1"/>
+          <p:nvPr/>
+        </p:nvSpPr>
+        <p:spPr>
+          <a:xfrm>
+            <a:off x="658368" y="1042415"/>
+            <a:ext cx="10881360" cy="320040"/>
+          </a:xfrm>
+          <a:prstGeom prst="rect">
+            <a:avLst/>
+          </a:prstGeom>
+          <a:noFill/>
+        </p:spPr>
+        <p:txBody>
+          <a:bodyPr wrap="square">
+            <a:spAutoFit/>
+          </a:bodyPr>
+          <a:lstStyle/>
+          <a:p>
+            <a:pPr algn="l"/>
+            <a:r>
+              <a:rPr sz="1400" b="0">
+                <a:solidFill>
+                  <a:srgbClr val="5B6370"/>
+                </a:solidFill>
+                <a:latin typeface="Microsoft YaHei"/>
+              </a:rPr>
+              <a:t>这就是刚才『翻译』比喻里的翻译稿：C 函数被翻译成了这份汇编。</a:t>
+            </a:r>
+          </a:p>
+        </p:txBody>
+      </p:sp>
+      <p:sp>
+        <p:nvSpPr>
+          <p:cNvPr id="5" name="Rectangle 4"/>
+          <p:cNvSpPr/>
+          <p:nvPr/>
+        </p:nvSpPr>
+        <p:spPr>
+          <a:xfrm>
+            <a:off x="640080" y="1353312"/>
+            <a:ext cx="10927080" cy="18288"/>
+          </a:xfrm>
+          <a:prstGeom prst="rect">
+            <a:avLst/>
+          </a:prstGeom>
+          <a:solidFill>
+            <a:srgbClr val="D8DDE6"/>
+          </a:solidFill>
+          <a:ln>
+            <a:noFill/>
+          </a:ln>
+        </p:spPr>
+        <p:style>
+          <a:lnRef idx="1">
+            <a:schemeClr val="accent1"/>
+          </a:lnRef>
+          <a:fillRef idx="3">
+            <a:schemeClr val="accent1"/>
+          </a:fillRef>
+          <a:effectRef idx="2">
+            <a:schemeClr val="accent1"/>
+          </a:effectRef>
+          <a:fontRef idx="minor">
+            <a:schemeClr val="lt1"/>
+          </a:fontRef>
+        </p:style>
+        <p:txBody>
+          <a:bodyPr rtlCol="0" anchor="ctr"/>
+          <a:lstStyle/>
+          <a:p>
+            <a:pPr algn="ctr"/>
+          </a:p>
+        </p:txBody>
+      </p:sp>
+      <p:sp>
+        <p:nvSpPr>
+          <p:cNvPr id="6" name="Rounded Rectangle 5"/>
+          <p:cNvSpPr/>
+          <p:nvPr/>
+        </p:nvSpPr>
+        <p:spPr>
+          <a:xfrm>
+            <a:off x="640080" y="1600200"/>
+            <a:ext cx="6035040" cy="4645152"/>
+          </a:xfrm>
+          <a:prstGeom prst="roundRect">
+            <a:avLst/>
+          </a:prstGeom>
+          <a:solidFill>
+            <a:srgbClr val="20242C"/>
+          </a:solidFill>
+          <a:ln>
+            <a:solidFill>
+              <a:srgbClr val="20242C"/>
+            </a:solidFill>
+          </a:ln>
+        </p:spPr>
+        <p:style>
+          <a:lnRef idx="1">
+            <a:schemeClr val="accent1"/>
+          </a:lnRef>
+          <a:fillRef idx="3">
+            <a:schemeClr val="accent1"/>
+          </a:fillRef>
+          <a:effectRef idx="2">
+            <a:schemeClr val="accent1"/>
+          </a:effectRef>
+          <a:fontRef idx="minor">
+            <a:schemeClr val="lt1"/>
+          </a:fontRef>
+        </p:style>
+        <p:txBody>
+          <a:bodyPr rtlCol="0" anchor="ctr" wrap="square" lIns="164592" rIns="164592" tIns="128016"/>
+          <a:lstStyle/>
+          <a:p>
+            <a:pPr algn="ctr"/>
+            <a:r>
+              <a:rPr sz="1200" b="0">
+                <a:solidFill>
+                  <a:srgbClr val="EEF1F6"/>
+                </a:solidFill>
+                <a:latin typeface="Consolas"/>
+              </a:rPr>
+              <a:t>int add(int a, int b)
+{
+    return a + b;
+}
+# 对应 LoongArch 汇编（-O0，教学示意）
+add:
+    addi.d  $sp, $sp, -16      # 开辟栈空间
+    st.w    $a0, $sp, 12       # 参数 a 存入栈
+    st.w    $a1, $sp, 8        # 参数 b 存入栈
+    ld.w    $t0, $sp, 12       # 取回 a
+    ld.w    $t1, $sp, 8        # 取回 b
+    add.w   $a0, $t0, $t1      # 计算 a + b，结果放入返回值寄存器
+    addi.d  $sp, $sp, 16       # 释放栈空间
+    jirl    $zero, $ra, 0      # 返回调用者</a:t>
+            </a:r>
+          </a:p>
+        </p:txBody>
+      </p:sp>
+      <p:sp>
+        <p:nvSpPr>
+          <p:cNvPr id="7" name="TextBox 6"/>
+          <p:cNvSpPr txBox="1"/>
+          <p:nvPr/>
+        </p:nvSpPr>
+        <p:spPr>
+          <a:xfrm>
+            <a:off x="6858000" y="1691640"/>
+            <a:ext cx="4709160" cy="4526280"/>
+          </a:xfrm>
+          <a:prstGeom prst="rect">
+            <a:avLst/>
+          </a:prstGeom>
+          <a:noFill/>
+        </p:spPr>
+        <p:txBody>
+          <a:bodyPr wrap="square">
+            <a:spAutoFit/>
+          </a:bodyPr>
+          <a:lstStyle/>
+          <a:p>
+            <a:pPr>
+              <a:spcAft>
+                <a:spcPts val="800"/>
+              </a:spcAft>
+            </a:pPr>
+            <a:r>
+              <a:rPr sz="1400" b="0">
+                <a:solidFill>
+                  <a:srgbClr val="22252B"/>
+                </a:solidFill>
+                <a:latin typeface="Microsoft YaHei"/>
+              </a:rPr>
+              <a:t>① $a0、$a1 是参数寄存器，对应 a、b——翻译稿里已经用上了『专家的方言』。</a:t>
+            </a:r>
+          </a:p>
+          <a:p>
+            <a:pPr>
+              <a:spcAft>
+                <a:spcPts val="800"/>
+              </a:spcAft>
+            </a:pPr>
+            <a:r>
+              <a:rPr sz="1400" b="0">
+                <a:solidFill>
+                  <a:srgbClr val="22252B"/>
+                </a:solidFill>
+                <a:latin typeface="Microsoft YaHei"/>
+              </a:rPr>
+              <a:t>② 出现栈上存取是因为 -O0 未优化；优化后可能直接用寄存器完成，不落栈。</a:t>
+            </a:r>
+          </a:p>
+          <a:p>
+            <a:pPr>
+              <a:spcAft>
+                <a:spcPts val="800"/>
+              </a:spcAft>
+            </a:pPr>
+            <a:r>
+              <a:rPr sz="1400" b="0">
+                <a:solidFill>
+                  <a:srgbClr val="22252B"/>
+                </a:solidFill>
+                <a:latin typeface="Microsoft YaHei"/>
+              </a:rPr>
+              <a:t>③ add.w 是唯一『做加法』的指令，其余都是数据搬运。</a:t>
+            </a:r>
+          </a:p>
+          <a:p>
+            <a:pPr>
+              <a:spcAft>
+                <a:spcPts val="800"/>
+              </a:spcAft>
+            </a:pPr>
+            <a:r>
+              <a:rPr sz="1400" b="0">
+                <a:solidFill>
+                  <a:srgbClr val="22252B"/>
+                </a:solidFill>
+                <a:latin typeface="Microsoft YaHei"/>
+              </a:rPr>
+              <a:t>④ 返回值放在 $a0。</a:t>
+            </a:r>
+          </a:p>
+          <a:p>
+            <a:pPr>
+              <a:spcAft>
+                <a:spcPts val="800"/>
+              </a:spcAft>
+            </a:pPr>
+            <a:r>
+              <a:rPr sz="1400" b="0">
+                <a:solidFill>
+                  <a:srgbClr val="22252B"/>
+                </a:solidFill>
+                <a:latin typeface="Microsoft YaHei"/>
+              </a:rPr>
+              <a:t>⑤ jirl $zero, $ra, 0 配合 $ra 完成函数返回。</a:t>
+            </a:r>
+          </a:p>
+          <a:p>
+            <a:pPr>
+              <a:spcAft>
+                <a:spcPts val="800"/>
+              </a:spcAft>
+            </a:pPr>
+            <a:r>
+              <a:rPr sz="1400" b="0">
+                <a:solidFill>
+                  <a:srgbClr val="22252B"/>
+                </a:solidFill>
+                <a:latin typeface="Microsoft YaHei"/>
+              </a:rPr>
+              <a:t>教学示意汇编，非本机实测编译输出：本机未装 loongarch64-linux-gnu-gcc。</a:t>
+            </a:r>
+          </a:p>
+        </p:txBody>
+      </p:sp>
+    </p:spTree>
+  </p:cSld>
+  <p:clrMapOvr>
+    <a:masterClrMapping/>
+  </p:clrMapOvr>
+</p:sld>
+</file>
+
+<file path=ppt/slides/slide7.xml><?xml version="1.0" encoding="utf-8"?>
+<p:sld xmlns:a="http://schemas.openxmlformats.org/drawingml/2006/main" xmlns:p="http://schemas.openxmlformats.org/presentationml/2006/main" xmlns:r="http://schemas.openxmlformats.org/officeDocument/2006/relationships">
+  <p:cSld>
+    <p:bg>
+      <p:bgPr>
+        <a:solidFill>
+          <a:srgbClr val="F8F9FB"/>
+        </a:solidFill>
+        <a:effectLst/>
+      </p:bgPr>
+    </p:bg>
+    <p:spTree>
+      <p:nvGrpSpPr>
+        <p:cNvPr id="1" name=""/>
+        <p:cNvGrpSpPr/>
+        <p:nvPr/>
+      </p:nvGrpSpPr>
+      <p:grpSpPr/>
+      <p:sp>
+        <p:nvSpPr>
+          <p:cNvPr id="2" name="TextBox 1"/>
+          <p:cNvSpPr txBox="1"/>
+          <p:nvPr/>
+        </p:nvSpPr>
+        <p:spPr>
+          <a:xfrm>
+            <a:off x="640080" y="256032"/>
+            <a:ext cx="2194560" cy="274320"/>
+          </a:xfrm>
+          <a:prstGeom prst="rect">
+            <a:avLst/>
+          </a:prstGeom>
+          <a:noFill/>
+        </p:spPr>
+        <p:txBody>
+          <a:bodyPr wrap="square">
+            <a:spAutoFit/>
+          </a:bodyPr>
+          <a:lstStyle/>
+          <a:p>
+            <a:pPr algn="l"/>
+            <a:r>
+              <a:rPr sz="1300" b="1">
+                <a:solidFill>
+                  <a:srgbClr val="1C53A0"/>
+                </a:solidFill>
+                <a:latin typeface="Microsoft YaHei"/>
+              </a:rPr>
+              <a:t>板块一</a:t>
+            </a:r>
+          </a:p>
+        </p:txBody>
+      </p:sp>
+      <p:sp>
+        <p:nvSpPr>
+          <p:cNvPr id="3" name="TextBox 2"/>
+          <p:cNvSpPr txBox="1"/>
+          <p:nvPr/>
+        </p:nvSpPr>
+        <p:spPr>
+          <a:xfrm>
+            <a:off x="640080" y="502920"/>
+            <a:ext cx="10972800" cy="530352"/>
+          </a:xfrm>
+          <a:prstGeom prst="rect">
+            <a:avLst/>
+          </a:prstGeom>
+          <a:noFill/>
+        </p:spPr>
+        <p:txBody>
+          <a:bodyPr wrap="square">
+            <a:spAutoFit/>
+          </a:bodyPr>
+          <a:lstStyle/>
+          <a:p>
+            <a:pPr algn="l"/>
+            <a:r>
+              <a:rPr sz="3000" b="1">
+                <a:solidFill>
+                  <a:srgbClr val="22252B"/>
+                </a:solidFill>
+                <a:latin typeface="Microsoft YaHei"/>
+              </a:rPr>
+              <a:t>课堂活动：徒手推演 max()</a:t>
+            </a:r>
+          </a:p>
+        </p:txBody>
+      </p:sp>
+      <p:sp>
+        <p:nvSpPr>
+          <p:cNvPr id="4" name="Rectangle 3"/>
+          <p:cNvSpPr/>
+          <p:nvPr/>
+        </p:nvSpPr>
+        <p:spPr>
+          <a:xfrm>
+            <a:off x="640080" y="1353312"/>
+            <a:ext cx="10927080" cy="18288"/>
+          </a:xfrm>
+          <a:prstGeom prst="rect">
+            <a:avLst/>
+          </a:prstGeom>
+          <a:solidFill>
+            <a:srgbClr val="D8DDE6"/>
+          </a:solidFill>
+          <a:ln>
+            <a:noFill/>
+          </a:ln>
+        </p:spPr>
+        <p:style>
+          <a:lnRef idx="1">
+            <a:schemeClr val="accent1"/>
+          </a:lnRef>
+          <a:fillRef idx="3">
+            <a:schemeClr val="accent1"/>
+          </a:fillRef>
+          <a:effectRef idx="2">
+            <a:schemeClr val="accent1"/>
+          </a:effectRef>
+          <a:fontRef idx="minor">
+            <a:schemeClr val="lt1"/>
+          </a:fontRef>
+        </p:style>
+        <p:txBody>
+          <a:bodyPr rtlCol="0" anchor="ctr"/>
+          <a:lstStyle/>
+          <a:p>
+            <a:pPr algn="ctr"/>
+          </a:p>
+        </p:txBody>
+      </p:sp>
+      <p:sp>
+        <p:nvSpPr>
+          <p:cNvPr id="5" name="TextBox 4"/>
+          <p:cNvSpPr txBox="1"/>
+          <p:nvPr/>
+        </p:nvSpPr>
+        <p:spPr>
+          <a:xfrm>
+            <a:off x="868680" y="1691640"/>
+            <a:ext cx="10469880" cy="4709160"/>
+          </a:xfrm>
+          <a:prstGeom prst="rect">
+            <a:avLst/>
+          </a:prstGeom>
+          <a:noFill/>
+        </p:spPr>
+        <p:txBody>
+          <a:bodyPr wrap="square">
+            <a:spAutoFit/>
+          </a:bodyPr>
+          <a:lstStyle/>
+          <a:p>
+            <a:pPr>
+              <a:spcAft>
+                <a:spcPts val="900"/>
+              </a:spcAft>
+            </a:pPr>
+            <a:r>
+              <a:rPr sz="1700" b="0">
+                <a:solidFill>
+                  <a:srgbClr val="22252B"/>
+                </a:solidFill>
+                <a:latin typeface="Microsoft YaHei"/>
+              </a:rPr>
+              <a:t>任务：int max(int a, int b) { return a &gt; b ? a : b; }</a:t>
+            </a:r>
+          </a:p>
+          <a:p>
+            <a:pPr>
+              <a:spcAft>
+                <a:spcPts val="900"/>
+              </a:spcAft>
+            </a:pPr>
+            <a:r>
+              <a:rPr sz="2000" b="0">
+                <a:solidFill>
+                  <a:srgbClr val="22252B"/>
+                </a:solidFill>
+                <a:latin typeface="Microsoft YaHei"/>
+              </a:rPr>
+              <a:t>独立思考：不写真实汇编语法，只用文字描述 CPU 需要做哪几步。</a:t>
+            </a:r>
+          </a:p>
+          <a:p>
+            <a:pPr>
+              <a:spcAft>
+                <a:spcPts val="900"/>
+              </a:spcAft>
+            </a:pPr>
+            <a:r>
+              <a:rPr sz="2000" b="0">
+                <a:solidFill>
+                  <a:srgbClr val="22252B"/>
+                </a:solidFill>
+                <a:latin typeface="Microsoft YaHei"/>
+              </a:rPr>
+              <a:t>同桌讨论：重点讨论『比较』和『选择』在硬件层面可能对应什么动作。</a:t>
+            </a:r>
+          </a:p>
+          <a:p>
+            <a:pPr>
+              <a:spcAft>
+                <a:spcPts val="900"/>
+              </a:spcAft>
+            </a:pPr>
+            <a:r>
+              <a:rPr sz="2000" b="0">
+                <a:solidFill>
+                  <a:srgbClr val="22252B"/>
+                </a:solidFill>
+                <a:latin typeface="Microsoft YaHei"/>
+              </a:rPr>
+              <a:t>抽 1-2 人口头说明，为板块二的分支跳转指令做铺垫。</a:t>
+            </a:r>
+          </a:p>
+        </p:txBody>
+      </p:sp>
+    </p:spTree>
+  </p:cSld>
+  <p:clrMapOvr>
+    <a:masterClrMapping/>
+  </p:clrMapOvr>
+</p:sld>
+</file>
+
+<file path=ppt/slides/slide8.xml><?xml version="1.0" encoding="utf-8"?>
 <p:sld xmlns:a="http://schemas.openxmlformats.org/drawingml/2006/main" xmlns:p="http://schemas.openxmlformats.org/presentationml/2006/main" xmlns:r="http://schemas.openxmlformats.org/officeDocument/2006/relationships">
   <p:cSld>
     <p:bg>
@@ -9460,1220 +11884,6 @@
 </p:sld>
 </file>
 
-<file path=ppt/slides/slide6.xml><?xml version="1.0" encoding="utf-8"?>
-<p:sld xmlns:a="http://schemas.openxmlformats.org/drawingml/2006/main" xmlns:p="http://schemas.openxmlformats.org/presentationml/2006/main" xmlns:r="http://schemas.openxmlformats.org/officeDocument/2006/relationships">
-  <p:cSld>
-    <p:bg>
-      <p:bgPr>
-        <a:solidFill>
-          <a:srgbClr val="F8F9FB"/>
-        </a:solidFill>
-        <a:effectLst/>
-      </p:bgPr>
-    </p:bg>
-    <p:spTree>
-      <p:nvGrpSpPr>
-        <p:cNvPr id="1" name=""/>
-        <p:cNvGrpSpPr/>
-        <p:nvPr/>
-      </p:nvGrpSpPr>
-      <p:grpSpPr/>
-      <p:sp>
-        <p:nvSpPr>
-          <p:cNvPr id="2" name="TextBox 1"/>
-          <p:cNvSpPr txBox="1"/>
-          <p:nvPr/>
-        </p:nvSpPr>
-        <p:spPr>
-          <a:xfrm>
-            <a:off x="640080" y="256032"/>
-            <a:ext cx="2194560" cy="274320"/>
-          </a:xfrm>
-          <a:prstGeom prst="rect">
-            <a:avLst/>
-          </a:prstGeom>
-          <a:noFill/>
-        </p:spPr>
-        <p:txBody>
-          <a:bodyPr wrap="square">
-            <a:spAutoFit/>
-          </a:bodyPr>
-          <a:lstStyle/>
-          <a:p>
-            <a:pPr algn="l"/>
-            <a:r>
-              <a:rPr sz="1300" b="1">
-                <a:solidFill>
-                  <a:srgbClr val="1C53A0"/>
-                </a:solidFill>
-                <a:latin typeface="Microsoft YaHei"/>
-              </a:rPr>
-              <a:t>板块二</a:t>
-            </a:r>
-          </a:p>
-        </p:txBody>
-      </p:sp>
-      <p:sp>
-        <p:nvSpPr>
-          <p:cNvPr id="3" name="TextBox 2"/>
-          <p:cNvSpPr txBox="1"/>
-          <p:nvPr/>
-        </p:nvSpPr>
-        <p:spPr>
-          <a:xfrm>
-            <a:off x="640080" y="502920"/>
-            <a:ext cx="10972800" cy="530352"/>
-          </a:xfrm>
-          <a:prstGeom prst="rect">
-            <a:avLst/>
-          </a:prstGeom>
-          <a:noFill/>
-        </p:spPr>
-        <p:txBody>
-          <a:bodyPr wrap="square">
-            <a:spAutoFit/>
-          </a:bodyPr>
-          <a:lstStyle/>
-          <a:p>
-            <a:pPr algn="l"/>
-            <a:r>
-              <a:rPr sz="3000" b="1">
-                <a:solidFill>
-                  <a:srgbClr val="22252B"/>
-                </a:solidFill>
-                <a:latin typeface="Microsoft YaHei"/>
-              </a:rPr>
-              <a:t>基础指令例子</a:t>
-            </a:r>
-          </a:p>
-        </p:txBody>
-      </p:sp>
-      <p:sp>
-        <p:nvSpPr>
-          <p:cNvPr id="4" name="TextBox 3"/>
-          <p:cNvSpPr txBox="1"/>
-          <p:nvPr/>
-        </p:nvSpPr>
-        <p:spPr>
-          <a:xfrm>
-            <a:off x="658368" y="1042415"/>
-            <a:ext cx="10881360" cy="320040"/>
-          </a:xfrm>
-          <a:prstGeom prst="rect">
-            <a:avLst/>
-          </a:prstGeom>
-          <a:noFill/>
-        </p:spPr>
-        <p:txBody>
-          <a:bodyPr wrap="square">
-            <a:spAutoFit/>
-          </a:bodyPr>
-          <a:lstStyle/>
-          <a:p>
-            <a:pPr algn="l"/>
-            <a:r>
-              <a:rPr sz="1400" b="0">
-                <a:solidFill>
-                  <a:srgbClr val="5B6370"/>
-                </a:solidFill>
-                <a:latin typeface="Microsoft YaHei"/>
-              </a:rPr>
-              <a:t>先用 r 编号讲硬件动作，再映射到 ABI 别名；GNU 汇编器同时接受 $sp/$ra 这类别名，$sp 就是 r3。</a:t>
-            </a:r>
-          </a:p>
-        </p:txBody>
-      </p:sp>
-      <p:sp>
-        <p:nvSpPr>
-          <p:cNvPr id="5" name="Rectangle 4"/>
-          <p:cNvSpPr/>
-          <p:nvPr/>
-        </p:nvSpPr>
-        <p:spPr>
-          <a:xfrm>
-            <a:off x="640080" y="1353312"/>
-            <a:ext cx="10927080" cy="18288"/>
-          </a:xfrm>
-          <a:prstGeom prst="rect">
-            <a:avLst/>
-          </a:prstGeom>
-          <a:solidFill>
-            <a:srgbClr val="D8DDE6"/>
-          </a:solidFill>
-          <a:ln>
-            <a:noFill/>
-          </a:ln>
-        </p:spPr>
-        <p:style>
-          <a:lnRef idx="1">
-            <a:schemeClr val="accent1"/>
-          </a:lnRef>
-          <a:fillRef idx="3">
-            <a:schemeClr val="accent1"/>
-          </a:fillRef>
-          <a:effectRef idx="2">
-            <a:schemeClr val="accent1"/>
-          </a:effectRef>
-          <a:fontRef idx="minor">
-            <a:schemeClr val="lt1"/>
-          </a:fontRef>
-        </p:style>
-        <p:txBody>
-          <a:bodyPr rtlCol="0" anchor="ctr"/>
-          <a:lstStyle/>
-          <a:p>
-            <a:pPr algn="ctr"/>
-          </a:p>
-        </p:txBody>
-      </p:sp>
-      <p:sp>
-        <p:nvSpPr>
-          <p:cNvPr id="6" name="Rounded Rectangle 5"/>
-          <p:cNvSpPr/>
-          <p:nvPr/>
-        </p:nvSpPr>
-        <p:spPr>
-          <a:xfrm>
-            <a:off x="749808" y="1600200"/>
-            <a:ext cx="10716768" cy="4645152"/>
-          </a:xfrm>
-          <a:prstGeom prst="roundRect">
-            <a:avLst/>
-          </a:prstGeom>
-          <a:solidFill>
-            <a:srgbClr val="20242C"/>
-          </a:solidFill>
-          <a:ln>
-            <a:solidFill>
-              <a:srgbClr val="20242C"/>
-            </a:solidFill>
-          </a:ln>
-        </p:spPr>
-        <p:style>
-          <a:lnRef idx="1">
-            <a:schemeClr val="accent1"/>
-          </a:lnRef>
-          <a:fillRef idx="3">
-            <a:schemeClr val="accent1"/>
-          </a:fillRef>
-          <a:effectRef idx="2">
-            <a:schemeClr val="accent1"/>
-          </a:effectRef>
-          <a:fontRef idx="minor">
-            <a:schemeClr val="lt1"/>
-          </a:fontRef>
-        </p:style>
-        <p:txBody>
-          <a:bodyPr rtlCol="0" anchor="ctr" wrap="square" lIns="182880" rIns="182880" tIns="146304"/>
-          <a:lstStyle/>
-          <a:p>
-            <a:pPr algn="ctr"/>
-            <a:r>
-              <a:rPr sz="1300" b="0">
-                <a:solidFill>
-                  <a:srgbClr val="EEF1F6"/>
-                </a:solidFill>
-                <a:latin typeface="Consolas"/>
-              </a:rPr>
-              <a:t>addi.d  r3, r3, -32       # sp = sp - 32
-st.d    r1, r3, 24        # 保存 ra
-ld.d    r1, r3, 24        # 恢复 ra
-bne     r12, r0, L        # r12 != 0 时跳转
-bl      func              # 调用函数，返回地址写入 r1/ra
-jirl    r0, r1, 0         # 返回到 ra 指向的位置</a:t>
-            </a:r>
-          </a:p>
-        </p:txBody>
-      </p:sp>
-    </p:spTree>
-  </p:cSld>
-  <p:clrMapOvr>
-    <a:masterClrMapping/>
-  </p:clrMapOvr>
-</p:sld>
-</file>
-
-<file path=ppt/slides/slide7.xml><?xml version="1.0" encoding="utf-8"?>
-<p:sld xmlns:a="http://schemas.openxmlformats.org/drawingml/2006/main" xmlns:p="http://schemas.openxmlformats.org/presentationml/2006/main" xmlns:r="http://schemas.openxmlformats.org/officeDocument/2006/relationships">
-  <p:cSld>
-    <p:bg>
-      <p:bgPr>
-        <a:solidFill>
-          <a:srgbClr val="F8F9FB"/>
-        </a:solidFill>
-        <a:effectLst/>
-      </p:bgPr>
-    </p:bg>
-    <p:spTree>
-      <p:nvGrpSpPr>
-        <p:cNvPr id="1" name=""/>
-        <p:cNvGrpSpPr/>
-        <p:nvPr/>
-      </p:nvGrpSpPr>
-      <p:grpSpPr/>
-      <p:sp>
-        <p:nvSpPr>
-          <p:cNvPr id="2" name="TextBox 1"/>
-          <p:cNvSpPr txBox="1"/>
-          <p:nvPr/>
-        </p:nvSpPr>
-        <p:spPr>
-          <a:xfrm>
-            <a:off x="640080" y="256032"/>
-            <a:ext cx="2194560" cy="274320"/>
-          </a:xfrm>
-          <a:prstGeom prst="rect">
-            <a:avLst/>
-          </a:prstGeom>
-          <a:noFill/>
-        </p:spPr>
-        <p:txBody>
-          <a:bodyPr wrap="square">
-            <a:spAutoFit/>
-          </a:bodyPr>
-          <a:lstStyle/>
-          <a:p>
-            <a:pPr algn="l"/>
-            <a:r>
-              <a:rPr sz="1300" b="1">
-                <a:solidFill>
-                  <a:srgbClr val="1C53A0"/>
-                </a:solidFill>
-                <a:latin typeface="Microsoft YaHei"/>
-              </a:rPr>
-              <a:t>板块三</a:t>
-            </a:r>
-          </a:p>
-        </p:txBody>
-      </p:sp>
-      <p:sp>
-        <p:nvSpPr>
-          <p:cNvPr id="3" name="TextBox 2"/>
-          <p:cNvSpPr txBox="1"/>
-          <p:nvPr/>
-        </p:nvSpPr>
-        <p:spPr>
-          <a:xfrm>
-            <a:off x="640080" y="502920"/>
-            <a:ext cx="10972800" cy="530352"/>
-          </a:xfrm>
-          <a:prstGeom prst="rect">
-            <a:avLst/>
-          </a:prstGeom>
-          <a:noFill/>
-        </p:spPr>
-        <p:txBody>
-          <a:bodyPr wrap="square">
-            <a:spAutoFit/>
-          </a:bodyPr>
-          <a:lstStyle/>
-          <a:p>
-            <a:pPr algn="l"/>
-            <a:r>
-              <a:rPr sz="3000" b="1">
-                <a:solidFill>
-                  <a:srgbClr val="22252B"/>
-                </a:solidFill>
-                <a:latin typeface="Microsoft YaHei"/>
-              </a:rPr>
-              <a:t>编译流程，用到本实验里</a:t>
-            </a:r>
-          </a:p>
-        </p:txBody>
-      </p:sp>
-      <p:sp>
-        <p:nvSpPr>
-          <p:cNvPr id="4" name="TextBox 3"/>
-          <p:cNvSpPr txBox="1"/>
-          <p:nvPr/>
-        </p:nvSpPr>
-        <p:spPr>
-          <a:xfrm>
-            <a:off x="658368" y="1042415"/>
-            <a:ext cx="10881360" cy="320040"/>
-          </a:xfrm>
-          <a:prstGeom prst="rect">
-            <a:avLst/>
-          </a:prstGeom>
-          <a:noFill/>
-        </p:spPr>
-        <p:txBody>
-          <a:bodyPr wrap="square">
-            <a:spAutoFit/>
-          </a:bodyPr>
-          <a:lstStyle/>
-          <a:p>
-            <a:pPr algn="l"/>
-            <a:r>
-              <a:rPr sz="1400" b="0">
-                <a:solidFill>
-                  <a:srgbClr val="5B6370"/>
-                </a:solidFill>
-                <a:latin typeface="Microsoft YaHei"/>
-              </a:rPr>
-              <a:t>第 1 周只需要说出每一步的作用。</a:t>
-            </a:r>
-          </a:p>
-        </p:txBody>
-      </p:sp>
-      <p:sp>
-        <p:nvSpPr>
-          <p:cNvPr id="5" name="Rectangle 4"/>
-          <p:cNvSpPr/>
-          <p:nvPr/>
-        </p:nvSpPr>
-        <p:spPr>
-          <a:xfrm>
-            <a:off x="640080" y="1353312"/>
-            <a:ext cx="10927080" cy="18288"/>
-          </a:xfrm>
-          <a:prstGeom prst="rect">
-            <a:avLst/>
-          </a:prstGeom>
-          <a:solidFill>
-            <a:srgbClr val="D8DDE6"/>
-          </a:solidFill>
-          <a:ln>
-            <a:noFill/>
-          </a:ln>
-        </p:spPr>
-        <p:style>
-          <a:lnRef idx="1">
-            <a:schemeClr val="accent1"/>
-          </a:lnRef>
-          <a:fillRef idx="3">
-            <a:schemeClr val="accent1"/>
-          </a:fillRef>
-          <a:effectRef idx="2">
-            <a:schemeClr val="accent1"/>
-          </a:effectRef>
-          <a:fontRef idx="minor">
-            <a:schemeClr val="lt1"/>
-          </a:fontRef>
-        </p:style>
-        <p:txBody>
-          <a:bodyPr rtlCol="0" anchor="ctr"/>
-          <a:lstStyle/>
-          <a:p>
-            <a:pPr algn="ctr"/>
-          </a:p>
-        </p:txBody>
-      </p:sp>
-      <p:sp>
-        <p:nvSpPr>
-          <p:cNvPr id="6" name="Rounded Rectangle 5"/>
-          <p:cNvSpPr/>
-          <p:nvPr/>
-        </p:nvSpPr>
-        <p:spPr>
-          <a:xfrm>
-            <a:off x="566928" y="2148840"/>
-            <a:ext cx="2240280" cy="1600200"/>
-          </a:xfrm>
-          <a:prstGeom prst="roundRect">
-            <a:avLst/>
-          </a:prstGeom>
-          <a:solidFill>
-            <a:srgbClr val="FFFFFF"/>
-          </a:solidFill>
-          <a:ln>
-            <a:solidFill>
-              <a:srgbClr val="D8DDE6"/>
-            </a:solidFill>
-          </a:ln>
-        </p:spPr>
-        <p:style>
-          <a:lnRef idx="1">
-            <a:schemeClr val="accent1"/>
-          </a:lnRef>
-          <a:fillRef idx="3">
-            <a:schemeClr val="accent1"/>
-          </a:fillRef>
-          <a:effectRef idx="2">
-            <a:schemeClr val="accent1"/>
-          </a:effectRef>
-          <a:fontRef idx="minor">
-            <a:schemeClr val="lt1"/>
-          </a:fontRef>
-        </p:style>
-        <p:txBody>
-          <a:bodyPr rtlCol="0" anchor="ctr"/>
-          <a:lstStyle/>
-          <a:p>
-            <a:pPr algn="ctr"/>
-          </a:p>
-        </p:txBody>
-      </p:sp>
-      <p:sp>
-        <p:nvSpPr>
-          <p:cNvPr id="7" name="TextBox 6"/>
-          <p:cNvSpPr txBox="1"/>
-          <p:nvPr/>
-        </p:nvSpPr>
-        <p:spPr>
-          <a:xfrm>
-            <a:off x="713232" y="2313432"/>
-            <a:ext cx="1947672" cy="292608"/>
-          </a:xfrm>
-          <a:prstGeom prst="rect">
-            <a:avLst/>
-          </a:prstGeom>
-          <a:noFill/>
-        </p:spPr>
-        <p:txBody>
-          <a:bodyPr wrap="square">
-            <a:spAutoFit/>
-          </a:bodyPr>
-          <a:lstStyle/>
-          <a:p>
-            <a:pPr algn="ctr"/>
-            <a:r>
-              <a:rPr sz="1600" b="1">
-                <a:solidFill>
-                  <a:srgbClr val="2A7E4E"/>
-                </a:solidFill>
-                <a:latin typeface="Microsoft YaHei"/>
-              </a:rPr>
-              <a:t>.c/.S</a:t>
-            </a:r>
-          </a:p>
-        </p:txBody>
-      </p:sp>
-      <p:sp>
-        <p:nvSpPr>
-          <p:cNvPr id="8" name="TextBox 7"/>
-          <p:cNvSpPr txBox="1"/>
-          <p:nvPr/>
-        </p:nvSpPr>
-        <p:spPr>
-          <a:xfrm>
-            <a:off x="731520" y="2706624"/>
-            <a:ext cx="1911096" cy="749808"/>
-          </a:xfrm>
-          <a:prstGeom prst="rect">
-            <a:avLst/>
-          </a:prstGeom>
-          <a:noFill/>
-        </p:spPr>
-        <p:txBody>
-          <a:bodyPr wrap="square">
-            <a:spAutoFit/>
-          </a:bodyPr>
-          <a:lstStyle/>
-          <a:p>
-            <a:pPr algn="ctr"/>
-            <a:r>
-              <a:rPr sz="1300" b="0">
-                <a:solidFill>
-                  <a:srgbClr val="22252B"/>
-                </a:solidFill>
-                <a:latin typeface="Microsoft YaHei"/>
-              </a:rPr>
-              <a:t>源代码
-C 和汇编</a:t>
-            </a:r>
-          </a:p>
-        </p:txBody>
-      </p:sp>
-      <p:sp>
-        <p:nvSpPr>
-          <p:cNvPr id="9" name="TextBox 8"/>
-          <p:cNvSpPr txBox="1"/>
-          <p:nvPr/>
-        </p:nvSpPr>
-        <p:spPr>
-          <a:xfrm>
-            <a:off x="2990088" y="2743200"/>
-            <a:ext cx="228600" cy="274320"/>
-          </a:xfrm>
-          <a:prstGeom prst="rect">
-            <a:avLst/>
-          </a:prstGeom>
-          <a:noFill/>
-        </p:spPr>
-        <p:txBody>
-          <a:bodyPr wrap="square">
-            <a:spAutoFit/>
-          </a:bodyPr>
-          <a:lstStyle/>
-          <a:p>
-            <a:pPr algn="ctr"/>
-            <a:r>
-              <a:rPr sz="2000" b="1">
-                <a:solidFill>
-                  <a:srgbClr val="5B6370"/>
-                </a:solidFill>
-                <a:latin typeface="Microsoft YaHei"/>
-              </a:rPr>
-              <a:t>→</a:t>
-            </a:r>
-          </a:p>
-        </p:txBody>
-      </p:sp>
-      <p:sp>
-        <p:nvSpPr>
-          <p:cNvPr id="10" name="Rounded Rectangle 9"/>
-          <p:cNvSpPr/>
-          <p:nvPr/>
-        </p:nvSpPr>
-        <p:spPr>
-          <a:xfrm>
-            <a:off x="3035808" y="2148840"/>
-            <a:ext cx="2240280" cy="1600200"/>
-          </a:xfrm>
-          <a:prstGeom prst="roundRect">
-            <a:avLst/>
-          </a:prstGeom>
-          <a:solidFill>
-            <a:srgbClr val="FFFFFF"/>
-          </a:solidFill>
-          <a:ln>
-            <a:solidFill>
-              <a:srgbClr val="D8DDE6"/>
-            </a:solidFill>
-          </a:ln>
-        </p:spPr>
-        <p:style>
-          <a:lnRef idx="1">
-            <a:schemeClr val="accent1"/>
-          </a:lnRef>
-          <a:fillRef idx="3">
-            <a:schemeClr val="accent1"/>
-          </a:fillRef>
-          <a:effectRef idx="2">
-            <a:schemeClr val="accent1"/>
-          </a:effectRef>
-          <a:fontRef idx="minor">
-            <a:schemeClr val="lt1"/>
-          </a:fontRef>
-        </p:style>
-        <p:txBody>
-          <a:bodyPr rtlCol="0" anchor="ctr"/>
-          <a:lstStyle/>
-          <a:p>
-            <a:pPr algn="ctr"/>
-          </a:p>
-        </p:txBody>
-      </p:sp>
-      <p:sp>
-        <p:nvSpPr>
-          <p:cNvPr id="11" name="TextBox 10"/>
-          <p:cNvSpPr txBox="1"/>
-          <p:nvPr/>
-        </p:nvSpPr>
-        <p:spPr>
-          <a:xfrm>
-            <a:off x="3182112" y="2313432"/>
-            <a:ext cx="1947672" cy="292608"/>
-          </a:xfrm>
-          <a:prstGeom prst="rect">
-            <a:avLst/>
-          </a:prstGeom>
-          <a:noFill/>
-        </p:spPr>
-        <p:txBody>
-          <a:bodyPr wrap="square">
-            <a:spAutoFit/>
-          </a:bodyPr>
-          <a:lstStyle/>
-          <a:p>
-            <a:pPr algn="ctr"/>
-            <a:r>
-              <a:rPr sz="1600" b="1">
-                <a:solidFill>
-                  <a:srgbClr val="1C53A0"/>
-                </a:solidFill>
-                <a:latin typeface="Microsoft YaHei"/>
-              </a:rPr>
-              <a:t>编译</a:t>
-            </a:r>
-          </a:p>
-        </p:txBody>
-      </p:sp>
-      <p:sp>
-        <p:nvSpPr>
-          <p:cNvPr id="12" name="TextBox 11"/>
-          <p:cNvSpPr txBox="1"/>
-          <p:nvPr/>
-        </p:nvSpPr>
-        <p:spPr>
-          <a:xfrm>
-            <a:off x="3200400" y="2706624"/>
-            <a:ext cx="1911096" cy="749808"/>
-          </a:xfrm>
-          <a:prstGeom prst="rect">
-            <a:avLst/>
-          </a:prstGeom>
-          <a:noFill/>
-        </p:spPr>
-        <p:txBody>
-          <a:bodyPr wrap="square">
-            <a:spAutoFit/>
-          </a:bodyPr>
-          <a:lstStyle/>
-          <a:p>
-            <a:pPr algn="ctr"/>
-            <a:r>
-              <a:rPr sz="1300" b="0">
-                <a:solidFill>
-                  <a:srgbClr val="22252B"/>
-                </a:solidFill>
-                <a:latin typeface="Microsoft YaHei"/>
-              </a:rPr>
-              <a:t>生成目标文件
-处理 include</a:t>
-            </a:r>
-          </a:p>
-        </p:txBody>
-      </p:sp>
-      <p:sp>
-        <p:nvSpPr>
-          <p:cNvPr id="13" name="TextBox 12"/>
-          <p:cNvSpPr txBox="1"/>
-          <p:nvPr/>
-        </p:nvSpPr>
-        <p:spPr>
-          <a:xfrm>
-            <a:off x="5458968" y="2743200"/>
-            <a:ext cx="228600" cy="274320"/>
-          </a:xfrm>
-          <a:prstGeom prst="rect">
-            <a:avLst/>
-          </a:prstGeom>
-          <a:noFill/>
-        </p:spPr>
-        <p:txBody>
-          <a:bodyPr wrap="square">
-            <a:spAutoFit/>
-          </a:bodyPr>
-          <a:lstStyle/>
-          <a:p>
-            <a:pPr algn="ctr"/>
-            <a:r>
-              <a:rPr sz="2000" b="1">
-                <a:solidFill>
-                  <a:srgbClr val="5B6370"/>
-                </a:solidFill>
-                <a:latin typeface="Microsoft YaHei"/>
-              </a:rPr>
-              <a:t>→</a:t>
-            </a:r>
-          </a:p>
-        </p:txBody>
-      </p:sp>
-      <p:sp>
-        <p:nvSpPr>
-          <p:cNvPr id="14" name="Rounded Rectangle 13"/>
-          <p:cNvSpPr/>
-          <p:nvPr/>
-        </p:nvSpPr>
-        <p:spPr>
-          <a:xfrm>
-            <a:off x="5504688" y="2148840"/>
-            <a:ext cx="2240280" cy="1600200"/>
-          </a:xfrm>
-          <a:prstGeom prst="roundRect">
-            <a:avLst/>
-          </a:prstGeom>
-          <a:solidFill>
-            <a:srgbClr val="FFFFFF"/>
-          </a:solidFill>
-          <a:ln>
-            <a:solidFill>
-              <a:srgbClr val="D8DDE6"/>
-            </a:solidFill>
-          </a:ln>
-        </p:spPr>
-        <p:style>
-          <a:lnRef idx="1">
-            <a:schemeClr val="accent1"/>
-          </a:lnRef>
-          <a:fillRef idx="3">
-            <a:schemeClr val="accent1"/>
-          </a:fillRef>
-          <a:effectRef idx="2">
-            <a:schemeClr val="accent1"/>
-          </a:effectRef>
-          <a:fontRef idx="minor">
-            <a:schemeClr val="lt1"/>
-          </a:fontRef>
-        </p:style>
-        <p:txBody>
-          <a:bodyPr rtlCol="0" anchor="ctr"/>
-          <a:lstStyle/>
-          <a:p>
-            <a:pPr algn="ctr"/>
-          </a:p>
-        </p:txBody>
-      </p:sp>
-      <p:sp>
-        <p:nvSpPr>
-          <p:cNvPr id="15" name="TextBox 14"/>
-          <p:cNvSpPr txBox="1"/>
-          <p:nvPr/>
-        </p:nvSpPr>
-        <p:spPr>
-          <a:xfrm>
-            <a:off x="5650992" y="2313432"/>
-            <a:ext cx="1947672" cy="292608"/>
-          </a:xfrm>
-          <a:prstGeom prst="rect">
-            <a:avLst/>
-          </a:prstGeom>
-          <a:noFill/>
-        </p:spPr>
-        <p:txBody>
-          <a:bodyPr wrap="square">
-            <a:spAutoFit/>
-          </a:bodyPr>
-          <a:lstStyle/>
-          <a:p>
-            <a:pPr algn="ctr"/>
-            <a:r>
-              <a:rPr sz="1600" b="1">
-                <a:solidFill>
-                  <a:srgbClr val="B85F22"/>
-                </a:solidFill>
-                <a:latin typeface="Microsoft YaHei"/>
-              </a:rPr>
-              <a:t>链接</a:t>
-            </a:r>
-          </a:p>
-        </p:txBody>
-      </p:sp>
-      <p:sp>
-        <p:nvSpPr>
-          <p:cNvPr id="16" name="TextBox 15"/>
-          <p:cNvSpPr txBox="1"/>
-          <p:nvPr/>
-        </p:nvSpPr>
-        <p:spPr>
-          <a:xfrm>
-            <a:off x="5669280" y="2706624"/>
-            <a:ext cx="1911096" cy="749808"/>
-          </a:xfrm>
-          <a:prstGeom prst="rect">
-            <a:avLst/>
-          </a:prstGeom>
-          <a:noFill/>
-        </p:spPr>
-        <p:txBody>
-          <a:bodyPr wrap="square">
-            <a:spAutoFit/>
-          </a:bodyPr>
-          <a:lstStyle/>
-          <a:p>
-            <a:pPr algn="ctr"/>
-            <a:r>
-              <a:rPr sz="1300" b="0">
-                <a:solidFill>
-                  <a:srgbClr val="22252B"/>
-                </a:solidFill>
-                <a:latin typeface="Microsoft YaHei"/>
-              </a:rPr>
-              <a:t>合成 ELF
-确定地址入口</a:t>
-            </a:r>
-          </a:p>
-        </p:txBody>
-      </p:sp>
-      <p:sp>
-        <p:nvSpPr>
-          <p:cNvPr id="17" name="TextBox 16"/>
-          <p:cNvSpPr txBox="1"/>
-          <p:nvPr/>
-        </p:nvSpPr>
-        <p:spPr>
-          <a:xfrm>
-            <a:off x="7927848" y="2743200"/>
-            <a:ext cx="228600" cy="274320"/>
-          </a:xfrm>
-          <a:prstGeom prst="rect">
-            <a:avLst/>
-          </a:prstGeom>
-          <a:noFill/>
-        </p:spPr>
-        <p:txBody>
-          <a:bodyPr wrap="square">
-            <a:spAutoFit/>
-          </a:bodyPr>
-          <a:lstStyle/>
-          <a:p>
-            <a:pPr algn="ctr"/>
-            <a:r>
-              <a:rPr sz="2000" b="1">
-                <a:solidFill>
-                  <a:srgbClr val="5B6370"/>
-                </a:solidFill>
-                <a:latin typeface="Microsoft YaHei"/>
-              </a:rPr>
-              <a:t>→</a:t>
-            </a:r>
-          </a:p>
-        </p:txBody>
-      </p:sp>
-      <p:sp>
-        <p:nvSpPr>
-          <p:cNvPr id="18" name="Rounded Rectangle 17"/>
-          <p:cNvSpPr/>
-          <p:nvPr/>
-        </p:nvSpPr>
-        <p:spPr>
-          <a:xfrm>
-            <a:off x="7973568" y="2148840"/>
-            <a:ext cx="2240280" cy="1600200"/>
-          </a:xfrm>
-          <a:prstGeom prst="roundRect">
-            <a:avLst/>
-          </a:prstGeom>
-          <a:solidFill>
-            <a:srgbClr val="FFFFFF"/>
-          </a:solidFill>
-          <a:ln>
-            <a:solidFill>
-              <a:srgbClr val="D8DDE6"/>
-            </a:solidFill>
-          </a:ln>
-        </p:spPr>
-        <p:style>
-          <a:lnRef idx="1">
-            <a:schemeClr val="accent1"/>
-          </a:lnRef>
-          <a:fillRef idx="3">
-            <a:schemeClr val="accent1"/>
-          </a:fillRef>
-          <a:effectRef idx="2">
-            <a:schemeClr val="accent1"/>
-          </a:effectRef>
-          <a:fontRef idx="minor">
-            <a:schemeClr val="lt1"/>
-          </a:fontRef>
-        </p:style>
-        <p:txBody>
-          <a:bodyPr rtlCol="0" anchor="ctr"/>
-          <a:lstStyle/>
-          <a:p>
-            <a:pPr algn="ctr"/>
-          </a:p>
-        </p:txBody>
-      </p:sp>
-      <p:sp>
-        <p:nvSpPr>
-          <p:cNvPr id="19" name="TextBox 18"/>
-          <p:cNvSpPr txBox="1"/>
-          <p:nvPr/>
-        </p:nvSpPr>
-        <p:spPr>
-          <a:xfrm>
-            <a:off x="8119872" y="2313432"/>
-            <a:ext cx="1947672" cy="292608"/>
-          </a:xfrm>
-          <a:prstGeom prst="rect">
-            <a:avLst/>
-          </a:prstGeom>
-          <a:noFill/>
-        </p:spPr>
-        <p:txBody>
-          <a:bodyPr wrap="square">
-            <a:spAutoFit/>
-          </a:bodyPr>
-          <a:lstStyle/>
-          <a:p>
-            <a:pPr algn="ctr"/>
-            <a:r>
-              <a:rPr sz="1600" b="1">
-                <a:solidFill>
-                  <a:srgbClr val="007482"/>
-                </a:solidFill>
-                <a:latin typeface="Microsoft YaHei"/>
-              </a:rPr>
-              <a:t>QEMU</a:t>
-            </a:r>
-          </a:p>
-        </p:txBody>
-      </p:sp>
-      <p:sp>
-        <p:nvSpPr>
-          <p:cNvPr id="20" name="TextBox 19"/>
-          <p:cNvSpPr txBox="1"/>
-          <p:nvPr/>
-        </p:nvSpPr>
-        <p:spPr>
-          <a:xfrm>
-            <a:off x="8138160" y="2706624"/>
-            <a:ext cx="1911096" cy="749808"/>
-          </a:xfrm>
-          <a:prstGeom prst="rect">
-            <a:avLst/>
-          </a:prstGeom>
-          <a:noFill/>
-        </p:spPr>
-        <p:txBody>
-          <a:bodyPr wrap="square">
-            <a:spAutoFit/>
-          </a:bodyPr>
-          <a:lstStyle/>
-          <a:p>
-            <a:pPr algn="ctr"/>
-            <a:r>
-              <a:rPr sz="1300" b="0">
-                <a:solidFill>
-                  <a:srgbClr val="22252B"/>
-                </a:solidFill>
-                <a:latin typeface="Microsoft YaHei"/>
-              </a:rPr>
-              <a:t>加载内核
-开始执行</a:t>
-            </a:r>
-          </a:p>
-        </p:txBody>
-      </p:sp>
-    </p:spTree>
-  </p:cSld>
-  <p:clrMapOvr>
-    <a:masterClrMapping/>
-  </p:clrMapOvr>
-</p:sld>
-</file>
-
-<file path=ppt/slides/slide8.xml><?xml version="1.0" encoding="utf-8"?>
-<p:sld xmlns:a="http://schemas.openxmlformats.org/drawingml/2006/main" xmlns:p="http://schemas.openxmlformats.org/presentationml/2006/main" xmlns:r="http://schemas.openxmlformats.org/officeDocument/2006/relationships">
-  <p:cSld>
-    <p:bg>
-      <p:bgPr>
-        <a:solidFill>
-          <a:srgbClr val="F8F9FB"/>
-        </a:solidFill>
-        <a:effectLst/>
-      </p:bgPr>
-    </p:bg>
-    <p:spTree>
-      <p:nvGrpSpPr>
-        <p:cNvPr id="1" name=""/>
-        <p:cNvGrpSpPr/>
-        <p:nvPr/>
-      </p:nvGrpSpPr>
-      <p:grpSpPr/>
-      <p:sp>
-        <p:nvSpPr>
-          <p:cNvPr id="2" name="TextBox 1"/>
-          <p:cNvSpPr txBox="1"/>
-          <p:nvPr/>
-        </p:nvSpPr>
-        <p:spPr>
-          <a:xfrm>
-            <a:off x="640080" y="256032"/>
-            <a:ext cx="2194560" cy="274320"/>
-          </a:xfrm>
-          <a:prstGeom prst="rect">
-            <a:avLst/>
-          </a:prstGeom>
-          <a:noFill/>
-        </p:spPr>
-        <p:txBody>
-          <a:bodyPr wrap="square">
-            <a:spAutoFit/>
-          </a:bodyPr>
-          <a:lstStyle/>
-          <a:p>
-            <a:pPr algn="l"/>
-            <a:r>
-              <a:rPr sz="1300" b="1">
-                <a:solidFill>
-                  <a:srgbClr val="1C53A0"/>
-                </a:solidFill>
-                <a:latin typeface="Microsoft YaHei"/>
-              </a:rPr>
-              <a:t>板块三</a:t>
-            </a:r>
-          </a:p>
-        </p:txBody>
-      </p:sp>
-      <p:sp>
-        <p:nvSpPr>
-          <p:cNvPr id="3" name="TextBox 2"/>
-          <p:cNvSpPr txBox="1"/>
-          <p:nvPr/>
-        </p:nvSpPr>
-        <p:spPr>
-          <a:xfrm>
-            <a:off x="640080" y="502920"/>
-            <a:ext cx="10972800" cy="530352"/>
-          </a:xfrm>
-          <a:prstGeom prst="rect">
-            <a:avLst/>
-          </a:prstGeom>
-          <a:noFill/>
-        </p:spPr>
-        <p:txBody>
-          <a:bodyPr wrap="square">
-            <a:spAutoFit/>
-          </a:bodyPr>
-          <a:lstStyle/>
-          <a:p>
-            <a:pPr algn="l"/>
-            <a:r>
-              <a:rPr sz="3000" b="1">
-                <a:solidFill>
-                  <a:srgbClr val="22252B"/>
-                </a:solidFill>
-                <a:latin typeface="Microsoft YaHei"/>
-              </a:rPr>
-              <a:t>Makefile 语法速览</a:t>
-            </a:r>
-          </a:p>
-        </p:txBody>
-      </p:sp>
-      <p:sp>
-        <p:nvSpPr>
-          <p:cNvPr id="4" name="TextBox 3"/>
-          <p:cNvSpPr txBox="1"/>
-          <p:nvPr/>
-        </p:nvSpPr>
-        <p:spPr>
-          <a:xfrm>
-            <a:off x="658368" y="1042415"/>
-            <a:ext cx="10881360" cy="320040"/>
-          </a:xfrm>
-          <a:prstGeom prst="rect">
-            <a:avLst/>
-          </a:prstGeom>
-          <a:noFill/>
-        </p:spPr>
-        <p:txBody>
-          <a:bodyPr wrap="square">
-            <a:spAutoFit/>
-          </a:bodyPr>
-          <a:lstStyle/>
-          <a:p>
-            <a:pPr algn="l"/>
-            <a:r>
-              <a:rPr sz="1400" b="0">
-                <a:solidFill>
-                  <a:srgbClr val="5B6370"/>
-                </a:solidFill>
-                <a:latin typeface="Microsoft YaHei"/>
-              </a:rPr>
-              <a:t>先认识目标/依赖/命令三段式，再看本项目 Makefile 是怎么用这些语法的。</a:t>
-            </a:r>
-          </a:p>
-        </p:txBody>
-      </p:sp>
-      <p:sp>
-        <p:nvSpPr>
-          <p:cNvPr id="5" name="Rectangle 4"/>
-          <p:cNvSpPr/>
-          <p:nvPr/>
-        </p:nvSpPr>
-        <p:spPr>
-          <a:xfrm>
-            <a:off x="640080" y="1353312"/>
-            <a:ext cx="10927080" cy="18288"/>
-          </a:xfrm>
-          <a:prstGeom prst="rect">
-            <a:avLst/>
-          </a:prstGeom>
-          <a:solidFill>
-            <a:srgbClr val="D8DDE6"/>
-          </a:solidFill>
-          <a:ln>
-            <a:noFill/>
-          </a:ln>
-        </p:spPr>
-        <p:style>
-          <a:lnRef idx="1">
-            <a:schemeClr val="accent1"/>
-          </a:lnRef>
-          <a:fillRef idx="3">
-            <a:schemeClr val="accent1"/>
-          </a:fillRef>
-          <a:effectRef idx="2">
-            <a:schemeClr val="accent1"/>
-          </a:effectRef>
-          <a:fontRef idx="minor">
-            <a:schemeClr val="lt1"/>
-          </a:fontRef>
-        </p:style>
-        <p:txBody>
-          <a:bodyPr rtlCol="0" anchor="ctr"/>
-          <a:lstStyle/>
-          <a:p>
-            <a:pPr algn="ctr"/>
-          </a:p>
-        </p:txBody>
-      </p:sp>
-      <p:sp>
-        <p:nvSpPr>
-          <p:cNvPr id="6" name="Rounded Rectangle 5"/>
-          <p:cNvSpPr/>
-          <p:nvPr/>
-        </p:nvSpPr>
-        <p:spPr>
-          <a:xfrm>
-            <a:off x="749808" y="1600200"/>
-            <a:ext cx="10716768" cy="4645152"/>
-          </a:xfrm>
-          <a:prstGeom prst="roundRect">
-            <a:avLst/>
-          </a:prstGeom>
-          <a:solidFill>
-            <a:srgbClr val="20242C"/>
-          </a:solidFill>
-          <a:ln>
-            <a:solidFill>
-              <a:srgbClr val="20242C"/>
-            </a:solidFill>
-          </a:ln>
-        </p:spPr>
-        <p:style>
-          <a:lnRef idx="1">
-            <a:schemeClr val="accent1"/>
-          </a:lnRef>
-          <a:fillRef idx="3">
-            <a:schemeClr val="accent1"/>
-          </a:fillRef>
-          <a:effectRef idx="2">
-            <a:schemeClr val="accent1"/>
-          </a:effectRef>
-          <a:fontRef idx="minor">
-            <a:schemeClr val="lt1"/>
-          </a:fontRef>
-        </p:style>
-        <p:txBody>
-          <a:bodyPr rtlCol="0" anchor="ctr" wrap="square" lIns="182880" rIns="182880" tIns="146304"/>
-          <a:lstStyle/>
-          <a:p>
-            <a:pPr algn="ctr"/>
-            <a:r>
-              <a:rPr sz="1200" b="0">
-                <a:solidFill>
-                  <a:srgbClr val="EEF1F6"/>
-                </a:solidFill>
-                <a:latin typeface="Consolas"/>
-              </a:rPr>
-              <a:t># Makefile 最小语法结构（通用示例，不是本项目代码）
-目标: 依赖1 依赖2
-	命令              # 命令前必须是 Tab，不能是空格
-# 例子：把 hello.c 编译成 hello.o
-hello.o: hello.c
-	gcc -c hello.c -o hello.o
-CC := gcc            # := 立即展开赋值
-CFLAGS ?= -Wall       # ?= 只在变量还没被设置时才赋值
-.PHONY: clean         # 声明伪目标，clean 不是一个真实文件
-clean:
-	rm -f *.o</a:t>
-            </a:r>
-          </a:p>
-        </p:txBody>
-      </p:sp>
-    </p:spTree>
-  </p:cSld>
-  <p:clrMapOvr>
-    <a:masterClrMapping/>
-  </p:clrMapOvr>
-</p:sld>
-</file>
-
 <file path=ppt/slides/slide9.xml><?xml version="1.0" encoding="utf-8"?>
 <p:sld xmlns:a="http://schemas.openxmlformats.org/drawingml/2006/main" xmlns:p="http://schemas.openxmlformats.org/presentationml/2006/main" xmlns:r="http://schemas.openxmlformats.org/officeDocument/2006/relationships">
   <p:cSld>
@@ -10722,7 +11932,7 @@
                 </a:solidFill>
                 <a:latin typeface="Microsoft YaHei"/>
               </a:rPr>
-              <a:t>板块三</a:t>
+              <a:t>板块二</a:t>
             </a:r>
           </a:p>
         </p:txBody>
@@ -10757,49 +11967,14 @@
                 </a:solidFill>
                 <a:latin typeface="Microsoft YaHei"/>
               </a:rPr>
-              <a:t>Makefile 的核心含义</a:t>
-            </a:r>
-          </a:p>
-        </p:txBody>
-      </p:sp>
-      <p:sp>
-        <p:nvSpPr>
-          <p:cNvPr id="4" name="TextBox 3"/>
-          <p:cNvSpPr txBox="1"/>
-          <p:nvPr/>
-        </p:nvSpPr>
-        <p:spPr>
-          <a:xfrm>
-            <a:off x="658368" y="1042415"/>
-            <a:ext cx="10881360" cy="320040"/>
-          </a:xfrm>
-          <a:prstGeom prst="rect">
-            <a:avLst/>
-          </a:prstGeom>
-          <a:noFill/>
-        </p:spPr>
-        <p:txBody>
-          <a:bodyPr wrap="square">
-            <a:spAutoFit/>
-          </a:bodyPr>
-          <a:lstStyle/>
-          <a:p>
-            <a:pPr algn="l"/>
-            <a:r>
-              <a:rPr sz="1400" b="0">
-                <a:solidFill>
-                  <a:srgbClr val="5B6370"/>
-                </a:solidFill>
-                <a:latin typeface="Microsoft YaHei"/>
-              </a:rPr>
-              <a:t>不能用宿主机 x86_64 gcc 冒充 LoongArch 工具链。</a:t>
-            </a:r>
-          </a:p>
-        </p:txBody>
-      </p:sp>
-      <p:sp>
-        <p:nvSpPr>
-          <p:cNvPr id="5" name="Rectangle 4"/>
+              <a:t>打个比方：寄存器就像口袋</a:t>
+            </a:r>
+          </a:p>
+        </p:txBody>
+      </p:sp>
+      <p:sp>
+        <p:nvSpPr>
+          <p:cNvPr id="4" name="Rectangle 3"/>
           <p:cNvSpPr/>
           <p:nvPr/>
         </p:nvSpPr>
@@ -10842,59 +12017,87 @@
       </p:sp>
       <p:sp>
         <p:nvSpPr>
-          <p:cNvPr id="6" name="Rounded Rectangle 5"/>
-          <p:cNvSpPr/>
-          <p:nvPr/>
-        </p:nvSpPr>
-        <p:spPr>
-          <a:xfrm>
-            <a:off x="749808" y="1600200"/>
-            <a:ext cx="10716768" cy="4645152"/>
-          </a:xfrm>
-          <a:prstGeom prst="roundRect">
-            <a:avLst/>
-          </a:prstGeom>
-          <a:solidFill>
-            <a:srgbClr val="20242C"/>
-          </a:solidFill>
-          <a:ln>
-            <a:solidFill>
-              <a:srgbClr val="20242C"/>
-            </a:solidFill>
-          </a:ln>
-        </p:spPr>
-        <p:style>
-          <a:lnRef idx="1">
-            <a:schemeClr val="accent1"/>
-          </a:lnRef>
-          <a:fillRef idx="3">
-            <a:schemeClr val="accent1"/>
-          </a:fillRef>
-          <a:effectRef idx="2">
-            <a:schemeClr val="accent1"/>
-          </a:effectRef>
-          <a:fontRef idx="minor">
-            <a:schemeClr val="lt1"/>
-          </a:fontRef>
-        </p:style>
-        <p:txBody>
-          <a:bodyPr rtlCol="0" anchor="ctr" wrap="square" lIns="182880" rIns="182880" tIns="146304"/>
-          <a:lstStyle/>
-          <a:p>
-            <a:pPr algn="ctr"/>
-            <a:r>
-              <a:rPr sz="1300" b="0">
-                <a:solidFill>
-                  <a:srgbClr val="EEF1F6"/>
-                </a:solidFill>
-                <a:latin typeface="Consolas"/>
-              </a:rPr>
-              <a:t>CROSS_COMPILE ?= loongarch64-linux-gnu-
-CC      := $(CROSS_COMPILE)gcc
-OBJCOPY := $(CROSS_COMPILE)objcopy
-QEMU    ?= qemu-system-loongarch64
-TARGET  := build/minios.elf
-LDFLAGS := -T kernel/linker.ld -nostdlib -static</a:t>
+          <p:cNvPr id="5" name="TextBox 4"/>
+          <p:cNvSpPr txBox="1"/>
+          <p:nvPr/>
+        </p:nvSpPr>
+        <p:spPr>
+          <a:xfrm>
+            <a:off x="868680" y="1691640"/>
+            <a:ext cx="10469880" cy="4709160"/>
+          </a:xfrm>
+          <a:prstGeom prst="rect">
+            <a:avLst/>
+          </a:prstGeom>
+          <a:noFill/>
+        </p:spPr>
+        <p:txBody>
+          <a:bodyPr wrap="square">
+            <a:spAutoFit/>
+          </a:bodyPr>
+          <a:lstStyle/>
+          <a:p>
+            <a:pPr>
+              <a:spcAft>
+                <a:spcPts val="900"/>
+              </a:spcAft>
+            </a:pPr>
+            <a:r>
+              <a:rPr sz="2000" b="0">
+                <a:solidFill>
+                  <a:srgbClr val="22252B"/>
+                </a:solidFill>
+                <a:latin typeface="Microsoft YaHei"/>
+              </a:rPr>
+              <a:t>寄存器就像你随身衣服上的口袋：数量有限，但掏取速度最快。</a:t>
+            </a:r>
+          </a:p>
+          <a:p>
+            <a:pPr>
+              <a:spcAft>
+                <a:spcPts val="900"/>
+              </a:spcAft>
+            </a:pPr>
+            <a:r>
+              <a:rPr sz="2000" b="0">
+                <a:solidFill>
+                  <a:srgbClr val="22252B"/>
+                </a:solidFill>
+                <a:latin typeface="Microsoft YaHei"/>
+              </a:rPr>
+              <a:t>内存就像一个大仓库：能装的东西多得多，但要跑一趟去取，明显更慢。</a:t>
+            </a:r>
+          </a:p>
+          <a:p>
+            <a:pPr>
+              <a:spcAft>
+                <a:spcPts val="900"/>
+              </a:spcAft>
+            </a:pPr>
+            <a:r>
+              <a:rPr sz="1700" b="0">
+                <a:solidFill>
+                  <a:srgbClr val="22252B"/>
+                </a:solidFill>
+                <a:latin typeface="Microsoft YaHei"/>
+              </a:rPr>
+              <a:t>LoongArch 只有 32 个『口袋』（r0-r31），装不下的数据要临时存进『仓库』（内存/栈）。</a:t>
+            </a:r>
+          </a:p>
+          <a:p>
+            <a:pPr>
+              <a:spcAft>
+                <a:spcPts val="900"/>
+              </a:spcAft>
+            </a:pPr>
+            <a:r>
+              <a:rPr sz="1700" b="0">
+                <a:solidFill>
+                  <a:srgbClr val="22252B"/>
+                </a:solidFill>
+                <a:latin typeface="Microsoft YaHei"/>
+              </a:rPr>
+              <a:t>这就是为什么 boot/start.S 一开始要先准备好『仓库入口』（设置 $sp 指向栈）——口袋不够用时才用得上它。</a:t>
             </a:r>
           </a:p>
         </p:txBody>
